--- a/неделя-01/лекция-01.pptx
+++ b/неделя-01/лекция-01.pptx
@@ -20,9 +20,12 @@
     <p:sldId id="268" r:id="rId14"/>
     <p:sldId id="269" r:id="rId15"/>
     <p:sldId id="270" r:id="rId16"/>
+    <p:sldId id="271" r:id="rId17"/>
+    <p:sldId id="272" r:id="rId18"/>
+    <p:sldId id="273" r:id="rId19"/>
   </p:sldIdLst>
   <p:notesMasterIdLst>
-    <p:notesMasterId r:id="rId17"/>
+    <p:notesMasterId r:id="rId20"/>
   </p:notesMasterIdLst>
   <p:sldSz cx="12192000" cy="6858000"/>
   <p:notesSz cx="6858000" cy="12192000"/>
@@ -604,7 +607,7 @@
           <a:p>
             <a:r>
               <a:rPr lang="en-US" dirty="0"/>
-              <a:t>Ответ: первый — метрику берут по умолчанию, потом «AUC вырос, а бизнес нет».</a:t>
+              <a:t/>
             </a:r>
             <a:endParaRPr lang="en-US" dirty="0"/>
           </a:p>
@@ -692,7 +695,7 @@
           <a:p>
             <a:r>
               <a:rPr lang="en-US" dirty="0"/>
-              <a:t/>
+              <a:t>Ответ: первый — метрику берут по умолчанию, потом «AUC вырос, а бизнес нет».</a:t>
             </a:r>
             <a:endParaRPr lang="en-US" dirty="0"/>
           </a:p>
@@ -1068,6 +1071,270 @@
             <a:fld id="{F7021451-1387-4CA6-816F-3879F97B5CBC}" type="slidenum">
               <a:rPr lang="en-US"/>
               <a:t>15</a:t>
+            </a:fld>
+            <a:endParaRPr lang="en-US"/>
+          </a:p>
+        </p:txBody>
+      </p:sp>
+    </p:spTree>
+    <p:extLst>
+      <p:ext uri="{BB962C8B-B14F-4D97-AF65-F5344CB8AC3E}">
+        <p14:creationId xmlns:p14="http://schemas.microsoft.com/office/powerpoint/2010/main" val="1024086991"/>
+      </p:ext>
+    </p:extLst>
+  </p:cSld>
+  <p:clrMapOvr>
+    <a:masterClrMapping/>
+  </p:clrMapOvr>
+</p:notes>
+</file>
+
+<file path=ppt/notesSlides/notesSlide16.xml><?xml version="1.0" encoding="utf-8"?>
+<p:notes xmlns:a="http://schemas.openxmlformats.org/drawingml/2006/main" xmlns:r="http://schemas.openxmlformats.org/officeDocument/2006/relationships" xmlns:p="http://schemas.openxmlformats.org/presentationml/2006/main">
+  <p:cSld>
+    <p:spTree>
+      <p:nvGrpSpPr>
+        <p:cNvPr id="1" name=""/>
+        <p:cNvGrpSpPr/>
+        <p:nvPr/>
+      </p:nvGrpSpPr>
+      <p:grpSpPr>
+        <a:xfrm>
+          <a:off x="0" y="0"/>
+          <a:ext cx="0" cy="0"/>
+          <a:chOff x="0" y="0"/>
+          <a:chExt cx="0" cy="0"/>
+        </a:xfrm>
+      </p:grpSpPr>
+      <p:sp>
+        <p:nvSpPr>
+          <p:cNvPr id="2" name="Slide Image Placeholder 1"/>
+          <p:cNvSpPr>
+            <a:spLocks noGrp="1" noRot="1" noChangeAspect="1"/>
+          </p:cNvSpPr>
+          <p:nvPr>
+            <p:ph type="sldImg"/>
+          </p:nvPr>
+        </p:nvSpPr>
+        <p:spPr/>
+      </p:sp>
+      <p:sp>
+        <p:nvSpPr>
+          <p:cNvPr id="3" name="Notes Placeholder 2"/>
+          <p:cNvSpPr>
+            <a:spLocks noGrp="1"/>
+          </p:cNvSpPr>
+          <p:nvPr>
+            <p:ph type="body" idx="1"/>
+          </p:nvPr>
+        </p:nvSpPr>
+        <p:spPr/>
+        <p:txBody>
+          <a:bodyPr/>
+          <a:lstStyle/>
+          <a:p>
+            <a:r>
+              <a:rPr lang="en-US" dirty="0"/>
+              <a:t/>
+            </a:r>
+            <a:endParaRPr lang="en-US" dirty="0"/>
+          </a:p>
+        </p:txBody>
+      </p:sp>
+      <p:sp>
+        <p:nvSpPr>
+          <p:cNvPr id="4" name="Slide Number Placeholder 3"/>
+          <p:cNvSpPr>
+            <a:spLocks noGrp="1"/>
+          </p:cNvSpPr>
+          <p:nvPr>
+            <p:ph type="sldNum" sz="quarter" idx="10"/>
+          </p:nvPr>
+        </p:nvSpPr>
+        <p:spPr/>
+        <p:txBody>
+          <a:bodyPr/>
+          <a:lstStyle/>
+          <a:p>
+            <a:fld id="{F7021451-1387-4CA6-816F-3879F97B5CBC}" type="slidenum">
+              <a:rPr lang="en-US"/>
+              <a:t>16</a:t>
+            </a:fld>
+            <a:endParaRPr lang="en-US"/>
+          </a:p>
+        </p:txBody>
+      </p:sp>
+    </p:spTree>
+    <p:extLst>
+      <p:ext uri="{BB962C8B-B14F-4D97-AF65-F5344CB8AC3E}">
+        <p14:creationId xmlns:p14="http://schemas.microsoft.com/office/powerpoint/2010/main" val="1024086991"/>
+      </p:ext>
+    </p:extLst>
+  </p:cSld>
+  <p:clrMapOvr>
+    <a:masterClrMapping/>
+  </p:clrMapOvr>
+</p:notes>
+</file>
+
+<file path=ppt/notesSlides/notesSlide17.xml><?xml version="1.0" encoding="utf-8"?>
+<p:notes xmlns:a="http://schemas.openxmlformats.org/drawingml/2006/main" xmlns:r="http://schemas.openxmlformats.org/officeDocument/2006/relationships" xmlns:p="http://schemas.openxmlformats.org/presentationml/2006/main">
+  <p:cSld>
+    <p:spTree>
+      <p:nvGrpSpPr>
+        <p:cNvPr id="1" name=""/>
+        <p:cNvGrpSpPr/>
+        <p:nvPr/>
+      </p:nvGrpSpPr>
+      <p:grpSpPr>
+        <a:xfrm>
+          <a:off x="0" y="0"/>
+          <a:ext cx="0" cy="0"/>
+          <a:chOff x="0" y="0"/>
+          <a:chExt cx="0" cy="0"/>
+        </a:xfrm>
+      </p:grpSpPr>
+      <p:sp>
+        <p:nvSpPr>
+          <p:cNvPr id="2" name="Slide Image Placeholder 1"/>
+          <p:cNvSpPr>
+            <a:spLocks noGrp="1" noRot="1" noChangeAspect="1"/>
+          </p:cNvSpPr>
+          <p:nvPr>
+            <p:ph type="sldImg"/>
+          </p:nvPr>
+        </p:nvSpPr>
+        <p:spPr/>
+      </p:sp>
+      <p:sp>
+        <p:nvSpPr>
+          <p:cNvPr id="3" name="Notes Placeholder 2"/>
+          <p:cNvSpPr>
+            <a:spLocks noGrp="1"/>
+          </p:cNvSpPr>
+          <p:nvPr>
+            <p:ph type="body" idx="1"/>
+          </p:nvPr>
+        </p:nvSpPr>
+        <p:spPr/>
+        <p:txBody>
+          <a:bodyPr/>
+          <a:lstStyle/>
+          <a:p>
+            <a:r>
+              <a:rPr lang="en-US" dirty="0"/>
+              <a:t/>
+            </a:r>
+            <a:endParaRPr lang="en-US" dirty="0"/>
+          </a:p>
+        </p:txBody>
+      </p:sp>
+      <p:sp>
+        <p:nvSpPr>
+          <p:cNvPr id="4" name="Slide Number Placeholder 3"/>
+          <p:cNvSpPr>
+            <a:spLocks noGrp="1"/>
+          </p:cNvSpPr>
+          <p:nvPr>
+            <p:ph type="sldNum" sz="quarter" idx="10"/>
+          </p:nvPr>
+        </p:nvSpPr>
+        <p:spPr/>
+        <p:txBody>
+          <a:bodyPr/>
+          <a:lstStyle/>
+          <a:p>
+            <a:fld id="{F7021451-1387-4CA6-816F-3879F97B5CBC}" type="slidenum">
+              <a:rPr lang="en-US"/>
+              <a:t>17</a:t>
+            </a:fld>
+            <a:endParaRPr lang="en-US"/>
+          </a:p>
+        </p:txBody>
+      </p:sp>
+    </p:spTree>
+    <p:extLst>
+      <p:ext uri="{BB962C8B-B14F-4D97-AF65-F5344CB8AC3E}">
+        <p14:creationId xmlns:p14="http://schemas.microsoft.com/office/powerpoint/2010/main" val="1024086991"/>
+      </p:ext>
+    </p:extLst>
+  </p:cSld>
+  <p:clrMapOvr>
+    <a:masterClrMapping/>
+  </p:clrMapOvr>
+</p:notes>
+</file>
+
+<file path=ppt/notesSlides/notesSlide18.xml><?xml version="1.0" encoding="utf-8"?>
+<p:notes xmlns:a="http://schemas.openxmlformats.org/drawingml/2006/main" xmlns:r="http://schemas.openxmlformats.org/officeDocument/2006/relationships" xmlns:p="http://schemas.openxmlformats.org/presentationml/2006/main">
+  <p:cSld>
+    <p:spTree>
+      <p:nvGrpSpPr>
+        <p:cNvPr id="1" name=""/>
+        <p:cNvGrpSpPr/>
+        <p:nvPr/>
+      </p:nvGrpSpPr>
+      <p:grpSpPr>
+        <a:xfrm>
+          <a:off x="0" y="0"/>
+          <a:ext cx="0" cy="0"/>
+          <a:chOff x="0" y="0"/>
+          <a:chExt cx="0" cy="0"/>
+        </a:xfrm>
+      </p:grpSpPr>
+      <p:sp>
+        <p:nvSpPr>
+          <p:cNvPr id="2" name="Slide Image Placeholder 1"/>
+          <p:cNvSpPr>
+            <a:spLocks noGrp="1" noRot="1" noChangeAspect="1"/>
+          </p:cNvSpPr>
+          <p:nvPr>
+            <p:ph type="sldImg"/>
+          </p:nvPr>
+        </p:nvSpPr>
+        <p:spPr/>
+      </p:sp>
+      <p:sp>
+        <p:nvSpPr>
+          <p:cNvPr id="3" name="Notes Placeholder 2"/>
+          <p:cNvSpPr>
+            <a:spLocks noGrp="1"/>
+          </p:cNvSpPr>
+          <p:nvPr>
+            <p:ph type="body" idx="1"/>
+          </p:nvPr>
+        </p:nvSpPr>
+        <p:spPr/>
+        <p:txBody>
+          <a:bodyPr/>
+          <a:lstStyle/>
+          <a:p>
+            <a:r>
+              <a:rPr lang="en-US" dirty="0"/>
+              <a:t/>
+            </a:r>
+            <a:endParaRPr lang="en-US" dirty="0"/>
+          </a:p>
+        </p:txBody>
+      </p:sp>
+      <p:sp>
+        <p:nvSpPr>
+          <p:cNvPr id="4" name="Slide Number Placeholder 3"/>
+          <p:cNvSpPr>
+            <a:spLocks noGrp="1"/>
+          </p:cNvSpPr>
+          <p:nvPr>
+            <p:ph type="sldNum" sz="quarter" idx="10"/>
+          </p:nvPr>
+        </p:nvSpPr>
+        <p:spPr/>
+        <p:txBody>
+          <a:bodyPr/>
+          <a:lstStyle/>
+          <a:p>
+            <a:fld id="{F7021451-1387-4CA6-816F-3879F97B5CBC}" type="slidenum">
+              <a:rPr lang="en-US"/>
+              <a:t>18</a:t>
             </a:fld>
             <a:endParaRPr lang="en-US"/>
           </a:p>
@@ -3019,7 +3286,7 @@
                 <a:ea typeface="Arial" pitchFamily="34" charset="-122"/>
                 <a:cs typeface="Arial" pitchFamily="34" charset="-120"/>
               </a:rPr>
-              <a:t>РАЗНЫЕ ЖАНРЫ</a:t>
+              <a:t>ТИПЫ ЗАДАЧ АНАЛИТИКА</a:t>
             </a:r>
             <a:endParaRPr lang="en-US" sz="1200" dirty="0"/>
           </a:p>
@@ -3058,66 +3325,1714 @@
                 <a:ea typeface="Arial" pitchFamily="34" charset="-122"/>
                 <a:cs typeface="Arial" pitchFamily="34" charset="-120"/>
               </a:rPr>
-              <a:t>«Задача на Kaggle» и «вопрос бизнеса»</a:t>
+              <a:t>Пять жанров работы — и главная ошибка новичка в каждом</a:t>
             </a:r>
             <a:endParaRPr lang="en-US" sz="3000" dirty="0"/>
           </a:p>
         </p:txBody>
       </p:sp>
-      <p:sp>
-        <p:nvSpPr>
-          <p:cNvPr id="5" name="Text 3"/>
-          <p:cNvSpPr/>
-          <p:nvPr/>
-        </p:nvSpPr>
-        <p:spPr>
-          <a:xfrm>
-            <a:off x="548640" y="1783080"/>
-            <a:ext cx="91440" cy="91440"/>
-          </a:xfrm>
-          <a:prstGeom prst="rect">
-            <a:avLst/>
-          </a:prstGeom>
-          <a:noFill/>
-          <a:ln/>
-        </p:spPr>
-        <p:txBody>
-          <a:bodyPr wrap="square" lIns="0" tIns="0" rIns="0" bIns="0" rtlCol="0" anchor="ctr"/>
-          <a:lstStyle/>
-          <a:p>
-            <a:pPr indent="0" marL="0">
-              <a:buNone/>
-            </a:pPr>
-            <a:endParaRPr lang="en-US" dirty="0"/>
-          </a:p>
-        </p:txBody>
-      </p:sp>
-      <p:sp>
-        <p:nvSpPr>
-          <p:cNvPr id="6" name="Text 4"/>
-          <p:cNvSpPr/>
-          <p:nvPr/>
-        </p:nvSpPr>
-        <p:spPr>
-          <a:xfrm>
-            <a:off x="4297680" y="1783080"/>
-            <a:ext cx="2926080" cy="365760"/>
-          </a:xfrm>
-          <a:prstGeom prst="rect">
-            <a:avLst/>
-          </a:prstGeom>
-          <a:noFill/>
-          <a:ln/>
-        </p:spPr>
-        <p:txBody>
-          <a:bodyPr wrap="square" lIns="0" tIns="0" rIns="0" bIns="0" rtlCol="0" anchor="ctr"/>
-          <a:lstStyle/>
-          <a:p>
-            <a:pPr indent="0" marL="0">
-              <a:buNone/>
-            </a:pPr>
-            <a:r>
-              <a:rPr lang="en-US" sz="1500" b="1" spc="200" kern="0" dirty="0">
+      <p:graphicFrame>
+        <p:nvGraphicFramePr>
+          <p:cNvPr id="11" name="Table 0"/>
+          <p:cNvGraphicFramePr>
+            <a:graphicFrameLocks noGrp="1"/>
+          </p:cNvGraphicFramePr>
+          <p:nvPr>
+            <p:extLst>
+              <p:ext uri="{D42A27DB-BD31-4B8C-83A1-F6EECF244321}">
+                <p14:modId xmlns:p14="http://schemas.microsoft.com/office/powerpoint/2010/main" val="1579011935"/>
+              </p:ext>
+            </p:extLst>
+          </p:nvPr>
+        </p:nvGraphicFramePr>
+        <p:xfrm>
+          <a:off x="548640" y="1874520"/>
+          <a:ext cx="11091672" cy="914400"/>
+        </p:xfrm>
+        <a:graphic>
+          <a:graphicData uri="http://schemas.openxmlformats.org/drawingml/2006/table">
+            <a:tbl>
+              <a:tblPr/>
+              <a:tblGrid>
+                <a:gridCol w="2560320"/>
+                <a:gridCol w="2468880"/>
+                <a:gridCol w="2834640"/>
+                <a:gridCol w="3200400"/>
+              </a:tblGrid>
+              <a:tr h="603504">
+                <a:tc>
+                  <a:txBody>
+                    <a:bodyPr/>
+                    <a:lstStyle/>
+                    <a:p>
+                      <a:pPr indent="0" marL="0">
+                        <a:buNone/>
+                      </a:pPr>
+                      <a:r>
+                        <a:rPr lang="en-US" sz="1400" b="1" dirty="0">
+                          <a:solidFill>
+                            <a:srgbClr val="FFFFFF"/>
+                          </a:solidFill>
+                          <a:latin typeface="Arial" pitchFamily="34" charset="0"/>
+                          <a:ea typeface="Arial" pitchFamily="34" charset="-122"/>
+                          <a:cs typeface="Arial" pitchFamily="34" charset="-120"/>
+                        </a:rPr>
+                        <a:t>Жанр</a:t>
+                      </a:r>
+                      <a:endParaRPr lang="en-US" sz="1400" dirty="0">
+                        <a:latin typeface="Arial" charset="0"/>
+                        <a:ea typeface="Arial" charset="0"/>
+                        <a:cs typeface="Arial" charset="0"/>
+                      </a:endParaRPr>
+                    </a:p>
+                  </a:txBody>
+                  <a:tcPr marL="73152" marR="73152" marT="73152" marB="73152" anchor="ctr">
+                    <a:lnL w="12700" cap="flat" cmpd="sng" algn="ctr">
+                      <a:solidFill>
+                        <a:srgbClr val="D8E2DC"/>
+                      </a:solidFill>
+                      <a:prstDash val="solid"/>
+                      <a:round/>
+                      <a:headEnd type="none" w="med" len="med"/>
+                      <a:tailEnd type="none" w="med" len="med"/>
+                    </a:lnL>
+                    <a:lnR w="12700" cap="flat" cmpd="sng" algn="ctr">
+                      <a:solidFill>
+                        <a:srgbClr val="D8E2DC"/>
+                      </a:solidFill>
+                      <a:prstDash val="solid"/>
+                      <a:round/>
+                      <a:headEnd type="none" w="med" len="med"/>
+                      <a:tailEnd type="none" w="med" len="med"/>
+                    </a:lnR>
+                    <a:lnT w="12700" cap="flat" cmpd="sng" algn="ctr">
+                      <a:solidFill>
+                        <a:srgbClr val="D8E2DC"/>
+                      </a:solidFill>
+                      <a:prstDash val="solid"/>
+                      <a:round/>
+                      <a:headEnd type="none" w="med" len="med"/>
+                      <a:tailEnd type="none" w="med" len="med"/>
+                    </a:lnT>
+                    <a:lnB w="12700" cap="flat" cmpd="sng" algn="ctr">
+                      <a:solidFill>
+                        <a:srgbClr val="D8E2DC"/>
+                      </a:solidFill>
+                      <a:prstDash val="solid"/>
+                      <a:round/>
+                      <a:headEnd type="none" w="med" len="med"/>
+                      <a:tailEnd type="none" w="med" len="med"/>
+                    </a:lnB>
+                    <a:solidFill>
+                      <a:srgbClr val="1E6B47"/>
+                    </a:solidFill>
+                  </a:tcPr>
+                </a:tc>
+                <a:tc>
+                  <a:txBody>
+                    <a:bodyPr/>
+                    <a:lstStyle/>
+                    <a:p>
+                      <a:pPr indent="0" marL="0">
+                        <a:buNone/>
+                      </a:pPr>
+                      <a:r>
+                        <a:rPr lang="en-US" sz="1400" b="1" dirty="0">
+                          <a:solidFill>
+                            <a:srgbClr val="FFFFFF"/>
+                          </a:solidFill>
+                          <a:latin typeface="Arial" pitchFamily="34" charset="0"/>
+                          <a:ea typeface="Arial" pitchFamily="34" charset="-122"/>
+                          <a:cs typeface="Arial" pitchFamily="34" charset="-120"/>
+                        </a:rPr>
+                        <a:t>Вопрос</a:t>
+                      </a:r>
+                      <a:endParaRPr lang="en-US" sz="1400" dirty="0">
+                        <a:latin typeface="Arial" charset="0"/>
+                        <a:ea typeface="Arial" charset="0"/>
+                        <a:cs typeface="Arial" charset="0"/>
+                      </a:endParaRPr>
+                    </a:p>
+                  </a:txBody>
+                  <a:tcPr marL="73152" marR="73152" marT="73152" marB="73152" anchor="ctr">
+                    <a:lnL w="12700" cap="flat" cmpd="sng" algn="ctr">
+                      <a:solidFill>
+                        <a:srgbClr val="D8E2DC"/>
+                      </a:solidFill>
+                      <a:prstDash val="solid"/>
+                      <a:round/>
+                      <a:headEnd type="none" w="med" len="med"/>
+                      <a:tailEnd type="none" w="med" len="med"/>
+                    </a:lnL>
+                    <a:lnR w="12700" cap="flat" cmpd="sng" algn="ctr">
+                      <a:solidFill>
+                        <a:srgbClr val="D8E2DC"/>
+                      </a:solidFill>
+                      <a:prstDash val="solid"/>
+                      <a:round/>
+                      <a:headEnd type="none" w="med" len="med"/>
+                      <a:tailEnd type="none" w="med" len="med"/>
+                    </a:lnR>
+                    <a:lnT w="12700" cap="flat" cmpd="sng" algn="ctr">
+                      <a:solidFill>
+                        <a:srgbClr val="D8E2DC"/>
+                      </a:solidFill>
+                      <a:prstDash val="solid"/>
+                      <a:round/>
+                      <a:headEnd type="none" w="med" len="med"/>
+                      <a:tailEnd type="none" w="med" len="med"/>
+                    </a:lnT>
+                    <a:lnB w="12700" cap="flat" cmpd="sng" algn="ctr">
+                      <a:solidFill>
+                        <a:srgbClr val="D8E2DC"/>
+                      </a:solidFill>
+                      <a:prstDash val="solid"/>
+                      <a:round/>
+                      <a:headEnd type="none" w="med" len="med"/>
+                      <a:tailEnd type="none" w="med" len="med"/>
+                    </a:lnB>
+                    <a:solidFill>
+                      <a:srgbClr val="1E6B47"/>
+                    </a:solidFill>
+                  </a:tcPr>
+                </a:tc>
+                <a:tc>
+                  <a:txBody>
+                    <a:bodyPr/>
+                    <a:lstStyle/>
+                    <a:p>
+                      <a:pPr indent="0" marL="0">
+                        <a:buNone/>
+                      </a:pPr>
+                      <a:r>
+                        <a:rPr lang="en-US" sz="1400" b="1" dirty="0">
+                          <a:solidFill>
+                            <a:srgbClr val="FFFFFF"/>
+                          </a:solidFill>
+                          <a:latin typeface="Arial" pitchFamily="34" charset="0"/>
+                          <a:ea typeface="Arial" pitchFamily="34" charset="-122"/>
+                          <a:cs typeface="Arial" pitchFamily="34" charset="-120"/>
+                        </a:rPr>
+                        <a:t>Артефакт</a:t>
+                      </a:r>
+                      <a:endParaRPr lang="en-US" sz="1400" dirty="0">
+                        <a:latin typeface="Arial" charset="0"/>
+                        <a:ea typeface="Arial" charset="0"/>
+                        <a:cs typeface="Arial" charset="0"/>
+                      </a:endParaRPr>
+                    </a:p>
+                  </a:txBody>
+                  <a:tcPr marL="73152" marR="73152" marT="73152" marB="73152" anchor="ctr">
+                    <a:lnL w="12700" cap="flat" cmpd="sng" algn="ctr">
+                      <a:solidFill>
+                        <a:srgbClr val="D8E2DC"/>
+                      </a:solidFill>
+                      <a:prstDash val="solid"/>
+                      <a:round/>
+                      <a:headEnd type="none" w="med" len="med"/>
+                      <a:tailEnd type="none" w="med" len="med"/>
+                    </a:lnL>
+                    <a:lnR w="12700" cap="flat" cmpd="sng" algn="ctr">
+                      <a:solidFill>
+                        <a:srgbClr val="D8E2DC"/>
+                      </a:solidFill>
+                      <a:prstDash val="solid"/>
+                      <a:round/>
+                      <a:headEnd type="none" w="med" len="med"/>
+                      <a:tailEnd type="none" w="med" len="med"/>
+                    </a:lnR>
+                    <a:lnT w="12700" cap="flat" cmpd="sng" algn="ctr">
+                      <a:solidFill>
+                        <a:srgbClr val="D8E2DC"/>
+                      </a:solidFill>
+                      <a:prstDash val="solid"/>
+                      <a:round/>
+                      <a:headEnd type="none" w="med" len="med"/>
+                      <a:tailEnd type="none" w="med" len="med"/>
+                    </a:lnT>
+                    <a:lnB w="12700" cap="flat" cmpd="sng" algn="ctr">
+                      <a:solidFill>
+                        <a:srgbClr val="D8E2DC"/>
+                      </a:solidFill>
+                      <a:prstDash val="solid"/>
+                      <a:round/>
+                      <a:headEnd type="none" w="med" len="med"/>
+                      <a:tailEnd type="none" w="med" len="med"/>
+                    </a:lnB>
+                    <a:solidFill>
+                      <a:srgbClr val="1E6B47"/>
+                    </a:solidFill>
+                  </a:tcPr>
+                </a:tc>
+                <a:tc>
+                  <a:txBody>
+                    <a:bodyPr/>
+                    <a:lstStyle/>
+                    <a:p>
+                      <a:pPr indent="0" marL="0">
+                        <a:buNone/>
+                      </a:pPr>
+                      <a:r>
+                        <a:rPr lang="en-US" sz="1400" b="1" dirty="0">
+                          <a:solidFill>
+                            <a:srgbClr val="FFFFFF"/>
+                          </a:solidFill>
+                          <a:latin typeface="Arial" pitchFamily="34" charset="0"/>
+                          <a:ea typeface="Arial" pitchFamily="34" charset="-122"/>
+                          <a:cs typeface="Arial" pitchFamily="34" charset="-120"/>
+                        </a:rPr>
+                        <a:t>Ошибка новичка</a:t>
+                      </a:r>
+                      <a:endParaRPr lang="en-US" sz="1400" dirty="0">
+                        <a:latin typeface="Arial" charset="0"/>
+                        <a:ea typeface="Arial" charset="0"/>
+                        <a:cs typeface="Arial" charset="0"/>
+                      </a:endParaRPr>
+                    </a:p>
+                  </a:txBody>
+                  <a:tcPr marL="73152" marR="73152" marT="73152" marB="73152" anchor="ctr">
+                    <a:lnL w="12700" cap="flat" cmpd="sng" algn="ctr">
+                      <a:solidFill>
+                        <a:srgbClr val="D8E2DC"/>
+                      </a:solidFill>
+                      <a:prstDash val="solid"/>
+                      <a:round/>
+                      <a:headEnd type="none" w="med" len="med"/>
+                      <a:tailEnd type="none" w="med" len="med"/>
+                    </a:lnL>
+                    <a:lnR w="12700" cap="flat" cmpd="sng" algn="ctr">
+                      <a:solidFill>
+                        <a:srgbClr val="D8E2DC"/>
+                      </a:solidFill>
+                      <a:prstDash val="solid"/>
+                      <a:round/>
+                      <a:headEnd type="none" w="med" len="med"/>
+                      <a:tailEnd type="none" w="med" len="med"/>
+                    </a:lnR>
+                    <a:lnT w="12700" cap="flat" cmpd="sng" algn="ctr">
+                      <a:solidFill>
+                        <a:srgbClr val="D8E2DC"/>
+                      </a:solidFill>
+                      <a:prstDash val="solid"/>
+                      <a:round/>
+                      <a:headEnd type="none" w="med" len="med"/>
+                      <a:tailEnd type="none" w="med" len="med"/>
+                    </a:lnT>
+                    <a:lnB w="12700" cap="flat" cmpd="sng" algn="ctr">
+                      <a:solidFill>
+                        <a:srgbClr val="D8E2DC"/>
+                      </a:solidFill>
+                      <a:prstDash val="solid"/>
+                      <a:round/>
+                      <a:headEnd type="none" w="med" len="med"/>
+                      <a:tailEnd type="none" w="med" len="med"/>
+                    </a:lnB>
+                    <a:solidFill>
+                      <a:srgbClr val="1E6B47"/>
+                    </a:solidFill>
+                  </a:tcPr>
+                </a:tc>
+              </a:tr>
+              <a:tr h="603504">
+                <a:tc>
+                  <a:txBody>
+                    <a:bodyPr/>
+                    <a:lstStyle/>
+                    <a:p>
+                      <a:pPr indent="0" marL="0">
+                        <a:buNone/>
+                      </a:pPr>
+                      <a:r>
+                        <a:rPr lang="en-US" sz="1400" dirty="0">
+                          <a:solidFill>
+                            <a:srgbClr val="1A2420"/>
+                          </a:solidFill>
+                          <a:latin typeface="Arial" pitchFamily="34" charset="0"/>
+                          <a:ea typeface="Arial" pitchFamily="34" charset="-122"/>
+                          <a:cs typeface="Arial" pitchFamily="34" charset="-120"/>
+                        </a:rPr>
+                        <a:t>Дашборд</a:t>
+                      </a:r>
+                      <a:endParaRPr lang="en-US" sz="1400" dirty="0">
+                        <a:latin typeface="Arial" charset="0"/>
+                        <a:ea typeface="Arial" charset="0"/>
+                        <a:cs typeface="Arial" charset="0"/>
+                      </a:endParaRPr>
+                    </a:p>
+                  </a:txBody>
+                  <a:tcPr marL="73152" marR="73152" marT="73152" marB="73152" anchor="ctr">
+                    <a:lnL w="12700" cap="flat" cmpd="sng" algn="ctr">
+                      <a:solidFill>
+                        <a:srgbClr val="D8E2DC"/>
+                      </a:solidFill>
+                      <a:prstDash val="solid"/>
+                      <a:round/>
+                      <a:headEnd type="none" w="med" len="med"/>
+                      <a:tailEnd type="none" w="med" len="med"/>
+                    </a:lnL>
+                    <a:lnR w="12700" cap="flat" cmpd="sng" algn="ctr">
+                      <a:solidFill>
+                        <a:srgbClr val="D8E2DC"/>
+                      </a:solidFill>
+                      <a:prstDash val="solid"/>
+                      <a:round/>
+                      <a:headEnd type="none" w="med" len="med"/>
+                      <a:tailEnd type="none" w="med" len="med"/>
+                    </a:lnR>
+                    <a:lnT w="12700" cap="flat" cmpd="sng" algn="ctr">
+                      <a:solidFill>
+                        <a:srgbClr val="D8E2DC"/>
+                      </a:solidFill>
+                      <a:prstDash val="solid"/>
+                      <a:round/>
+                      <a:headEnd type="none" w="med" len="med"/>
+                      <a:tailEnd type="none" w="med" len="med"/>
+                    </a:lnT>
+                    <a:lnB w="12700" cap="flat" cmpd="sng" algn="ctr">
+                      <a:solidFill>
+                        <a:srgbClr val="D8E2DC"/>
+                      </a:solidFill>
+                      <a:prstDash val="solid"/>
+                      <a:round/>
+                      <a:headEnd type="none" w="med" len="med"/>
+                      <a:tailEnd type="none" w="med" len="med"/>
+                    </a:lnB>
+                    <a:solidFill>
+                      <a:srgbClr val="FFFFFF"/>
+                    </a:solidFill>
+                  </a:tcPr>
+                </a:tc>
+                <a:tc>
+                  <a:txBody>
+                    <a:bodyPr/>
+                    <a:lstStyle/>
+                    <a:p>
+                      <a:pPr indent="0" marL="0">
+                        <a:buNone/>
+                      </a:pPr>
+                      <a:r>
+                        <a:rPr lang="en-US" sz="1400" dirty="0">
+                          <a:solidFill>
+                            <a:srgbClr val="1A2420"/>
+                          </a:solidFill>
+                          <a:latin typeface="Arial" pitchFamily="34" charset="0"/>
+                          <a:ea typeface="Arial" pitchFamily="34" charset="-122"/>
+                          <a:cs typeface="Arial" pitchFamily="34" charset="-120"/>
+                        </a:rPr>
+                        <a:t>как дела?</a:t>
+                      </a:r>
+                      <a:endParaRPr lang="en-US" sz="1400" dirty="0">
+                        <a:latin typeface="Arial" charset="0"/>
+                        <a:ea typeface="Arial" charset="0"/>
+                        <a:cs typeface="Arial" charset="0"/>
+                      </a:endParaRPr>
+                    </a:p>
+                  </a:txBody>
+                  <a:tcPr marL="73152" marR="73152" marT="73152" marB="73152" anchor="ctr">
+                    <a:lnL w="12700" cap="flat" cmpd="sng" algn="ctr">
+                      <a:solidFill>
+                        <a:srgbClr val="D8E2DC"/>
+                      </a:solidFill>
+                      <a:prstDash val="solid"/>
+                      <a:round/>
+                      <a:headEnd type="none" w="med" len="med"/>
+                      <a:tailEnd type="none" w="med" len="med"/>
+                    </a:lnL>
+                    <a:lnR w="12700" cap="flat" cmpd="sng" algn="ctr">
+                      <a:solidFill>
+                        <a:srgbClr val="D8E2DC"/>
+                      </a:solidFill>
+                      <a:prstDash val="solid"/>
+                      <a:round/>
+                      <a:headEnd type="none" w="med" len="med"/>
+                      <a:tailEnd type="none" w="med" len="med"/>
+                    </a:lnR>
+                    <a:lnT w="12700" cap="flat" cmpd="sng" algn="ctr">
+                      <a:solidFill>
+                        <a:srgbClr val="D8E2DC"/>
+                      </a:solidFill>
+                      <a:prstDash val="solid"/>
+                      <a:round/>
+                      <a:headEnd type="none" w="med" len="med"/>
+                      <a:tailEnd type="none" w="med" len="med"/>
+                    </a:lnT>
+                    <a:lnB w="12700" cap="flat" cmpd="sng" algn="ctr">
+                      <a:solidFill>
+                        <a:srgbClr val="D8E2DC"/>
+                      </a:solidFill>
+                      <a:prstDash val="solid"/>
+                      <a:round/>
+                      <a:headEnd type="none" w="med" len="med"/>
+                      <a:tailEnd type="none" w="med" len="med"/>
+                    </a:lnB>
+                    <a:solidFill>
+                      <a:srgbClr val="FFFFFF"/>
+                    </a:solidFill>
+                  </a:tcPr>
+                </a:tc>
+                <a:tc>
+                  <a:txBody>
+                    <a:bodyPr/>
+                    <a:lstStyle/>
+                    <a:p>
+                      <a:pPr indent="0" marL="0">
+                        <a:buNone/>
+                      </a:pPr>
+                      <a:r>
+                        <a:rPr lang="en-US" sz="1400" dirty="0">
+                          <a:solidFill>
+                            <a:srgbClr val="1A2420"/>
+                          </a:solidFill>
+                          <a:latin typeface="Arial" pitchFamily="34" charset="0"/>
+                          <a:ea typeface="Arial" pitchFamily="34" charset="-122"/>
+                          <a:cs typeface="Arial" pitchFamily="34" charset="-120"/>
+                        </a:rPr>
+                        <a:t>витрина + графики</a:t>
+                      </a:r>
+                      <a:endParaRPr lang="en-US" sz="1400" dirty="0">
+                        <a:latin typeface="Arial" charset="0"/>
+                        <a:ea typeface="Arial" charset="0"/>
+                        <a:cs typeface="Arial" charset="0"/>
+                      </a:endParaRPr>
+                    </a:p>
+                  </a:txBody>
+                  <a:tcPr marL="73152" marR="73152" marT="73152" marB="73152" anchor="ctr">
+                    <a:lnL w="12700" cap="flat" cmpd="sng" algn="ctr">
+                      <a:solidFill>
+                        <a:srgbClr val="D8E2DC"/>
+                      </a:solidFill>
+                      <a:prstDash val="solid"/>
+                      <a:round/>
+                      <a:headEnd type="none" w="med" len="med"/>
+                      <a:tailEnd type="none" w="med" len="med"/>
+                    </a:lnL>
+                    <a:lnR w="12700" cap="flat" cmpd="sng" algn="ctr">
+                      <a:solidFill>
+                        <a:srgbClr val="D8E2DC"/>
+                      </a:solidFill>
+                      <a:prstDash val="solid"/>
+                      <a:round/>
+                      <a:headEnd type="none" w="med" len="med"/>
+                      <a:tailEnd type="none" w="med" len="med"/>
+                    </a:lnR>
+                    <a:lnT w="12700" cap="flat" cmpd="sng" algn="ctr">
+                      <a:solidFill>
+                        <a:srgbClr val="D8E2DC"/>
+                      </a:solidFill>
+                      <a:prstDash val="solid"/>
+                      <a:round/>
+                      <a:headEnd type="none" w="med" len="med"/>
+                      <a:tailEnd type="none" w="med" len="med"/>
+                    </a:lnT>
+                    <a:lnB w="12700" cap="flat" cmpd="sng" algn="ctr">
+                      <a:solidFill>
+                        <a:srgbClr val="D8E2DC"/>
+                      </a:solidFill>
+                      <a:prstDash val="solid"/>
+                      <a:round/>
+                      <a:headEnd type="none" w="med" len="med"/>
+                      <a:tailEnd type="none" w="med" len="med"/>
+                    </a:lnB>
+                    <a:solidFill>
+                      <a:srgbClr val="FFFFFF"/>
+                    </a:solidFill>
+                  </a:tcPr>
+                </a:tc>
+                <a:tc>
+                  <a:txBody>
+                    <a:bodyPr/>
+                    <a:lstStyle/>
+                    <a:p>
+                      <a:pPr indent="0" marL="0">
+                        <a:buNone/>
+                      </a:pPr>
+                      <a:r>
+                        <a:rPr lang="en-US" sz="1400" dirty="0">
+                          <a:solidFill>
+                            <a:srgbClr val="1A2420"/>
+                          </a:solidFill>
+                          <a:latin typeface="Arial" pitchFamily="34" charset="0"/>
+                          <a:ea typeface="Arial" pitchFamily="34" charset="-122"/>
+                          <a:cs typeface="Arial" pitchFamily="34" charset="-120"/>
+                        </a:rPr>
+                        <a:t>мониторить всё подряд</a:t>
+                      </a:r>
+                      <a:endParaRPr lang="en-US" sz="1400" dirty="0">
+                        <a:latin typeface="Arial" charset="0"/>
+                        <a:ea typeface="Arial" charset="0"/>
+                        <a:cs typeface="Arial" charset="0"/>
+                      </a:endParaRPr>
+                    </a:p>
+                  </a:txBody>
+                  <a:tcPr marL="73152" marR="73152" marT="73152" marB="73152" anchor="ctr">
+                    <a:lnL w="12700" cap="flat" cmpd="sng" algn="ctr">
+                      <a:solidFill>
+                        <a:srgbClr val="D8E2DC"/>
+                      </a:solidFill>
+                      <a:prstDash val="solid"/>
+                      <a:round/>
+                      <a:headEnd type="none" w="med" len="med"/>
+                      <a:tailEnd type="none" w="med" len="med"/>
+                    </a:lnL>
+                    <a:lnR w="12700" cap="flat" cmpd="sng" algn="ctr">
+                      <a:solidFill>
+                        <a:srgbClr val="D8E2DC"/>
+                      </a:solidFill>
+                      <a:prstDash val="solid"/>
+                      <a:round/>
+                      <a:headEnd type="none" w="med" len="med"/>
+                      <a:tailEnd type="none" w="med" len="med"/>
+                    </a:lnR>
+                    <a:lnT w="12700" cap="flat" cmpd="sng" algn="ctr">
+                      <a:solidFill>
+                        <a:srgbClr val="D8E2DC"/>
+                      </a:solidFill>
+                      <a:prstDash val="solid"/>
+                      <a:round/>
+                      <a:headEnd type="none" w="med" len="med"/>
+                      <a:tailEnd type="none" w="med" len="med"/>
+                    </a:lnT>
+                    <a:lnB w="12700" cap="flat" cmpd="sng" algn="ctr">
+                      <a:solidFill>
+                        <a:srgbClr val="D8E2DC"/>
+                      </a:solidFill>
+                      <a:prstDash val="solid"/>
+                      <a:round/>
+                      <a:headEnd type="none" w="med" len="med"/>
+                      <a:tailEnd type="none" w="med" len="med"/>
+                    </a:lnB>
+                    <a:solidFill>
+                      <a:srgbClr val="FFFFFF"/>
+                    </a:solidFill>
+                  </a:tcPr>
+                </a:tc>
+              </a:tr>
+              <a:tr h="603504">
+                <a:tc>
+                  <a:txBody>
+                    <a:bodyPr/>
+                    <a:lstStyle/>
+                    <a:p>
+                      <a:pPr indent="0" marL="0">
+                        <a:buNone/>
+                      </a:pPr>
+                      <a:r>
+                        <a:rPr lang="en-US" sz="1400" dirty="0">
+                          <a:solidFill>
+                            <a:srgbClr val="1A2420"/>
+                          </a:solidFill>
+                          <a:latin typeface="Arial" pitchFamily="34" charset="0"/>
+                          <a:ea typeface="Arial" pitchFamily="34" charset="-122"/>
+                          <a:cs typeface="Arial" pitchFamily="34" charset="-120"/>
+                        </a:rPr>
+                        <a:t>Ad-hoc</a:t>
+                      </a:r>
+                      <a:endParaRPr lang="en-US" sz="1400" dirty="0">
+                        <a:latin typeface="Arial" charset="0"/>
+                        <a:ea typeface="Arial" charset="0"/>
+                        <a:cs typeface="Arial" charset="0"/>
+                      </a:endParaRPr>
+                    </a:p>
+                  </a:txBody>
+                  <a:tcPr marL="73152" marR="73152" marT="73152" marB="73152" anchor="ctr">
+                    <a:lnL w="12700" cap="flat" cmpd="sng" algn="ctr">
+                      <a:solidFill>
+                        <a:srgbClr val="D8E2DC"/>
+                      </a:solidFill>
+                      <a:prstDash val="solid"/>
+                      <a:round/>
+                      <a:headEnd type="none" w="med" len="med"/>
+                      <a:tailEnd type="none" w="med" len="med"/>
+                    </a:lnL>
+                    <a:lnR w="12700" cap="flat" cmpd="sng" algn="ctr">
+                      <a:solidFill>
+                        <a:srgbClr val="D8E2DC"/>
+                      </a:solidFill>
+                      <a:prstDash val="solid"/>
+                      <a:round/>
+                      <a:headEnd type="none" w="med" len="med"/>
+                      <a:tailEnd type="none" w="med" len="med"/>
+                    </a:lnR>
+                    <a:lnT w="12700" cap="flat" cmpd="sng" algn="ctr">
+                      <a:solidFill>
+                        <a:srgbClr val="D8E2DC"/>
+                      </a:solidFill>
+                      <a:prstDash val="solid"/>
+                      <a:round/>
+                      <a:headEnd type="none" w="med" len="med"/>
+                      <a:tailEnd type="none" w="med" len="med"/>
+                    </a:lnT>
+                    <a:lnB w="12700" cap="flat" cmpd="sng" algn="ctr">
+                      <a:solidFill>
+                        <a:srgbClr val="D8E2DC"/>
+                      </a:solidFill>
+                      <a:prstDash val="solid"/>
+                      <a:round/>
+                      <a:headEnd type="none" w="med" len="med"/>
+                      <a:tailEnd type="none" w="med" len="med"/>
+                    </a:lnB>
+                    <a:solidFill>
+                      <a:srgbClr val="EDF4EF"/>
+                    </a:solidFill>
+                  </a:tcPr>
+                </a:tc>
+                <a:tc>
+                  <a:txBody>
+                    <a:bodyPr/>
+                    <a:lstStyle/>
+                    <a:p>
+                      <a:pPr indent="0" marL="0">
+                        <a:buNone/>
+                      </a:pPr>
+                      <a:r>
+                        <a:rPr lang="en-US" sz="1400" dirty="0">
+                          <a:solidFill>
+                            <a:srgbClr val="1A2420"/>
+                          </a:solidFill>
+                          <a:latin typeface="Arial" pitchFamily="34" charset="0"/>
+                          <a:ea typeface="Arial" pitchFamily="34" charset="-122"/>
+                          <a:cs typeface="Arial" pitchFamily="34" charset="-120"/>
+                        </a:rPr>
+                        <a:t>почему так вышло?</a:t>
+                      </a:r>
+                      <a:endParaRPr lang="en-US" sz="1400" dirty="0">
+                        <a:latin typeface="Arial" charset="0"/>
+                        <a:ea typeface="Arial" charset="0"/>
+                        <a:cs typeface="Arial" charset="0"/>
+                      </a:endParaRPr>
+                    </a:p>
+                  </a:txBody>
+                  <a:tcPr marL="73152" marR="73152" marT="73152" marB="73152" anchor="ctr">
+                    <a:lnL w="12700" cap="flat" cmpd="sng" algn="ctr">
+                      <a:solidFill>
+                        <a:srgbClr val="D8E2DC"/>
+                      </a:solidFill>
+                      <a:prstDash val="solid"/>
+                      <a:round/>
+                      <a:headEnd type="none" w="med" len="med"/>
+                      <a:tailEnd type="none" w="med" len="med"/>
+                    </a:lnL>
+                    <a:lnR w="12700" cap="flat" cmpd="sng" algn="ctr">
+                      <a:solidFill>
+                        <a:srgbClr val="D8E2DC"/>
+                      </a:solidFill>
+                      <a:prstDash val="solid"/>
+                      <a:round/>
+                      <a:headEnd type="none" w="med" len="med"/>
+                      <a:tailEnd type="none" w="med" len="med"/>
+                    </a:lnR>
+                    <a:lnT w="12700" cap="flat" cmpd="sng" algn="ctr">
+                      <a:solidFill>
+                        <a:srgbClr val="D8E2DC"/>
+                      </a:solidFill>
+                      <a:prstDash val="solid"/>
+                      <a:round/>
+                      <a:headEnd type="none" w="med" len="med"/>
+                      <a:tailEnd type="none" w="med" len="med"/>
+                    </a:lnT>
+                    <a:lnB w="12700" cap="flat" cmpd="sng" algn="ctr">
+                      <a:solidFill>
+                        <a:srgbClr val="D8E2DC"/>
+                      </a:solidFill>
+                      <a:prstDash val="solid"/>
+                      <a:round/>
+                      <a:headEnd type="none" w="med" len="med"/>
+                      <a:tailEnd type="none" w="med" len="med"/>
+                    </a:lnB>
+                    <a:solidFill>
+                      <a:srgbClr val="EDF4EF"/>
+                    </a:solidFill>
+                  </a:tcPr>
+                </a:tc>
+                <a:tc>
+                  <a:txBody>
+                    <a:bodyPr/>
+                    <a:lstStyle/>
+                    <a:p>
+                      <a:pPr indent="0" marL="0">
+                        <a:buNone/>
+                      </a:pPr>
+                      <a:r>
+                        <a:rPr lang="en-US" sz="1400" dirty="0">
+                          <a:solidFill>
+                            <a:srgbClr val="1A2420"/>
+                          </a:solidFill>
+                          <a:latin typeface="Arial" pitchFamily="34" charset="0"/>
+                          <a:ea typeface="Arial" pitchFamily="34" charset="-122"/>
+                          <a:cs typeface="Arial" pitchFamily="34" charset="-120"/>
+                        </a:rPr>
+                        <a:t>короткий ответ</a:t>
+                      </a:r>
+                      <a:endParaRPr lang="en-US" sz="1400" dirty="0">
+                        <a:latin typeface="Arial" charset="0"/>
+                        <a:ea typeface="Arial" charset="0"/>
+                        <a:cs typeface="Arial" charset="0"/>
+                      </a:endParaRPr>
+                    </a:p>
+                  </a:txBody>
+                  <a:tcPr marL="73152" marR="73152" marT="73152" marB="73152" anchor="ctr">
+                    <a:lnL w="12700" cap="flat" cmpd="sng" algn="ctr">
+                      <a:solidFill>
+                        <a:srgbClr val="D8E2DC"/>
+                      </a:solidFill>
+                      <a:prstDash val="solid"/>
+                      <a:round/>
+                      <a:headEnd type="none" w="med" len="med"/>
+                      <a:tailEnd type="none" w="med" len="med"/>
+                    </a:lnL>
+                    <a:lnR w="12700" cap="flat" cmpd="sng" algn="ctr">
+                      <a:solidFill>
+                        <a:srgbClr val="D8E2DC"/>
+                      </a:solidFill>
+                      <a:prstDash val="solid"/>
+                      <a:round/>
+                      <a:headEnd type="none" w="med" len="med"/>
+                      <a:tailEnd type="none" w="med" len="med"/>
+                    </a:lnR>
+                    <a:lnT w="12700" cap="flat" cmpd="sng" algn="ctr">
+                      <a:solidFill>
+                        <a:srgbClr val="D8E2DC"/>
+                      </a:solidFill>
+                      <a:prstDash val="solid"/>
+                      <a:round/>
+                      <a:headEnd type="none" w="med" len="med"/>
+                      <a:tailEnd type="none" w="med" len="med"/>
+                    </a:lnT>
+                    <a:lnB w="12700" cap="flat" cmpd="sng" algn="ctr">
+                      <a:solidFill>
+                        <a:srgbClr val="D8E2DC"/>
+                      </a:solidFill>
+                      <a:prstDash val="solid"/>
+                      <a:round/>
+                      <a:headEnd type="none" w="med" len="med"/>
+                      <a:tailEnd type="none" w="med" len="med"/>
+                    </a:lnB>
+                    <a:solidFill>
+                      <a:srgbClr val="EDF4EF"/>
+                    </a:solidFill>
+                  </a:tcPr>
+                </a:tc>
+                <a:tc>
+                  <a:txBody>
+                    <a:bodyPr/>
+                    <a:lstStyle/>
+                    <a:p>
+                      <a:pPr indent="0" marL="0">
+                        <a:buNone/>
+                      </a:pPr>
+                      <a:r>
+                        <a:rPr lang="en-US" sz="1400" dirty="0">
+                          <a:solidFill>
+                            <a:srgbClr val="1A2420"/>
+                          </a:solidFill>
+                          <a:latin typeface="Arial" pitchFamily="34" charset="0"/>
+                          <a:ea typeface="Arial" pitchFamily="34" charset="-122"/>
+                          <a:cs typeface="Arial" pitchFamily="34" charset="-120"/>
+                        </a:rPr>
+                        <a:t>ответить корреляцией</a:t>
+                      </a:r>
+                      <a:endParaRPr lang="en-US" sz="1400" dirty="0">
+                        <a:latin typeface="Arial" charset="0"/>
+                        <a:ea typeface="Arial" charset="0"/>
+                        <a:cs typeface="Arial" charset="0"/>
+                      </a:endParaRPr>
+                    </a:p>
+                  </a:txBody>
+                  <a:tcPr marL="73152" marR="73152" marT="73152" marB="73152" anchor="ctr">
+                    <a:lnL w="12700" cap="flat" cmpd="sng" algn="ctr">
+                      <a:solidFill>
+                        <a:srgbClr val="D8E2DC"/>
+                      </a:solidFill>
+                      <a:prstDash val="solid"/>
+                      <a:round/>
+                      <a:headEnd type="none" w="med" len="med"/>
+                      <a:tailEnd type="none" w="med" len="med"/>
+                    </a:lnL>
+                    <a:lnR w="12700" cap="flat" cmpd="sng" algn="ctr">
+                      <a:solidFill>
+                        <a:srgbClr val="D8E2DC"/>
+                      </a:solidFill>
+                      <a:prstDash val="solid"/>
+                      <a:round/>
+                      <a:headEnd type="none" w="med" len="med"/>
+                      <a:tailEnd type="none" w="med" len="med"/>
+                    </a:lnR>
+                    <a:lnT w="12700" cap="flat" cmpd="sng" algn="ctr">
+                      <a:solidFill>
+                        <a:srgbClr val="D8E2DC"/>
+                      </a:solidFill>
+                      <a:prstDash val="solid"/>
+                      <a:round/>
+                      <a:headEnd type="none" w="med" len="med"/>
+                      <a:tailEnd type="none" w="med" len="med"/>
+                    </a:lnT>
+                    <a:lnB w="12700" cap="flat" cmpd="sng" algn="ctr">
+                      <a:solidFill>
+                        <a:srgbClr val="D8E2DC"/>
+                      </a:solidFill>
+                      <a:prstDash val="solid"/>
+                      <a:round/>
+                      <a:headEnd type="none" w="med" len="med"/>
+                      <a:tailEnd type="none" w="med" len="med"/>
+                    </a:lnB>
+                    <a:solidFill>
+                      <a:srgbClr val="EDF4EF"/>
+                    </a:solidFill>
+                  </a:tcPr>
+                </a:tc>
+              </a:tr>
+              <a:tr h="603504">
+                <a:tc>
+                  <a:txBody>
+                    <a:bodyPr/>
+                    <a:lstStyle/>
+                    <a:p>
+                      <a:pPr indent="0" marL="0">
+                        <a:buNone/>
+                      </a:pPr>
+                      <a:r>
+                        <a:rPr lang="en-US" sz="1400" dirty="0">
+                          <a:solidFill>
+                            <a:srgbClr val="1A2420"/>
+                          </a:solidFill>
+                          <a:latin typeface="Arial" pitchFamily="34" charset="0"/>
+                          <a:ea typeface="Arial" pitchFamily="34" charset="-122"/>
+                          <a:cs typeface="Arial" pitchFamily="34" charset="-120"/>
+                        </a:rPr>
+                        <a:t>Исследование</a:t>
+                      </a:r>
+                      <a:endParaRPr lang="en-US" sz="1400" dirty="0">
+                        <a:latin typeface="Arial" charset="0"/>
+                        <a:ea typeface="Arial" charset="0"/>
+                        <a:cs typeface="Arial" charset="0"/>
+                      </a:endParaRPr>
+                    </a:p>
+                  </a:txBody>
+                  <a:tcPr marL="73152" marR="73152" marT="73152" marB="73152" anchor="ctr">
+                    <a:lnL w="12700" cap="flat" cmpd="sng" algn="ctr">
+                      <a:solidFill>
+                        <a:srgbClr val="D8E2DC"/>
+                      </a:solidFill>
+                      <a:prstDash val="solid"/>
+                      <a:round/>
+                      <a:headEnd type="none" w="med" len="med"/>
+                      <a:tailEnd type="none" w="med" len="med"/>
+                    </a:lnL>
+                    <a:lnR w="12700" cap="flat" cmpd="sng" algn="ctr">
+                      <a:solidFill>
+                        <a:srgbClr val="D8E2DC"/>
+                      </a:solidFill>
+                      <a:prstDash val="solid"/>
+                      <a:round/>
+                      <a:headEnd type="none" w="med" len="med"/>
+                      <a:tailEnd type="none" w="med" len="med"/>
+                    </a:lnR>
+                    <a:lnT w="12700" cap="flat" cmpd="sng" algn="ctr">
+                      <a:solidFill>
+                        <a:srgbClr val="D8E2DC"/>
+                      </a:solidFill>
+                      <a:prstDash val="solid"/>
+                      <a:round/>
+                      <a:headEnd type="none" w="med" len="med"/>
+                      <a:tailEnd type="none" w="med" len="med"/>
+                    </a:lnT>
+                    <a:lnB w="12700" cap="flat" cmpd="sng" algn="ctr">
+                      <a:solidFill>
+                        <a:srgbClr val="D8E2DC"/>
+                      </a:solidFill>
+                      <a:prstDash val="solid"/>
+                      <a:round/>
+                      <a:headEnd type="none" w="med" len="med"/>
+                      <a:tailEnd type="none" w="med" len="med"/>
+                    </a:lnB>
+                    <a:solidFill>
+                      <a:srgbClr val="FFFFFF"/>
+                    </a:solidFill>
+                  </a:tcPr>
+                </a:tc>
+                <a:tc>
+                  <a:txBody>
+                    <a:bodyPr/>
+                    <a:lstStyle/>
+                    <a:p>
+                      <a:pPr indent="0" marL="0">
+                        <a:buNone/>
+                      </a:pPr>
+                      <a:r>
+                        <a:rPr lang="en-US" sz="1400" dirty="0">
+                          <a:solidFill>
+                            <a:srgbClr val="1A2420"/>
+                          </a:solidFill>
+                          <a:latin typeface="Arial" pitchFamily="34" charset="0"/>
+                          <a:ea typeface="Arial" pitchFamily="34" charset="-122"/>
+                          <a:cs typeface="Arial" pitchFamily="34" charset="-120"/>
+                        </a:rPr>
+                        <a:t>как устроено?</a:t>
+                      </a:r>
+                      <a:endParaRPr lang="en-US" sz="1400" dirty="0">
+                        <a:latin typeface="Arial" charset="0"/>
+                        <a:ea typeface="Arial" charset="0"/>
+                        <a:cs typeface="Arial" charset="0"/>
+                      </a:endParaRPr>
+                    </a:p>
+                  </a:txBody>
+                  <a:tcPr marL="73152" marR="73152" marT="73152" marB="73152" anchor="ctr">
+                    <a:lnL w="12700" cap="flat" cmpd="sng" algn="ctr">
+                      <a:solidFill>
+                        <a:srgbClr val="D8E2DC"/>
+                      </a:solidFill>
+                      <a:prstDash val="solid"/>
+                      <a:round/>
+                      <a:headEnd type="none" w="med" len="med"/>
+                      <a:tailEnd type="none" w="med" len="med"/>
+                    </a:lnL>
+                    <a:lnR w="12700" cap="flat" cmpd="sng" algn="ctr">
+                      <a:solidFill>
+                        <a:srgbClr val="D8E2DC"/>
+                      </a:solidFill>
+                      <a:prstDash val="solid"/>
+                      <a:round/>
+                      <a:headEnd type="none" w="med" len="med"/>
+                      <a:tailEnd type="none" w="med" len="med"/>
+                    </a:lnR>
+                    <a:lnT w="12700" cap="flat" cmpd="sng" algn="ctr">
+                      <a:solidFill>
+                        <a:srgbClr val="D8E2DC"/>
+                      </a:solidFill>
+                      <a:prstDash val="solid"/>
+                      <a:round/>
+                      <a:headEnd type="none" w="med" len="med"/>
+                      <a:tailEnd type="none" w="med" len="med"/>
+                    </a:lnT>
+                    <a:lnB w="12700" cap="flat" cmpd="sng" algn="ctr">
+                      <a:solidFill>
+                        <a:srgbClr val="D8E2DC"/>
+                      </a:solidFill>
+                      <a:prstDash val="solid"/>
+                      <a:round/>
+                      <a:headEnd type="none" w="med" len="med"/>
+                      <a:tailEnd type="none" w="med" len="med"/>
+                    </a:lnB>
+                    <a:solidFill>
+                      <a:srgbClr val="FFFFFF"/>
+                    </a:solidFill>
+                  </a:tcPr>
+                </a:tc>
+                <a:tc>
+                  <a:txBody>
+                    <a:bodyPr/>
+                    <a:lstStyle/>
+                    <a:p>
+                      <a:pPr indent="0" marL="0">
+                        <a:buNone/>
+                      </a:pPr>
+                      <a:r>
+                        <a:rPr lang="en-US" sz="1400" dirty="0">
+                          <a:solidFill>
+                            <a:srgbClr val="1A2420"/>
+                          </a:solidFill>
+                          <a:latin typeface="Arial" pitchFamily="34" charset="0"/>
+                          <a:ea typeface="Arial" pitchFamily="34" charset="-122"/>
+                          <a:cs typeface="Arial" pitchFamily="34" charset="-120"/>
+                        </a:rPr>
+                        <a:t>инсайт + рекомендации</a:t>
+                      </a:r>
+                      <a:endParaRPr lang="en-US" sz="1400" dirty="0">
+                        <a:latin typeface="Arial" charset="0"/>
+                        <a:ea typeface="Arial" charset="0"/>
+                        <a:cs typeface="Arial" charset="0"/>
+                      </a:endParaRPr>
+                    </a:p>
+                  </a:txBody>
+                  <a:tcPr marL="73152" marR="73152" marT="73152" marB="73152" anchor="ctr">
+                    <a:lnL w="12700" cap="flat" cmpd="sng" algn="ctr">
+                      <a:solidFill>
+                        <a:srgbClr val="D8E2DC"/>
+                      </a:solidFill>
+                      <a:prstDash val="solid"/>
+                      <a:round/>
+                      <a:headEnd type="none" w="med" len="med"/>
+                      <a:tailEnd type="none" w="med" len="med"/>
+                    </a:lnL>
+                    <a:lnR w="12700" cap="flat" cmpd="sng" algn="ctr">
+                      <a:solidFill>
+                        <a:srgbClr val="D8E2DC"/>
+                      </a:solidFill>
+                      <a:prstDash val="solid"/>
+                      <a:round/>
+                      <a:headEnd type="none" w="med" len="med"/>
+                      <a:tailEnd type="none" w="med" len="med"/>
+                    </a:lnR>
+                    <a:lnT w="12700" cap="flat" cmpd="sng" algn="ctr">
+                      <a:solidFill>
+                        <a:srgbClr val="D8E2DC"/>
+                      </a:solidFill>
+                      <a:prstDash val="solid"/>
+                      <a:round/>
+                      <a:headEnd type="none" w="med" len="med"/>
+                      <a:tailEnd type="none" w="med" len="med"/>
+                    </a:lnT>
+                    <a:lnB w="12700" cap="flat" cmpd="sng" algn="ctr">
+                      <a:solidFill>
+                        <a:srgbClr val="D8E2DC"/>
+                      </a:solidFill>
+                      <a:prstDash val="solid"/>
+                      <a:round/>
+                      <a:headEnd type="none" w="med" len="med"/>
+                      <a:tailEnd type="none" w="med" len="med"/>
+                    </a:lnB>
+                    <a:solidFill>
+                      <a:srgbClr val="FFFFFF"/>
+                    </a:solidFill>
+                  </a:tcPr>
+                </a:tc>
+                <a:tc>
+                  <a:txBody>
+                    <a:bodyPr/>
+                    <a:lstStyle/>
+                    <a:p>
+                      <a:pPr indent="0" marL="0">
+                        <a:buNone/>
+                      </a:pPr>
+                      <a:r>
+                        <a:rPr lang="en-US" sz="1400" dirty="0">
+                          <a:solidFill>
+                            <a:srgbClr val="1A2420"/>
+                          </a:solidFill>
+                          <a:latin typeface="Arial" pitchFamily="34" charset="0"/>
+                          <a:ea typeface="Arial" pitchFamily="34" charset="-122"/>
+                          <a:cs typeface="Arial" pitchFamily="34" charset="-120"/>
+                        </a:rPr>
+                        <a:t>копать без связи с решением</a:t>
+                      </a:r>
+                      <a:endParaRPr lang="en-US" sz="1400" dirty="0">
+                        <a:latin typeface="Arial" charset="0"/>
+                        <a:ea typeface="Arial" charset="0"/>
+                        <a:cs typeface="Arial" charset="0"/>
+                      </a:endParaRPr>
+                    </a:p>
+                  </a:txBody>
+                  <a:tcPr marL="73152" marR="73152" marT="73152" marB="73152" anchor="ctr">
+                    <a:lnL w="12700" cap="flat" cmpd="sng" algn="ctr">
+                      <a:solidFill>
+                        <a:srgbClr val="D8E2DC"/>
+                      </a:solidFill>
+                      <a:prstDash val="solid"/>
+                      <a:round/>
+                      <a:headEnd type="none" w="med" len="med"/>
+                      <a:tailEnd type="none" w="med" len="med"/>
+                    </a:lnL>
+                    <a:lnR w="12700" cap="flat" cmpd="sng" algn="ctr">
+                      <a:solidFill>
+                        <a:srgbClr val="D8E2DC"/>
+                      </a:solidFill>
+                      <a:prstDash val="solid"/>
+                      <a:round/>
+                      <a:headEnd type="none" w="med" len="med"/>
+                      <a:tailEnd type="none" w="med" len="med"/>
+                    </a:lnR>
+                    <a:lnT w="12700" cap="flat" cmpd="sng" algn="ctr">
+                      <a:solidFill>
+                        <a:srgbClr val="D8E2DC"/>
+                      </a:solidFill>
+                      <a:prstDash val="solid"/>
+                      <a:round/>
+                      <a:headEnd type="none" w="med" len="med"/>
+                      <a:tailEnd type="none" w="med" len="med"/>
+                    </a:lnT>
+                    <a:lnB w="12700" cap="flat" cmpd="sng" algn="ctr">
+                      <a:solidFill>
+                        <a:srgbClr val="D8E2DC"/>
+                      </a:solidFill>
+                      <a:prstDash val="solid"/>
+                      <a:round/>
+                      <a:headEnd type="none" w="med" len="med"/>
+                      <a:tailEnd type="none" w="med" len="med"/>
+                    </a:lnB>
+                    <a:solidFill>
+                      <a:srgbClr val="FFFFFF"/>
+                    </a:solidFill>
+                  </a:tcPr>
+                </a:tc>
+              </a:tr>
+              <a:tr h="603504">
+                <a:tc>
+                  <a:txBody>
+                    <a:bodyPr/>
+                    <a:lstStyle/>
+                    <a:p>
+                      <a:pPr indent="0" marL="0">
+                        <a:buNone/>
+                      </a:pPr>
+                      <a:r>
+                        <a:rPr lang="en-US" sz="1400" dirty="0">
+                          <a:solidFill>
+                            <a:srgbClr val="1A2420"/>
+                          </a:solidFill>
+                          <a:latin typeface="Arial" pitchFamily="34" charset="0"/>
+                          <a:ea typeface="Arial" pitchFamily="34" charset="-122"/>
+                          <a:cs typeface="Arial" pitchFamily="34" charset="-120"/>
+                        </a:rPr>
+                        <a:t>Эксперимент</a:t>
+                      </a:r>
+                      <a:endParaRPr lang="en-US" sz="1400" dirty="0">
+                        <a:latin typeface="Arial" charset="0"/>
+                        <a:ea typeface="Arial" charset="0"/>
+                        <a:cs typeface="Arial" charset="0"/>
+                      </a:endParaRPr>
+                    </a:p>
+                  </a:txBody>
+                  <a:tcPr marL="73152" marR="73152" marT="73152" marB="73152" anchor="ctr">
+                    <a:lnL w="12700" cap="flat" cmpd="sng" algn="ctr">
+                      <a:solidFill>
+                        <a:srgbClr val="D8E2DC"/>
+                      </a:solidFill>
+                      <a:prstDash val="solid"/>
+                      <a:round/>
+                      <a:headEnd type="none" w="med" len="med"/>
+                      <a:tailEnd type="none" w="med" len="med"/>
+                    </a:lnL>
+                    <a:lnR w="12700" cap="flat" cmpd="sng" algn="ctr">
+                      <a:solidFill>
+                        <a:srgbClr val="D8E2DC"/>
+                      </a:solidFill>
+                      <a:prstDash val="solid"/>
+                      <a:round/>
+                      <a:headEnd type="none" w="med" len="med"/>
+                      <a:tailEnd type="none" w="med" len="med"/>
+                    </a:lnR>
+                    <a:lnT w="12700" cap="flat" cmpd="sng" algn="ctr">
+                      <a:solidFill>
+                        <a:srgbClr val="D8E2DC"/>
+                      </a:solidFill>
+                      <a:prstDash val="solid"/>
+                      <a:round/>
+                      <a:headEnd type="none" w="med" len="med"/>
+                      <a:tailEnd type="none" w="med" len="med"/>
+                    </a:lnT>
+                    <a:lnB w="12700" cap="flat" cmpd="sng" algn="ctr">
+                      <a:solidFill>
+                        <a:srgbClr val="D8E2DC"/>
+                      </a:solidFill>
+                      <a:prstDash val="solid"/>
+                      <a:round/>
+                      <a:headEnd type="none" w="med" len="med"/>
+                      <a:tailEnd type="none" w="med" len="med"/>
+                    </a:lnB>
+                    <a:solidFill>
+                      <a:srgbClr val="EDF4EF"/>
+                    </a:solidFill>
+                  </a:tcPr>
+                </a:tc>
+                <a:tc>
+                  <a:txBody>
+                    <a:bodyPr/>
+                    <a:lstStyle/>
+                    <a:p>
+                      <a:pPr indent="0" marL="0">
+                        <a:buNone/>
+                      </a:pPr>
+                      <a:r>
+                        <a:rPr lang="en-US" sz="1400" dirty="0">
+                          <a:solidFill>
+                            <a:srgbClr val="1A2420"/>
+                          </a:solidFill>
+                          <a:latin typeface="Arial" pitchFamily="34" charset="0"/>
+                          <a:ea typeface="Arial" pitchFamily="34" charset="-122"/>
+                          <a:cs typeface="Arial" pitchFamily="34" charset="-120"/>
+                        </a:rPr>
+                        <a:t>что изменит X?</a:t>
+                      </a:r>
+                      <a:endParaRPr lang="en-US" sz="1400" dirty="0">
+                        <a:latin typeface="Arial" charset="0"/>
+                        <a:ea typeface="Arial" charset="0"/>
+                        <a:cs typeface="Arial" charset="0"/>
+                      </a:endParaRPr>
+                    </a:p>
+                  </a:txBody>
+                  <a:tcPr marL="73152" marR="73152" marT="73152" marB="73152" anchor="ctr">
+                    <a:lnL w="12700" cap="flat" cmpd="sng" algn="ctr">
+                      <a:solidFill>
+                        <a:srgbClr val="D8E2DC"/>
+                      </a:solidFill>
+                      <a:prstDash val="solid"/>
+                      <a:round/>
+                      <a:headEnd type="none" w="med" len="med"/>
+                      <a:tailEnd type="none" w="med" len="med"/>
+                    </a:lnL>
+                    <a:lnR w="12700" cap="flat" cmpd="sng" algn="ctr">
+                      <a:solidFill>
+                        <a:srgbClr val="D8E2DC"/>
+                      </a:solidFill>
+                      <a:prstDash val="solid"/>
+                      <a:round/>
+                      <a:headEnd type="none" w="med" len="med"/>
+                      <a:tailEnd type="none" w="med" len="med"/>
+                    </a:lnR>
+                    <a:lnT w="12700" cap="flat" cmpd="sng" algn="ctr">
+                      <a:solidFill>
+                        <a:srgbClr val="D8E2DC"/>
+                      </a:solidFill>
+                      <a:prstDash val="solid"/>
+                      <a:round/>
+                      <a:headEnd type="none" w="med" len="med"/>
+                      <a:tailEnd type="none" w="med" len="med"/>
+                    </a:lnT>
+                    <a:lnB w="12700" cap="flat" cmpd="sng" algn="ctr">
+                      <a:solidFill>
+                        <a:srgbClr val="D8E2DC"/>
+                      </a:solidFill>
+                      <a:prstDash val="solid"/>
+                      <a:round/>
+                      <a:headEnd type="none" w="med" len="med"/>
+                      <a:tailEnd type="none" w="med" len="med"/>
+                    </a:lnB>
+                    <a:solidFill>
+                      <a:srgbClr val="EDF4EF"/>
+                    </a:solidFill>
+                  </a:tcPr>
+                </a:tc>
+                <a:tc>
+                  <a:txBody>
+                    <a:bodyPr/>
+                    <a:lstStyle/>
+                    <a:p>
+                      <a:pPr indent="0" marL="0">
+                        <a:buNone/>
+                      </a:pPr>
+                      <a:r>
+                        <a:rPr lang="en-US" sz="1400" dirty="0">
+                          <a:solidFill>
+                            <a:srgbClr val="1A2420"/>
+                          </a:solidFill>
+                          <a:latin typeface="Arial" pitchFamily="34" charset="0"/>
+                          <a:ea typeface="Arial" pitchFamily="34" charset="-122"/>
+                          <a:cs typeface="Arial" pitchFamily="34" charset="-120"/>
+                        </a:rPr>
+                        <a:t>вывод катить/не катить</a:t>
+                      </a:r>
+                      <a:endParaRPr lang="en-US" sz="1400" dirty="0">
+                        <a:latin typeface="Arial" charset="0"/>
+                        <a:ea typeface="Arial" charset="0"/>
+                        <a:cs typeface="Arial" charset="0"/>
+                      </a:endParaRPr>
+                    </a:p>
+                  </a:txBody>
+                  <a:tcPr marL="73152" marR="73152" marT="73152" marB="73152" anchor="ctr">
+                    <a:lnL w="12700" cap="flat" cmpd="sng" algn="ctr">
+                      <a:solidFill>
+                        <a:srgbClr val="D8E2DC"/>
+                      </a:solidFill>
+                      <a:prstDash val="solid"/>
+                      <a:round/>
+                      <a:headEnd type="none" w="med" len="med"/>
+                      <a:tailEnd type="none" w="med" len="med"/>
+                    </a:lnL>
+                    <a:lnR w="12700" cap="flat" cmpd="sng" algn="ctr">
+                      <a:solidFill>
+                        <a:srgbClr val="D8E2DC"/>
+                      </a:solidFill>
+                      <a:prstDash val="solid"/>
+                      <a:round/>
+                      <a:headEnd type="none" w="med" len="med"/>
+                      <a:tailEnd type="none" w="med" len="med"/>
+                    </a:lnR>
+                    <a:lnT w="12700" cap="flat" cmpd="sng" algn="ctr">
+                      <a:solidFill>
+                        <a:srgbClr val="D8E2DC"/>
+                      </a:solidFill>
+                      <a:prstDash val="solid"/>
+                      <a:round/>
+                      <a:headEnd type="none" w="med" len="med"/>
+                      <a:tailEnd type="none" w="med" len="med"/>
+                    </a:lnT>
+                    <a:lnB w="12700" cap="flat" cmpd="sng" algn="ctr">
+                      <a:solidFill>
+                        <a:srgbClr val="D8E2DC"/>
+                      </a:solidFill>
+                      <a:prstDash val="solid"/>
+                      <a:round/>
+                      <a:headEnd type="none" w="med" len="med"/>
+                      <a:tailEnd type="none" w="med" len="med"/>
+                    </a:lnB>
+                    <a:solidFill>
+                      <a:srgbClr val="EDF4EF"/>
+                    </a:solidFill>
+                  </a:tcPr>
+                </a:tc>
+                <a:tc>
+                  <a:txBody>
+                    <a:bodyPr/>
+                    <a:lstStyle/>
+                    <a:p>
+                      <a:pPr indent="0" marL="0">
+                        <a:buNone/>
+                      </a:pPr>
+                      <a:r>
+                        <a:rPr lang="en-US" sz="1400" dirty="0">
+                          <a:solidFill>
+                            <a:srgbClr val="1A2420"/>
+                          </a:solidFill>
+                          <a:latin typeface="Arial" pitchFamily="34" charset="0"/>
+                          <a:ea typeface="Arial" pitchFamily="34" charset="-122"/>
+                          <a:cs typeface="Arial" pitchFamily="34" charset="-120"/>
+                        </a:rPr>
+                        <a:t>оценивать по прокси</a:t>
+                      </a:r>
+                      <a:endParaRPr lang="en-US" sz="1400" dirty="0">
+                        <a:latin typeface="Arial" charset="0"/>
+                        <a:ea typeface="Arial" charset="0"/>
+                        <a:cs typeface="Arial" charset="0"/>
+                      </a:endParaRPr>
+                    </a:p>
+                  </a:txBody>
+                  <a:tcPr marL="73152" marR="73152" marT="73152" marB="73152" anchor="ctr">
+                    <a:lnL w="12700" cap="flat" cmpd="sng" algn="ctr">
+                      <a:solidFill>
+                        <a:srgbClr val="D8E2DC"/>
+                      </a:solidFill>
+                      <a:prstDash val="solid"/>
+                      <a:round/>
+                      <a:headEnd type="none" w="med" len="med"/>
+                      <a:tailEnd type="none" w="med" len="med"/>
+                    </a:lnL>
+                    <a:lnR w="12700" cap="flat" cmpd="sng" algn="ctr">
+                      <a:solidFill>
+                        <a:srgbClr val="D8E2DC"/>
+                      </a:solidFill>
+                      <a:prstDash val="solid"/>
+                      <a:round/>
+                      <a:headEnd type="none" w="med" len="med"/>
+                      <a:tailEnd type="none" w="med" len="med"/>
+                    </a:lnR>
+                    <a:lnT w="12700" cap="flat" cmpd="sng" algn="ctr">
+                      <a:solidFill>
+                        <a:srgbClr val="D8E2DC"/>
+                      </a:solidFill>
+                      <a:prstDash val="solid"/>
+                      <a:round/>
+                      <a:headEnd type="none" w="med" len="med"/>
+                      <a:tailEnd type="none" w="med" len="med"/>
+                    </a:lnT>
+                    <a:lnB w="12700" cap="flat" cmpd="sng" algn="ctr">
+                      <a:solidFill>
+                        <a:srgbClr val="D8E2DC"/>
+                      </a:solidFill>
+                      <a:prstDash val="solid"/>
+                      <a:round/>
+                      <a:headEnd type="none" w="med" len="med"/>
+                      <a:tailEnd type="none" w="med" len="med"/>
+                    </a:lnB>
+                    <a:solidFill>
+                      <a:srgbClr val="EDF4EF"/>
+                    </a:solidFill>
+                  </a:tcPr>
+                </a:tc>
+              </a:tr>
+              <a:tr h="603504">
+                <a:tc>
+                  <a:txBody>
+                    <a:bodyPr/>
+                    <a:lstStyle/>
+                    <a:p>
+                      <a:pPr indent="0" marL="0">
+                        <a:buNone/>
+                      </a:pPr>
+                      <a:r>
+                        <a:rPr lang="en-US" sz="1400" dirty="0">
+                          <a:solidFill>
+                            <a:srgbClr val="1A2420"/>
+                          </a:solidFill>
+                          <a:latin typeface="Arial" pitchFamily="34" charset="0"/>
+                          <a:ea typeface="Arial" pitchFamily="34" charset="-122"/>
+                          <a:cs typeface="Arial" pitchFamily="34" charset="-120"/>
+                        </a:rPr>
+                        <a:t>Аналитический проект</a:t>
+                      </a:r>
+                      <a:endParaRPr lang="en-US" sz="1400" dirty="0">
+                        <a:latin typeface="Arial" charset="0"/>
+                        <a:ea typeface="Arial" charset="0"/>
+                        <a:cs typeface="Arial" charset="0"/>
+                      </a:endParaRPr>
+                    </a:p>
+                  </a:txBody>
+                  <a:tcPr marL="73152" marR="73152" marT="73152" marB="73152" anchor="ctr">
+                    <a:lnL w="12700" cap="flat" cmpd="sng" algn="ctr">
+                      <a:solidFill>
+                        <a:srgbClr val="D8E2DC"/>
+                      </a:solidFill>
+                      <a:prstDash val="solid"/>
+                      <a:round/>
+                      <a:headEnd type="none" w="med" len="med"/>
+                      <a:tailEnd type="none" w="med" len="med"/>
+                    </a:lnL>
+                    <a:lnR w="12700" cap="flat" cmpd="sng" algn="ctr">
+                      <a:solidFill>
+                        <a:srgbClr val="D8E2DC"/>
+                      </a:solidFill>
+                      <a:prstDash val="solid"/>
+                      <a:round/>
+                      <a:headEnd type="none" w="med" len="med"/>
+                      <a:tailEnd type="none" w="med" len="med"/>
+                    </a:lnR>
+                    <a:lnT w="12700" cap="flat" cmpd="sng" algn="ctr">
+                      <a:solidFill>
+                        <a:srgbClr val="D8E2DC"/>
+                      </a:solidFill>
+                      <a:prstDash val="solid"/>
+                      <a:round/>
+                      <a:headEnd type="none" w="med" len="med"/>
+                      <a:tailEnd type="none" w="med" len="med"/>
+                    </a:lnT>
+                    <a:lnB w="12700" cap="flat" cmpd="sng" algn="ctr">
+                      <a:solidFill>
+                        <a:srgbClr val="D8E2DC"/>
+                      </a:solidFill>
+                      <a:prstDash val="solid"/>
+                      <a:round/>
+                      <a:headEnd type="none" w="med" len="med"/>
+                      <a:tailEnd type="none" w="med" len="med"/>
+                    </a:lnB>
+                    <a:solidFill>
+                      <a:srgbClr val="FFFFFF"/>
+                    </a:solidFill>
+                  </a:tcPr>
+                </a:tc>
+                <a:tc>
+                  <a:txBody>
+                    <a:bodyPr/>
+                    <a:lstStyle/>
+                    <a:p>
+                      <a:pPr indent="0" marL="0">
+                        <a:buNone/>
+                      </a:pPr>
+                      <a:r>
+                        <a:rPr lang="en-US" sz="1400" dirty="0">
+                          <a:solidFill>
+                            <a:srgbClr val="1A2420"/>
+                          </a:solidFill>
+                          <a:latin typeface="Arial" pitchFamily="34" charset="0"/>
+                          <a:ea typeface="Arial" pitchFamily="34" charset="-122"/>
+                          <a:cs typeface="Arial" pitchFamily="34" charset="-120"/>
+                        </a:rPr>
+                        <a:t>что делать?</a:t>
+                      </a:r>
+                      <a:endParaRPr lang="en-US" sz="1400" dirty="0">
+                        <a:latin typeface="Arial" charset="0"/>
+                        <a:ea typeface="Arial" charset="0"/>
+                        <a:cs typeface="Arial" charset="0"/>
+                      </a:endParaRPr>
+                    </a:p>
+                  </a:txBody>
+                  <a:tcPr marL="73152" marR="73152" marT="73152" marB="73152" anchor="ctr">
+                    <a:lnL w="12700" cap="flat" cmpd="sng" algn="ctr">
+                      <a:solidFill>
+                        <a:srgbClr val="D8E2DC"/>
+                      </a:solidFill>
+                      <a:prstDash val="solid"/>
+                      <a:round/>
+                      <a:headEnd type="none" w="med" len="med"/>
+                      <a:tailEnd type="none" w="med" len="med"/>
+                    </a:lnL>
+                    <a:lnR w="12700" cap="flat" cmpd="sng" algn="ctr">
+                      <a:solidFill>
+                        <a:srgbClr val="D8E2DC"/>
+                      </a:solidFill>
+                      <a:prstDash val="solid"/>
+                      <a:round/>
+                      <a:headEnd type="none" w="med" len="med"/>
+                      <a:tailEnd type="none" w="med" len="med"/>
+                    </a:lnR>
+                    <a:lnT w="12700" cap="flat" cmpd="sng" algn="ctr">
+                      <a:solidFill>
+                        <a:srgbClr val="D8E2DC"/>
+                      </a:solidFill>
+                      <a:prstDash val="solid"/>
+                      <a:round/>
+                      <a:headEnd type="none" w="med" len="med"/>
+                      <a:tailEnd type="none" w="med" len="med"/>
+                    </a:lnT>
+                    <a:lnB w="12700" cap="flat" cmpd="sng" algn="ctr">
+                      <a:solidFill>
+                        <a:srgbClr val="D8E2DC"/>
+                      </a:solidFill>
+                      <a:prstDash val="solid"/>
+                      <a:round/>
+                      <a:headEnd type="none" w="med" len="med"/>
+                      <a:tailEnd type="none" w="med" len="med"/>
+                    </a:lnB>
+                    <a:solidFill>
+                      <a:srgbClr val="FFFFFF"/>
+                    </a:solidFill>
+                  </a:tcPr>
+                </a:tc>
+                <a:tc>
+                  <a:txBody>
+                    <a:bodyPr/>
+                    <a:lstStyle/>
+                    <a:p>
+                      <a:pPr indent="0" marL="0">
+                        <a:buNone/>
+                      </a:pPr>
+                      <a:r>
+                        <a:rPr lang="en-US" sz="1400" dirty="0">
+                          <a:solidFill>
+                            <a:srgbClr val="1A2420"/>
+                          </a:solidFill>
+                          <a:latin typeface="Arial" pitchFamily="34" charset="0"/>
+                          <a:ea typeface="Arial" pitchFamily="34" charset="-122"/>
+                          <a:cs typeface="Arial" pitchFamily="34" charset="-120"/>
+                        </a:rPr>
+                        <a:t>модель + план + эффект</a:t>
+                      </a:r>
+                      <a:endParaRPr lang="en-US" sz="1400" dirty="0">
+                        <a:latin typeface="Arial" charset="0"/>
+                        <a:ea typeface="Arial" charset="0"/>
+                        <a:cs typeface="Arial" charset="0"/>
+                      </a:endParaRPr>
+                    </a:p>
+                  </a:txBody>
+                  <a:tcPr marL="73152" marR="73152" marT="73152" marB="73152" anchor="ctr">
+                    <a:lnL w="12700" cap="flat" cmpd="sng" algn="ctr">
+                      <a:solidFill>
+                        <a:srgbClr val="D8E2DC"/>
+                      </a:solidFill>
+                      <a:prstDash val="solid"/>
+                      <a:round/>
+                      <a:headEnd type="none" w="med" len="med"/>
+                      <a:tailEnd type="none" w="med" len="med"/>
+                    </a:lnL>
+                    <a:lnR w="12700" cap="flat" cmpd="sng" algn="ctr">
+                      <a:solidFill>
+                        <a:srgbClr val="D8E2DC"/>
+                      </a:solidFill>
+                      <a:prstDash val="solid"/>
+                      <a:round/>
+                      <a:headEnd type="none" w="med" len="med"/>
+                      <a:tailEnd type="none" w="med" len="med"/>
+                    </a:lnR>
+                    <a:lnT w="12700" cap="flat" cmpd="sng" algn="ctr">
+                      <a:solidFill>
+                        <a:srgbClr val="D8E2DC"/>
+                      </a:solidFill>
+                      <a:prstDash val="solid"/>
+                      <a:round/>
+                      <a:headEnd type="none" w="med" len="med"/>
+                      <a:tailEnd type="none" w="med" len="med"/>
+                    </a:lnT>
+                    <a:lnB w="12700" cap="flat" cmpd="sng" algn="ctr">
+                      <a:solidFill>
+                        <a:srgbClr val="D8E2DC"/>
+                      </a:solidFill>
+                      <a:prstDash val="solid"/>
+                      <a:round/>
+                      <a:headEnd type="none" w="med" len="med"/>
+                      <a:tailEnd type="none" w="med" len="med"/>
+                    </a:lnB>
+                    <a:solidFill>
+                      <a:srgbClr val="FFFFFF"/>
+                    </a:solidFill>
+                  </a:tcPr>
+                </a:tc>
+                <a:tc>
+                  <a:txBody>
+                    <a:bodyPr/>
+                    <a:lstStyle/>
+                    <a:p>
+                      <a:pPr indent="0" marL="0">
+                        <a:buNone/>
+                      </a:pPr>
+                      <a:r>
+                        <a:rPr lang="en-US" sz="1400" dirty="0">
+                          <a:solidFill>
+                            <a:srgbClr val="1A2420"/>
+                          </a:solidFill>
+                          <a:latin typeface="Arial" pitchFamily="34" charset="0"/>
+                          <a:ea typeface="Arial" pitchFamily="34" charset="-122"/>
+                          <a:cs typeface="Arial" pitchFamily="34" charset="-120"/>
+                        </a:rPr>
+                        <a:t>сделать модель вместо ответа</a:t>
+                      </a:r>
+                      <a:endParaRPr lang="en-US" sz="1400" dirty="0">
+                        <a:latin typeface="Arial" charset="0"/>
+                        <a:ea typeface="Arial" charset="0"/>
+                        <a:cs typeface="Arial" charset="0"/>
+                      </a:endParaRPr>
+                    </a:p>
+                  </a:txBody>
+                  <a:tcPr marL="73152" marR="73152" marT="73152" marB="73152" anchor="ctr">
+                    <a:lnL w="12700" cap="flat" cmpd="sng" algn="ctr">
+                      <a:solidFill>
+                        <a:srgbClr val="D8E2DC"/>
+                      </a:solidFill>
+                      <a:prstDash val="solid"/>
+                      <a:round/>
+                      <a:headEnd type="none" w="med" len="med"/>
+                      <a:tailEnd type="none" w="med" len="med"/>
+                    </a:lnL>
+                    <a:lnR w="12700" cap="flat" cmpd="sng" algn="ctr">
+                      <a:solidFill>
+                        <a:srgbClr val="D8E2DC"/>
+                      </a:solidFill>
+                      <a:prstDash val="solid"/>
+                      <a:round/>
+                      <a:headEnd type="none" w="med" len="med"/>
+                      <a:tailEnd type="none" w="med" len="med"/>
+                    </a:lnR>
+                    <a:lnT w="12700" cap="flat" cmpd="sng" algn="ctr">
+                      <a:solidFill>
+                        <a:srgbClr val="D8E2DC"/>
+                      </a:solidFill>
+                      <a:prstDash val="solid"/>
+                      <a:round/>
+                      <a:headEnd type="none" w="med" len="med"/>
+                      <a:tailEnd type="none" w="med" len="med"/>
+                    </a:lnT>
+                    <a:lnB w="12700" cap="flat" cmpd="sng" algn="ctr">
+                      <a:solidFill>
+                        <a:srgbClr val="D8E2DC"/>
+                      </a:solidFill>
+                      <a:prstDash val="solid"/>
+                      <a:round/>
+                      <a:headEnd type="none" w="med" len="med"/>
+                      <a:tailEnd type="none" w="med" len="med"/>
+                    </a:lnB>
+                    <a:solidFill>
+                      <a:srgbClr val="FFFFFF"/>
+                    </a:solidFill>
+                  </a:tcPr>
+                </a:tc>
+              </a:tr>
+            </a:tbl>
+          </a:graphicData>
+        </a:graphic>
+      </p:graphicFrame>
+      <p:sp>
+        <p:nvSpPr>
+          <p:cNvPr id="6" name="Text 3"/>
+          <p:cNvSpPr/>
+          <p:nvPr/>
+        </p:nvSpPr>
+        <p:spPr>
+          <a:xfrm>
+            <a:off x="548640" y="5943600"/>
+            <a:ext cx="10424160" cy="548640"/>
+          </a:xfrm>
+          <a:prstGeom prst="rect">
+            <a:avLst/>
+          </a:prstGeom>
+          <a:noFill/>
+          <a:ln/>
+        </p:spPr>
+        <p:txBody>
+          <a:bodyPr wrap="square" lIns="0" tIns="0" rIns="0" bIns="0" rtlCol="0" anchor="ctr"/>
+          <a:lstStyle/>
+          <a:p>
+            <a:pPr indent="0" marL="0">
+              <a:buNone/>
+            </a:pPr>
+            <a:r>
+              <a:rPr lang="en-US" sz="1400" dirty="0">
                 <a:solidFill>
                   <a:srgbClr val="5C6B63"/>
                 </a:solidFill>
@@ -3125,630 +5040,15 @@
                 <a:ea typeface="Arial" pitchFamily="34" charset="-122"/>
                 <a:cs typeface="Arial" pitchFamily="34" charset="-120"/>
               </a:rPr>
-              <a:t>KAGGLE</a:t>
-            </a:r>
-            <a:endParaRPr lang="en-US" sz="1500" dirty="0"/>
-          </a:p>
-        </p:txBody>
-      </p:sp>
-      <p:sp>
-        <p:nvSpPr>
-          <p:cNvPr id="7" name="Text 5"/>
-          <p:cNvSpPr/>
-          <p:nvPr/>
-        </p:nvSpPr>
-        <p:spPr>
-          <a:xfrm>
-            <a:off x="7498080" y="1783080"/>
-            <a:ext cx="3840480" cy="365760"/>
-          </a:xfrm>
-          <a:prstGeom prst="rect">
-            <a:avLst/>
-          </a:prstGeom>
-          <a:noFill/>
-          <a:ln/>
-        </p:spPr>
-        <p:txBody>
-          <a:bodyPr wrap="square" lIns="0" tIns="0" rIns="0" bIns="0" rtlCol="0" anchor="ctr"/>
-          <a:lstStyle/>
-          <a:p>
-            <a:pPr indent="0" marL="0">
-              <a:buNone/>
-            </a:pPr>
-            <a:r>
-              <a:rPr lang="en-US" sz="1500" b="1" spc="200" kern="0" dirty="0">
-                <a:solidFill>
-                  <a:srgbClr val="E8590C"/>
-                </a:solidFill>
-                <a:latin typeface="Arial" pitchFamily="34" charset="0"/>
-                <a:ea typeface="Arial" pitchFamily="34" charset="-122"/>
-                <a:cs typeface="Arial" pitchFamily="34" charset="-120"/>
-              </a:rPr>
-              <a:t>БИЗНЕС</a:t>
-            </a:r>
-            <a:endParaRPr lang="en-US" sz="1500" dirty="0"/>
-          </a:p>
-        </p:txBody>
-      </p:sp>
-      <p:sp>
-        <p:nvSpPr>
-          <p:cNvPr id="8" name="Text 6"/>
-          <p:cNvSpPr/>
-          <p:nvPr/>
-        </p:nvSpPr>
-        <p:spPr>
-          <a:xfrm>
-            <a:off x="548640" y="2331720"/>
-            <a:ext cx="3291840" cy="548640"/>
-          </a:xfrm>
-          <a:prstGeom prst="rect">
-            <a:avLst/>
-          </a:prstGeom>
-          <a:noFill/>
-          <a:ln/>
-        </p:spPr>
-        <p:txBody>
-          <a:bodyPr wrap="square" lIns="0" tIns="0" rIns="0" bIns="0" rtlCol="0" anchor="ctr"/>
-          <a:lstStyle/>
-          <a:p>
-            <a:pPr indent="0" marL="0">
-              <a:buNone/>
-            </a:pPr>
-            <a:r>
-              <a:rPr lang="en-US" sz="1900" b="1" dirty="0">
-                <a:solidFill>
-                  <a:srgbClr val="1A2420"/>
-                </a:solidFill>
-                <a:latin typeface="Arial" pitchFamily="34" charset="0"/>
-                <a:ea typeface="Arial" pitchFamily="34" charset="-122"/>
-                <a:cs typeface="Arial" pitchFamily="34" charset="-120"/>
-              </a:rPr>
-              <a:t>Метрика</a:t>
-            </a:r>
-            <a:endParaRPr lang="en-US" sz="1900" dirty="0"/>
-          </a:p>
-        </p:txBody>
-      </p:sp>
-      <p:sp>
-        <p:nvSpPr>
-          <p:cNvPr id="9" name="Text 7"/>
-          <p:cNvSpPr/>
-          <p:nvPr/>
-        </p:nvSpPr>
-        <p:spPr>
-          <a:xfrm>
-            <a:off x="4297680" y="2286000"/>
-            <a:ext cx="3017520" cy="822960"/>
-          </a:xfrm>
-          <a:prstGeom prst="rect">
-            <a:avLst/>
-          </a:prstGeom>
-          <a:noFill/>
-          <a:ln/>
-        </p:spPr>
-        <p:txBody>
-          <a:bodyPr wrap="square" lIns="0" tIns="0" rIns="0" bIns="0" rtlCol="0" anchor="ctr"/>
-          <a:lstStyle/>
-          <a:p>
-            <a:pPr indent="0" marL="0">
-              <a:buNone/>
-            </a:pPr>
-            <a:r>
-              <a:rPr lang="en-US" sz="1500" dirty="0">
-                <a:solidFill>
-                  <a:srgbClr val="5C6B63"/>
-                </a:solidFill>
-                <a:latin typeface="Arial" pitchFamily="34" charset="0"/>
-                <a:ea typeface="Arial" pitchFamily="34" charset="-122"/>
-                <a:cs typeface="Arial" pitchFamily="34" charset="-120"/>
-              </a:rPr>
-              <a:t>дана: RMSE, AUC</a:t>
-            </a:r>
-            <a:endParaRPr lang="en-US" sz="1500" dirty="0"/>
-          </a:p>
-        </p:txBody>
-      </p:sp>
-      <p:sp>
-        <p:nvSpPr>
-          <p:cNvPr id="10" name="Text 8"/>
-          <p:cNvSpPr/>
-          <p:nvPr/>
-        </p:nvSpPr>
-        <p:spPr>
-          <a:xfrm>
-            <a:off x="7498080" y="2286000"/>
-            <a:ext cx="4023360" cy="822960"/>
-          </a:xfrm>
-          <a:prstGeom prst="rect">
-            <a:avLst/>
-          </a:prstGeom>
-          <a:noFill/>
-          <a:ln/>
-        </p:spPr>
-        <p:txBody>
-          <a:bodyPr wrap="square" lIns="0" tIns="0" rIns="0" bIns="0" rtlCol="0" anchor="ctr"/>
-          <a:lstStyle/>
-          <a:p>
-            <a:pPr indent="0" marL="0">
-              <a:buNone/>
-            </a:pPr>
-            <a:r>
-              <a:rPr lang="en-US" sz="1500" dirty="0">
-                <a:solidFill>
-                  <a:srgbClr val="1A2420"/>
-                </a:solidFill>
-                <a:latin typeface="Arial" pitchFamily="34" charset="0"/>
-                <a:ea typeface="Arial" pitchFamily="34" charset="-122"/>
-                <a:cs typeface="Arial" pitchFamily="34" charset="-120"/>
-              </a:rPr>
-              <a:t>надо придумать — это половина задачи</a:t>
-            </a:r>
-            <a:endParaRPr lang="en-US" sz="1500" dirty="0"/>
-          </a:p>
-        </p:txBody>
-      </p:sp>
-      <p:sp>
-        <p:nvSpPr>
-          <p:cNvPr id="11" name="Shape 9"/>
-          <p:cNvSpPr/>
-          <p:nvPr/>
-        </p:nvSpPr>
-        <p:spPr>
-          <a:xfrm>
-            <a:off x="548640" y="3127248"/>
-            <a:ext cx="11091672" cy="0"/>
-          </a:xfrm>
-          <a:prstGeom prst="line">
-            <a:avLst/>
-          </a:prstGeom>
-          <a:noFill/>
-          <a:ln w="12700">
-            <a:solidFill>
-              <a:srgbClr val="D8E2DC"/>
-            </a:solidFill>
-            <a:prstDash val="solid"/>
-          </a:ln>
-        </p:spPr>
-      </p:sp>
-      <p:sp>
-        <p:nvSpPr>
-          <p:cNvPr id="12" name="Text 10"/>
-          <p:cNvSpPr/>
-          <p:nvPr/>
-        </p:nvSpPr>
-        <p:spPr>
-          <a:xfrm>
-            <a:off x="548640" y="3291840"/>
-            <a:ext cx="3291840" cy="548640"/>
-          </a:xfrm>
-          <a:prstGeom prst="rect">
-            <a:avLst/>
-          </a:prstGeom>
-          <a:noFill/>
-          <a:ln/>
-        </p:spPr>
-        <p:txBody>
-          <a:bodyPr wrap="square" lIns="0" tIns="0" rIns="0" bIns="0" rtlCol="0" anchor="ctr"/>
-          <a:lstStyle/>
-          <a:p>
-            <a:pPr indent="0" marL="0">
-              <a:buNone/>
-            </a:pPr>
-            <a:r>
-              <a:rPr lang="en-US" sz="1900" b="1" dirty="0">
-                <a:solidFill>
-                  <a:srgbClr val="1A2420"/>
-                </a:solidFill>
-                <a:latin typeface="Arial" pitchFamily="34" charset="0"/>
-                <a:ea typeface="Arial" pitchFamily="34" charset="-122"/>
-                <a:cs typeface="Arial" pitchFamily="34" charset="-120"/>
-              </a:rPr>
-              <a:t>Данные</a:t>
-            </a:r>
-            <a:endParaRPr lang="en-US" sz="1900" dirty="0"/>
-          </a:p>
-        </p:txBody>
-      </p:sp>
-      <p:sp>
-        <p:nvSpPr>
-          <p:cNvPr id="13" name="Text 11"/>
-          <p:cNvSpPr/>
-          <p:nvPr/>
-        </p:nvSpPr>
-        <p:spPr>
-          <a:xfrm>
-            <a:off x="4297680" y="3246120"/>
-            <a:ext cx="3017520" cy="822960"/>
-          </a:xfrm>
-          <a:prstGeom prst="rect">
-            <a:avLst/>
-          </a:prstGeom>
-          <a:noFill/>
-          <a:ln/>
-        </p:spPr>
-        <p:txBody>
-          <a:bodyPr wrap="square" lIns="0" tIns="0" rIns="0" bIns="0" rtlCol="0" anchor="ctr"/>
-          <a:lstStyle/>
-          <a:p>
-            <a:pPr indent="0" marL="0">
-              <a:buNone/>
-            </a:pPr>
-            <a:r>
-              <a:rPr lang="en-US" sz="1500" dirty="0">
-                <a:solidFill>
-                  <a:srgbClr val="5C6B63"/>
-                </a:solidFill>
-                <a:latin typeface="Arial" pitchFamily="34" charset="0"/>
-                <a:ea typeface="Arial" pitchFamily="34" charset="-122"/>
-                <a:cs typeface="Arial" pitchFamily="34" charset="-120"/>
-              </a:rPr>
-              <a:t>даны, чистые</a:t>
-            </a:r>
-            <a:endParaRPr lang="en-US" sz="1500" dirty="0"/>
-          </a:p>
-        </p:txBody>
-      </p:sp>
-      <p:sp>
-        <p:nvSpPr>
-          <p:cNvPr id="14" name="Text 12"/>
-          <p:cNvSpPr/>
-          <p:nvPr/>
-        </p:nvSpPr>
-        <p:spPr>
-          <a:xfrm>
-            <a:off x="7498080" y="3246120"/>
-            <a:ext cx="4023360" cy="822960"/>
-          </a:xfrm>
-          <a:prstGeom prst="rect">
-            <a:avLst/>
-          </a:prstGeom>
-          <a:noFill/>
-          <a:ln/>
-        </p:spPr>
-        <p:txBody>
-          <a:bodyPr wrap="square" lIns="0" tIns="0" rIns="0" bIns="0" rtlCol="0" anchor="ctr"/>
-          <a:lstStyle/>
-          <a:p>
-            <a:pPr indent="0" marL="0">
-              <a:buNone/>
-            </a:pPr>
-            <a:r>
-              <a:rPr lang="en-US" sz="1500" dirty="0">
-                <a:solidFill>
-                  <a:srgbClr val="1A2420"/>
-                </a:solidFill>
-                <a:latin typeface="Arial" pitchFamily="34" charset="0"/>
-                <a:ea typeface="Arial" pitchFamily="34" charset="-122"/>
-                <a:cs typeface="Arial" pitchFamily="34" charset="-120"/>
-              </a:rPr>
-              <a:t>нет; логирование кривое — сначала починить</a:t>
-            </a:r>
-            <a:endParaRPr lang="en-US" sz="1500" dirty="0"/>
-          </a:p>
-        </p:txBody>
-      </p:sp>
-      <p:sp>
-        <p:nvSpPr>
-          <p:cNvPr id="15" name="Shape 13"/>
-          <p:cNvSpPr/>
-          <p:nvPr/>
-        </p:nvSpPr>
-        <p:spPr>
-          <a:xfrm>
-            <a:off x="548640" y="4087368"/>
-            <a:ext cx="11091672" cy="0"/>
-          </a:xfrm>
-          <a:prstGeom prst="line">
-            <a:avLst/>
-          </a:prstGeom>
-          <a:noFill/>
-          <a:ln w="12700">
-            <a:solidFill>
-              <a:srgbClr val="D8E2DC"/>
-            </a:solidFill>
-            <a:prstDash val="solid"/>
-          </a:ln>
-        </p:spPr>
-      </p:sp>
-      <p:sp>
-        <p:nvSpPr>
-          <p:cNvPr id="16" name="Text 14"/>
-          <p:cNvSpPr/>
-          <p:nvPr/>
-        </p:nvSpPr>
-        <p:spPr>
-          <a:xfrm>
-            <a:off x="548640" y="4251960"/>
-            <a:ext cx="3291840" cy="548640"/>
-          </a:xfrm>
-          <a:prstGeom prst="rect">
-            <a:avLst/>
-          </a:prstGeom>
-          <a:noFill/>
-          <a:ln/>
-        </p:spPr>
-        <p:txBody>
-          <a:bodyPr wrap="square" lIns="0" tIns="0" rIns="0" bIns="0" rtlCol="0" anchor="ctr"/>
-          <a:lstStyle/>
-          <a:p>
-            <a:pPr indent="0" marL="0">
-              <a:buNone/>
-            </a:pPr>
-            <a:r>
-              <a:rPr lang="en-US" sz="1900" b="1" dirty="0">
-                <a:solidFill>
-                  <a:srgbClr val="1A2420"/>
-                </a:solidFill>
-                <a:latin typeface="Arial" pitchFamily="34" charset="0"/>
-                <a:ea typeface="Arial" pitchFamily="34" charset="-122"/>
-                <a:cs typeface="Arial" pitchFamily="34" charset="-120"/>
-              </a:rPr>
-              <a:t>Цена ошибки</a:t>
-            </a:r>
-            <a:endParaRPr lang="en-US" sz="1900" dirty="0"/>
-          </a:p>
-        </p:txBody>
-      </p:sp>
-      <p:sp>
-        <p:nvSpPr>
-          <p:cNvPr id="17" name="Text 15"/>
-          <p:cNvSpPr/>
-          <p:nvPr/>
-        </p:nvSpPr>
-        <p:spPr>
-          <a:xfrm>
-            <a:off x="4297680" y="4206240"/>
-            <a:ext cx="3017520" cy="822960"/>
-          </a:xfrm>
-          <a:prstGeom prst="rect">
-            <a:avLst/>
-          </a:prstGeom>
-          <a:noFill/>
-          <a:ln/>
-        </p:spPr>
-        <p:txBody>
-          <a:bodyPr wrap="square" lIns="0" tIns="0" rIns="0" bIns="0" rtlCol="0" anchor="ctr"/>
-          <a:lstStyle/>
-          <a:p>
-            <a:pPr indent="0" marL="0">
-              <a:buNone/>
-            </a:pPr>
-            <a:r>
-              <a:rPr lang="en-US" sz="1500" dirty="0">
-                <a:solidFill>
-                  <a:srgbClr val="5C6B63"/>
-                </a:solidFill>
-                <a:latin typeface="Arial" pitchFamily="34" charset="0"/>
-                <a:ea typeface="Arial" pitchFamily="34" charset="-122"/>
-                <a:cs typeface="Arial" pitchFamily="34" charset="-120"/>
-              </a:rPr>
-              <a:t>место в лидерборде</a:t>
-            </a:r>
-            <a:endParaRPr lang="en-US" sz="1500" dirty="0"/>
-          </a:p>
-        </p:txBody>
-      </p:sp>
-      <p:sp>
-        <p:nvSpPr>
-          <p:cNvPr id="18" name="Text 16"/>
-          <p:cNvSpPr/>
-          <p:nvPr/>
-        </p:nvSpPr>
-        <p:spPr>
-          <a:xfrm>
-            <a:off x="7498080" y="4206240"/>
-            <a:ext cx="4023360" cy="822960"/>
-          </a:xfrm>
-          <a:prstGeom prst="rect">
-            <a:avLst/>
-          </a:prstGeom>
-          <a:noFill/>
-          <a:ln/>
-        </p:spPr>
-        <p:txBody>
-          <a:bodyPr wrap="square" lIns="0" tIns="0" rIns="0" bIns="0" rtlCol="0" anchor="ctr"/>
-          <a:lstStyle/>
-          <a:p>
-            <a:pPr indent="0" marL="0">
-              <a:buNone/>
-            </a:pPr>
-            <a:r>
-              <a:rPr lang="en-US" sz="1500" dirty="0">
-                <a:solidFill>
-                  <a:srgbClr val="1A2420"/>
-                </a:solidFill>
-                <a:latin typeface="Arial" pitchFamily="34" charset="0"/>
-                <a:ea typeface="Arial" pitchFamily="34" charset="-122"/>
-                <a:cs typeface="Arial" pitchFamily="34" charset="-120"/>
-              </a:rPr>
-              <a:t>деньги, доверие, иногда люди</a:t>
-            </a:r>
-            <a:endParaRPr lang="en-US" sz="1500" dirty="0"/>
-          </a:p>
-        </p:txBody>
-      </p:sp>
-      <p:sp>
-        <p:nvSpPr>
-          <p:cNvPr id="19" name="Shape 17"/>
-          <p:cNvSpPr/>
-          <p:nvPr/>
-        </p:nvSpPr>
-        <p:spPr>
-          <a:xfrm>
-            <a:off x="548640" y="5047488"/>
-            <a:ext cx="11091672" cy="0"/>
-          </a:xfrm>
-          <a:prstGeom prst="line">
-            <a:avLst/>
-          </a:prstGeom>
-          <a:noFill/>
-          <a:ln w="12700">
-            <a:solidFill>
-              <a:srgbClr val="D8E2DC"/>
-            </a:solidFill>
-            <a:prstDash val="solid"/>
-          </a:ln>
-        </p:spPr>
-      </p:sp>
-      <p:sp>
-        <p:nvSpPr>
-          <p:cNvPr id="20" name="Text 18"/>
-          <p:cNvSpPr/>
-          <p:nvPr/>
-        </p:nvSpPr>
-        <p:spPr>
-          <a:xfrm>
-            <a:off x="548640" y="5212080"/>
-            <a:ext cx="3291840" cy="548640"/>
-          </a:xfrm>
-          <a:prstGeom prst="rect">
-            <a:avLst/>
-          </a:prstGeom>
-          <a:noFill/>
-          <a:ln/>
-        </p:spPr>
-        <p:txBody>
-          <a:bodyPr wrap="square" lIns="0" tIns="0" rIns="0" bIns="0" rtlCol="0" anchor="ctr"/>
-          <a:lstStyle/>
-          <a:p>
-            <a:pPr indent="0" marL="0">
-              <a:buNone/>
-            </a:pPr>
-            <a:r>
-              <a:rPr lang="en-US" sz="1900" b="1" dirty="0">
-                <a:solidFill>
-                  <a:srgbClr val="1A2420"/>
-                </a:solidFill>
-                <a:latin typeface="Arial" pitchFamily="34" charset="0"/>
-                <a:ea typeface="Arial" pitchFamily="34" charset="-122"/>
-                <a:cs typeface="Arial" pitchFamily="34" charset="-120"/>
-              </a:rPr>
-              <a:t>Финал</a:t>
-            </a:r>
-            <a:endParaRPr lang="en-US" sz="1900" dirty="0"/>
-          </a:p>
-        </p:txBody>
-      </p:sp>
-      <p:sp>
-        <p:nvSpPr>
-          <p:cNvPr id="21" name="Text 19"/>
-          <p:cNvSpPr/>
-          <p:nvPr/>
-        </p:nvSpPr>
-        <p:spPr>
-          <a:xfrm>
-            <a:off x="4297680" y="5166360"/>
-            <a:ext cx="3017520" cy="822960"/>
-          </a:xfrm>
-          <a:prstGeom prst="rect">
-            <a:avLst/>
-          </a:prstGeom>
-          <a:noFill/>
-          <a:ln/>
-        </p:spPr>
-        <p:txBody>
-          <a:bodyPr wrap="square" lIns="0" tIns="0" rIns="0" bIns="0" rtlCol="0" anchor="ctr"/>
-          <a:lstStyle/>
-          <a:p>
-            <a:pPr indent="0" marL="0">
-              <a:buNone/>
-            </a:pPr>
-            <a:r>
-              <a:rPr lang="en-US" sz="1500" dirty="0">
-                <a:solidFill>
-                  <a:srgbClr val="5C6B63"/>
-                </a:solidFill>
-                <a:latin typeface="Arial" pitchFamily="34" charset="0"/>
-                <a:ea typeface="Arial" pitchFamily="34" charset="-122"/>
-                <a:cs typeface="Arial" pitchFamily="34" charset="-120"/>
-              </a:rPr>
-              <a:t>сабмит</a:t>
-            </a:r>
-            <a:endParaRPr lang="en-US" sz="1500" dirty="0"/>
-          </a:p>
-        </p:txBody>
-      </p:sp>
-      <p:sp>
-        <p:nvSpPr>
-          <p:cNvPr id="22" name="Text 20"/>
-          <p:cNvSpPr/>
-          <p:nvPr/>
-        </p:nvSpPr>
-        <p:spPr>
-          <a:xfrm>
-            <a:off x="7498080" y="5166360"/>
-            <a:ext cx="4023360" cy="822960"/>
-          </a:xfrm>
-          <a:prstGeom prst="rect">
-            <a:avLst/>
-          </a:prstGeom>
-          <a:noFill/>
-          <a:ln/>
-        </p:spPr>
-        <p:txBody>
-          <a:bodyPr wrap="square" lIns="0" tIns="0" rIns="0" bIns="0" rtlCol="0" anchor="ctr"/>
-          <a:lstStyle/>
-          <a:p>
-            <a:pPr indent="0" marL="0">
-              <a:buNone/>
-            </a:pPr>
-            <a:r>
-              <a:rPr lang="en-US" sz="1500" dirty="0">
-                <a:solidFill>
-                  <a:srgbClr val="1A2420"/>
-                </a:solidFill>
-                <a:latin typeface="Arial" pitchFamily="34" charset="0"/>
-                <a:ea typeface="Arial" pitchFamily="34" charset="-122"/>
-                <a:cs typeface="Arial" pitchFamily="34" charset="-120"/>
-              </a:rPr>
-              <a:t>решение, которое кто-то примет и за которое ответит</a:t>
-            </a:r>
-            <a:endParaRPr lang="en-US" sz="1500" dirty="0"/>
-          </a:p>
-        </p:txBody>
-      </p:sp>
-      <p:sp>
-        <p:nvSpPr>
-          <p:cNvPr id="23" name="Text 21"/>
-          <p:cNvSpPr/>
-          <p:nvPr/>
-        </p:nvSpPr>
-        <p:spPr>
-          <a:xfrm>
-            <a:off x="548640" y="6172200"/>
-            <a:ext cx="10424160" cy="457200"/>
-          </a:xfrm>
-          <a:prstGeom prst="rect">
-            <a:avLst/>
-          </a:prstGeom>
-          <a:noFill/>
-          <a:ln/>
-        </p:spPr>
-        <p:txBody>
-          <a:bodyPr wrap="square" lIns="0" tIns="0" rIns="0" bIns="0" rtlCol="0" anchor="ctr"/>
-          <a:lstStyle/>
-          <a:p>
-            <a:pPr indent="0" marL="0">
-              <a:buNone/>
-            </a:pPr>
-            <a:r>
-              <a:rPr lang="en-US" sz="1500" i="1" dirty="0">
-                <a:solidFill>
-                  <a:srgbClr val="5C6B63"/>
-                </a:solidFill>
-                <a:latin typeface="Arial" pitchFamily="34" charset="0"/>
-                <a:ea typeface="Arial" pitchFamily="34" charset="-122"/>
-                <a:cs typeface="Arial" pitchFamily="34" charset="-120"/>
-              </a:rPr>
-              <a:t>Вопрос залу: какой пункт чаще всего игнорируют ML-инженеры?</a:t>
-            </a:r>
-            <a:endParaRPr lang="en-US" sz="1500" dirty="0"/>
-          </a:p>
-        </p:txBody>
-      </p:sp>
-      <p:sp>
-        <p:nvSpPr>
-          <p:cNvPr id="24" name="Text 22"/>
+              <a:t>Аналитика — это спектр, а не «дашборды» и не «ML». Спор о жанре — частая причина конфликтов: ad-hoc ждут за час, проект — за месяц.</a:t>
+            </a:r>
+            <a:endParaRPr lang="en-US" sz="1400" dirty="0"/>
+          </a:p>
+        </p:txBody>
+      </p:sp>
+      <p:sp>
+        <p:nvSpPr>
+          <p:cNvPr id="7" name="Text 4"/>
           <p:cNvSpPr/>
           <p:nvPr/>
         </p:nvSpPr>
@@ -3889,7 +5189,7 @@
                 <a:ea typeface="Arial" pitchFamily="34" charset="-122"/>
                 <a:cs typeface="Arial" pitchFamily="34" charset="-120"/>
               </a:rPr>
-              <a:t>ОДИН ФРЕЙМВОРК НА ВЕСЬ КУРС</a:t>
+              <a:t>РАЗНЫЕ ЖАНРЫ</a:t>
             </a:r>
             <a:endParaRPr lang="en-US" sz="1200" dirty="0"/>
           </a:p>
@@ -3928,7 +5228,7 @@
                 <a:ea typeface="Arial" pitchFamily="34" charset="-122"/>
                 <a:cs typeface="Arial" pitchFamily="34" charset="-120"/>
               </a:rPr>
-              <a:t>Пять шагов — повторяем каждую неделю, каждый раз глубже</a:t>
+              <a:t>«Задача на Kaggle» и «вопрос бизнеса»</a:t>
             </a:r>
             <a:endParaRPr lang="en-US" sz="3000" dirty="0"/>
           </a:p>
@@ -3936,23 +5236,31 @@
       </p:sp>
       <p:sp>
         <p:nvSpPr>
-          <p:cNvPr id="5" name="Shape 3"/>
-          <p:cNvSpPr/>
-          <p:nvPr/>
-        </p:nvSpPr>
-        <p:spPr>
-          <a:xfrm>
-            <a:off x="548640" y="1965960"/>
-            <a:ext cx="566928" cy="566928"/>
-          </a:xfrm>
-          <a:prstGeom prst="ellipse">
-            <a:avLst/>
-          </a:prstGeom>
-          <a:solidFill>
-            <a:srgbClr val="1E6B47"/>
-          </a:solidFill>
-          <a:ln/>
-        </p:spPr>
+          <p:cNvPr id="5" name="Text 3"/>
+          <p:cNvSpPr/>
+          <p:nvPr/>
+        </p:nvSpPr>
+        <p:spPr>
+          <a:xfrm>
+            <a:off x="548640" y="1783080"/>
+            <a:ext cx="91440" cy="91440"/>
+          </a:xfrm>
+          <a:prstGeom prst="rect">
+            <a:avLst/>
+          </a:prstGeom>
+          <a:noFill/>
+          <a:ln/>
+        </p:spPr>
+        <p:txBody>
+          <a:bodyPr wrap="square" lIns="0" tIns="0" rIns="0" bIns="0" rtlCol="0" anchor="ctr"/>
+          <a:lstStyle/>
+          <a:p>
+            <a:pPr indent="0" marL="0">
+              <a:buNone/>
+            </a:pPr>
+            <a:endParaRPr lang="en-US" dirty="0"/>
+          </a:p>
+        </p:txBody>
       </p:sp>
       <p:sp>
         <p:nvSpPr>
@@ -3962,34 +5270,34 @@
         </p:nvSpPr>
         <p:spPr>
           <a:xfrm>
-            <a:off x="548640" y="1965960"/>
-            <a:ext cx="566928" cy="566928"/>
-          </a:xfrm>
-          <a:prstGeom prst="rect">
-            <a:avLst/>
-          </a:prstGeom>
-          <a:noFill/>
-          <a:ln/>
-        </p:spPr>
-        <p:txBody>
-          <a:bodyPr wrap="square" lIns="0" tIns="0" rIns="0" bIns="0" rtlCol="0" anchor="ctr"/>
-          <a:lstStyle/>
-          <a:p>
-            <a:pPr algn="ctr" indent="0" marL="0">
-              <a:buNone/>
-            </a:pPr>
-            <a:r>
-              <a:rPr lang="en-US" sz="2000" b="1" dirty="0">
-                <a:solidFill>
-                  <a:srgbClr val="FFFFFF"/>
-                </a:solidFill>
-                <a:latin typeface="Arial" pitchFamily="34" charset="0"/>
-                <a:ea typeface="Arial" pitchFamily="34" charset="-122"/>
-                <a:cs typeface="Arial" pitchFamily="34" charset="-120"/>
-              </a:rPr>
-              <a:t>1</a:t>
-            </a:r>
-            <a:endParaRPr lang="en-US" sz="2000" dirty="0"/>
+            <a:off x="4297680" y="1783080"/>
+            <a:ext cx="2926080" cy="365760"/>
+          </a:xfrm>
+          <a:prstGeom prst="rect">
+            <a:avLst/>
+          </a:prstGeom>
+          <a:noFill/>
+          <a:ln/>
+        </p:spPr>
+        <p:txBody>
+          <a:bodyPr wrap="square" lIns="0" tIns="0" rIns="0" bIns="0" rtlCol="0" anchor="ctr"/>
+          <a:lstStyle/>
+          <a:p>
+            <a:pPr indent="0" marL="0">
+              <a:buNone/>
+            </a:pPr>
+            <a:r>
+              <a:rPr lang="en-US" sz="1500" b="1" spc="200" kern="0" dirty="0">
+                <a:solidFill>
+                  <a:srgbClr val="5C6B63"/>
+                </a:solidFill>
+                <a:latin typeface="Arial" pitchFamily="34" charset="0"/>
+                <a:ea typeface="Arial" pitchFamily="34" charset="-122"/>
+                <a:cs typeface="Arial" pitchFamily="34" charset="-120"/>
+              </a:rPr>
+              <a:t>KAGGLE</a:t>
+            </a:r>
+            <a:endParaRPr lang="en-US" sz="1500" dirty="0"/>
           </a:p>
         </p:txBody>
       </p:sp>
@@ -4001,24 +5309,63 @@
         </p:nvSpPr>
         <p:spPr>
           <a:xfrm>
-            <a:off x="1417320" y="1984248"/>
-            <a:ext cx="2377440" cy="548640"/>
-          </a:xfrm>
-          <a:prstGeom prst="rect">
-            <a:avLst/>
-          </a:prstGeom>
-          <a:noFill/>
-          <a:ln/>
-        </p:spPr>
-        <p:txBody>
-          <a:bodyPr wrap="square" lIns="0" tIns="0" rIns="0" bIns="0" rtlCol="0" anchor="ctr"/>
-          <a:lstStyle/>
-          <a:p>
-            <a:pPr indent="0" marL="0">
-              <a:buNone/>
-            </a:pPr>
-            <a:r>
-              <a:rPr lang="en-US" sz="1800" b="1" spc="100" kern="0" dirty="0">
+            <a:off x="7498080" y="1783080"/>
+            <a:ext cx="3840480" cy="365760"/>
+          </a:xfrm>
+          <a:prstGeom prst="rect">
+            <a:avLst/>
+          </a:prstGeom>
+          <a:noFill/>
+          <a:ln/>
+        </p:spPr>
+        <p:txBody>
+          <a:bodyPr wrap="square" lIns="0" tIns="0" rIns="0" bIns="0" rtlCol="0" anchor="ctr"/>
+          <a:lstStyle/>
+          <a:p>
+            <a:pPr indent="0" marL="0">
+              <a:buNone/>
+            </a:pPr>
+            <a:r>
+              <a:rPr lang="en-US" sz="1500" b="1" spc="200" kern="0" dirty="0">
+                <a:solidFill>
+                  <a:srgbClr val="E8590C"/>
+                </a:solidFill>
+                <a:latin typeface="Arial" pitchFamily="34" charset="0"/>
+                <a:ea typeface="Arial" pitchFamily="34" charset="-122"/>
+                <a:cs typeface="Arial" pitchFamily="34" charset="-120"/>
+              </a:rPr>
+              <a:t>БИЗНЕС</a:t>
+            </a:r>
+            <a:endParaRPr lang="en-US" sz="1500" dirty="0"/>
+          </a:p>
+        </p:txBody>
+      </p:sp>
+      <p:sp>
+        <p:nvSpPr>
+          <p:cNvPr id="8" name="Text 6"/>
+          <p:cNvSpPr/>
+          <p:nvPr/>
+        </p:nvSpPr>
+        <p:spPr>
+          <a:xfrm>
+            <a:off x="548640" y="2331720"/>
+            <a:ext cx="3291840" cy="548640"/>
+          </a:xfrm>
+          <a:prstGeom prst="rect">
+            <a:avLst/>
+          </a:prstGeom>
+          <a:noFill/>
+          <a:ln/>
+        </p:spPr>
+        <p:txBody>
+          <a:bodyPr wrap="square" lIns="0" tIns="0" rIns="0" bIns="0" rtlCol="0" anchor="ctr"/>
+          <a:lstStyle/>
+          <a:p>
+            <a:pPr indent="0" marL="0">
+              <a:buNone/>
+            </a:pPr>
+            <a:r>
+              <a:rPr lang="en-US" sz="1900" b="1" dirty="0">
                 <a:solidFill>
                   <a:srgbClr val="1A2420"/>
                 </a:solidFill>
@@ -4026,38 +5373,38 @@
                 <a:ea typeface="Arial" pitchFamily="34" charset="-122"/>
                 <a:cs typeface="Arial" pitchFamily="34" charset="-120"/>
               </a:rPr>
-              <a:t>ВОПРОС</a:t>
-            </a:r>
-            <a:endParaRPr lang="en-US" sz="1800" dirty="0"/>
-          </a:p>
-        </p:txBody>
-      </p:sp>
-      <p:sp>
-        <p:nvSpPr>
-          <p:cNvPr id="8" name="Text 6"/>
-          <p:cNvSpPr/>
-          <p:nvPr/>
-        </p:nvSpPr>
-        <p:spPr>
-          <a:xfrm>
-            <a:off x="4023360" y="2011680"/>
-            <a:ext cx="7498080" cy="548640"/>
-          </a:xfrm>
-          <a:prstGeom prst="rect">
-            <a:avLst/>
-          </a:prstGeom>
-          <a:noFill/>
-          <a:ln/>
-        </p:spPr>
-        <p:txBody>
-          <a:bodyPr wrap="square" lIns="0" tIns="0" rIns="0" bIns="0" rtlCol="0" anchor="ctr"/>
-          <a:lstStyle/>
-          <a:p>
-            <a:pPr indent="0" marL="0">
-              <a:buNone/>
-            </a:pPr>
-            <a:r>
-              <a:rPr lang="en-US" sz="1600" dirty="0">
+              <a:t>Метрика</a:t>
+            </a:r>
+            <a:endParaRPr lang="en-US" sz="1900" dirty="0"/>
+          </a:p>
+        </p:txBody>
+      </p:sp>
+      <p:sp>
+        <p:nvSpPr>
+          <p:cNvPr id="9" name="Text 7"/>
+          <p:cNvSpPr/>
+          <p:nvPr/>
+        </p:nvSpPr>
+        <p:spPr>
+          <a:xfrm>
+            <a:off x="4297680" y="2286000"/>
+            <a:ext cx="3017520" cy="822960"/>
+          </a:xfrm>
+          <a:prstGeom prst="rect">
+            <a:avLst/>
+          </a:prstGeom>
+          <a:noFill/>
+          <a:ln/>
+        </p:spPr>
+        <p:txBody>
+          <a:bodyPr wrap="square" lIns="0" tIns="0" rIns="0" bIns="0" rtlCol="0" anchor="ctr"/>
+          <a:lstStyle/>
+          <a:p>
+            <a:pPr indent="0" marL="0">
+              <a:buNone/>
+            </a:pPr>
+            <a:r>
+              <a:rPr lang="en-US" sz="1500" dirty="0">
                 <a:solidFill>
                   <a:srgbClr val="5C6B63"/>
                 </a:solidFill>
@@ -4065,30 +5412,69 @@
                 <a:ea typeface="Arial" pitchFamily="34" charset="-122"/>
                 <a:cs typeface="Arial" pitchFamily="34" charset="-120"/>
               </a:rPr>
-              <a:t>какой вопрос бизнеса? кто и что изменит от ответа?</a:t>
-            </a:r>
-            <a:endParaRPr lang="en-US" sz="1600" dirty="0"/>
-          </a:p>
-        </p:txBody>
-      </p:sp>
-      <p:sp>
-        <p:nvSpPr>
-          <p:cNvPr id="9" name="Shape 7"/>
-          <p:cNvSpPr/>
-          <p:nvPr/>
-        </p:nvSpPr>
-        <p:spPr>
-          <a:xfrm>
-            <a:off x="832104" y="2551176"/>
-            <a:ext cx="0" cy="237744"/>
+              <a:t>дана: RMSE, AUC</a:t>
+            </a:r>
+            <a:endParaRPr lang="en-US" sz="1500" dirty="0"/>
+          </a:p>
+        </p:txBody>
+      </p:sp>
+      <p:sp>
+        <p:nvSpPr>
+          <p:cNvPr id="10" name="Text 8"/>
+          <p:cNvSpPr/>
+          <p:nvPr/>
+        </p:nvSpPr>
+        <p:spPr>
+          <a:xfrm>
+            <a:off x="7498080" y="2286000"/>
+            <a:ext cx="4023360" cy="822960"/>
+          </a:xfrm>
+          <a:prstGeom prst="rect">
+            <a:avLst/>
+          </a:prstGeom>
+          <a:noFill/>
+          <a:ln/>
+        </p:spPr>
+        <p:txBody>
+          <a:bodyPr wrap="square" lIns="0" tIns="0" rIns="0" bIns="0" rtlCol="0" anchor="ctr"/>
+          <a:lstStyle/>
+          <a:p>
+            <a:pPr indent="0" marL="0">
+              <a:buNone/>
+            </a:pPr>
+            <a:r>
+              <a:rPr lang="en-US" sz="1500" dirty="0">
+                <a:solidFill>
+                  <a:srgbClr val="1A2420"/>
+                </a:solidFill>
+                <a:latin typeface="Arial" pitchFamily="34" charset="0"/>
+                <a:ea typeface="Arial" pitchFamily="34" charset="-122"/>
+                <a:cs typeface="Arial" pitchFamily="34" charset="-120"/>
+              </a:rPr>
+              <a:t>надо придумать — это половина задачи</a:t>
+            </a:r>
+            <a:endParaRPr lang="en-US" sz="1500" dirty="0"/>
+          </a:p>
+        </p:txBody>
+      </p:sp>
+      <p:sp>
+        <p:nvSpPr>
+          <p:cNvPr id="11" name="Shape 9"/>
+          <p:cNvSpPr/>
+          <p:nvPr/>
+        </p:nvSpPr>
+        <p:spPr>
+          <a:xfrm>
+            <a:off x="548640" y="3127248"/>
+            <a:ext cx="11091672" cy="0"/>
           </a:xfrm>
           <a:prstGeom prst="line">
             <a:avLst/>
           </a:prstGeom>
           <a:noFill/>
-          <a:ln w="19050">
+          <a:ln w="12700">
             <a:solidFill>
-              <a:srgbClr val="1E6B47"/>
+              <a:srgbClr val="D8E2DC"/>
             </a:solidFill>
             <a:prstDash val="solid"/>
           </a:ln>
@@ -4096,89 +5482,30 @@
       </p:sp>
       <p:sp>
         <p:nvSpPr>
-          <p:cNvPr id="10" name="Shape 8"/>
-          <p:cNvSpPr/>
-          <p:nvPr/>
-        </p:nvSpPr>
-        <p:spPr>
-          <a:xfrm>
-            <a:off x="548640" y="2807208"/>
-            <a:ext cx="566928" cy="566928"/>
-          </a:xfrm>
-          <a:prstGeom prst="ellipse">
-            <a:avLst/>
-          </a:prstGeom>
-          <a:solidFill>
-            <a:srgbClr val="1E6B47"/>
-          </a:solidFill>
-          <a:ln/>
-        </p:spPr>
-      </p:sp>
-      <p:sp>
-        <p:nvSpPr>
-          <p:cNvPr id="11" name="Text 9"/>
-          <p:cNvSpPr/>
-          <p:nvPr/>
-        </p:nvSpPr>
-        <p:spPr>
-          <a:xfrm>
-            <a:off x="548640" y="2807208"/>
-            <a:ext cx="566928" cy="566928"/>
-          </a:xfrm>
-          <a:prstGeom prst="rect">
-            <a:avLst/>
-          </a:prstGeom>
-          <a:noFill/>
-          <a:ln/>
-        </p:spPr>
-        <p:txBody>
-          <a:bodyPr wrap="square" lIns="0" tIns="0" rIns="0" bIns="0" rtlCol="0" anchor="ctr"/>
-          <a:lstStyle/>
-          <a:p>
-            <a:pPr algn="ctr" indent="0" marL="0">
-              <a:buNone/>
-            </a:pPr>
-            <a:r>
-              <a:rPr lang="en-US" sz="2000" b="1" dirty="0">
-                <a:solidFill>
-                  <a:srgbClr val="FFFFFF"/>
-                </a:solidFill>
-                <a:latin typeface="Arial" pitchFamily="34" charset="0"/>
-                <a:ea typeface="Arial" pitchFamily="34" charset="-122"/>
-                <a:cs typeface="Arial" pitchFamily="34" charset="-120"/>
-              </a:rPr>
-              <a:t>2</a:t>
-            </a:r>
-            <a:endParaRPr lang="en-US" sz="2000" dirty="0"/>
-          </a:p>
-        </p:txBody>
-      </p:sp>
-      <p:sp>
-        <p:nvSpPr>
           <p:cNvPr id="12" name="Text 10"/>
           <p:cNvSpPr/>
           <p:nvPr/>
         </p:nvSpPr>
         <p:spPr>
           <a:xfrm>
-            <a:off x="1417320" y="2825496"/>
-            <a:ext cx="2377440" cy="548640"/>
-          </a:xfrm>
-          <a:prstGeom prst="rect">
-            <a:avLst/>
-          </a:prstGeom>
-          <a:noFill/>
-          <a:ln/>
-        </p:spPr>
-        <p:txBody>
-          <a:bodyPr wrap="square" lIns="0" tIns="0" rIns="0" bIns="0" rtlCol="0" anchor="ctr"/>
-          <a:lstStyle/>
-          <a:p>
-            <a:pPr indent="0" marL="0">
-              <a:buNone/>
-            </a:pPr>
-            <a:r>
-              <a:rPr lang="en-US" sz="1800" b="1" spc="100" kern="0" dirty="0">
+            <a:off x="548640" y="3291840"/>
+            <a:ext cx="3291840" cy="548640"/>
+          </a:xfrm>
+          <a:prstGeom prst="rect">
+            <a:avLst/>
+          </a:prstGeom>
+          <a:noFill/>
+          <a:ln/>
+        </p:spPr>
+        <p:txBody>
+          <a:bodyPr wrap="square" lIns="0" tIns="0" rIns="0" bIns="0" rtlCol="0" anchor="ctr"/>
+          <a:lstStyle/>
+          <a:p>
+            <a:pPr indent="0" marL="0">
+              <a:buNone/>
+            </a:pPr>
+            <a:r>
+              <a:rPr lang="en-US" sz="1900" b="1" dirty="0">
                 <a:solidFill>
                   <a:srgbClr val="1A2420"/>
                 </a:solidFill>
@@ -4186,9 +5513,9 @@
                 <a:ea typeface="Arial" pitchFamily="34" charset="-122"/>
                 <a:cs typeface="Arial" pitchFamily="34" charset="-120"/>
               </a:rPr>
-              <a:t>ВОРОНКА</a:t>
-            </a:r>
-            <a:endParaRPr lang="en-US" sz="1800" dirty="0"/>
+              <a:t>Данные</a:t>
+            </a:r>
+            <a:endParaRPr lang="en-US" sz="1900" dirty="0"/>
           </a:p>
         </p:txBody>
       </p:sp>
@@ -4200,24 +5527,24 @@
         </p:nvSpPr>
         <p:spPr>
           <a:xfrm>
-            <a:off x="4023360" y="2852928"/>
-            <a:ext cx="7498080" cy="548640"/>
-          </a:xfrm>
-          <a:prstGeom prst="rect">
-            <a:avLst/>
-          </a:prstGeom>
-          <a:noFill/>
-          <a:ln/>
-        </p:spPr>
-        <p:txBody>
-          <a:bodyPr wrap="square" lIns="0" tIns="0" rIns="0" bIns="0" rtlCol="0" anchor="ctr"/>
-          <a:lstStyle/>
-          <a:p>
-            <a:pPr indent="0" marL="0">
-              <a:buNone/>
-            </a:pPr>
-            <a:r>
-              <a:rPr lang="en-US" sz="1600" dirty="0">
+            <a:off x="4297680" y="3246120"/>
+            <a:ext cx="3017520" cy="822960"/>
+          </a:xfrm>
+          <a:prstGeom prst="rect">
+            <a:avLst/>
+          </a:prstGeom>
+          <a:noFill/>
+          <a:ln/>
+        </p:spPr>
+        <p:txBody>
+          <a:bodyPr wrap="square" lIns="0" tIns="0" rIns="0" bIns="0" rtlCol="0" anchor="ctr"/>
+          <a:lstStyle/>
+          <a:p>
+            <a:pPr indent="0" marL="0">
+              <a:buNone/>
+            </a:pPr>
+            <a:r>
+              <a:rPr lang="en-US" sz="1500" dirty="0">
                 <a:solidFill>
                   <a:srgbClr val="5C6B63"/>
                 </a:solidFill>
@@ -4225,30 +5552,69 @@
                 <a:ea typeface="Arial" pitchFamily="34" charset="-122"/>
                 <a:cs typeface="Arial" pitchFamily="34" charset="-120"/>
               </a:rPr>
-              <a:t>где в пути пользователя это живёт? где болит?</a:t>
-            </a:r>
-            <a:endParaRPr lang="en-US" sz="1600" dirty="0"/>
-          </a:p>
-        </p:txBody>
-      </p:sp>
-      <p:sp>
-        <p:nvSpPr>
-          <p:cNvPr id="14" name="Shape 12"/>
-          <p:cNvSpPr/>
-          <p:nvPr/>
-        </p:nvSpPr>
-        <p:spPr>
-          <a:xfrm>
-            <a:off x="832104" y="3392424"/>
-            <a:ext cx="0" cy="237744"/>
+              <a:t>даны, чистые</a:t>
+            </a:r>
+            <a:endParaRPr lang="en-US" sz="1500" dirty="0"/>
+          </a:p>
+        </p:txBody>
+      </p:sp>
+      <p:sp>
+        <p:nvSpPr>
+          <p:cNvPr id="14" name="Text 12"/>
+          <p:cNvSpPr/>
+          <p:nvPr/>
+        </p:nvSpPr>
+        <p:spPr>
+          <a:xfrm>
+            <a:off x="7498080" y="3246120"/>
+            <a:ext cx="4023360" cy="822960"/>
+          </a:xfrm>
+          <a:prstGeom prst="rect">
+            <a:avLst/>
+          </a:prstGeom>
+          <a:noFill/>
+          <a:ln/>
+        </p:spPr>
+        <p:txBody>
+          <a:bodyPr wrap="square" lIns="0" tIns="0" rIns="0" bIns="0" rtlCol="0" anchor="ctr"/>
+          <a:lstStyle/>
+          <a:p>
+            <a:pPr indent="0" marL="0">
+              <a:buNone/>
+            </a:pPr>
+            <a:r>
+              <a:rPr lang="en-US" sz="1500" dirty="0">
+                <a:solidFill>
+                  <a:srgbClr val="1A2420"/>
+                </a:solidFill>
+                <a:latin typeface="Arial" pitchFamily="34" charset="0"/>
+                <a:ea typeface="Arial" pitchFamily="34" charset="-122"/>
+                <a:cs typeface="Arial" pitchFamily="34" charset="-120"/>
+              </a:rPr>
+              <a:t>нет; логирование кривое — сначала починить</a:t>
+            </a:r>
+            <a:endParaRPr lang="en-US" sz="1500" dirty="0"/>
+          </a:p>
+        </p:txBody>
+      </p:sp>
+      <p:sp>
+        <p:nvSpPr>
+          <p:cNvPr id="15" name="Shape 13"/>
+          <p:cNvSpPr/>
+          <p:nvPr/>
+        </p:nvSpPr>
+        <p:spPr>
+          <a:xfrm>
+            <a:off x="548640" y="4087368"/>
+            <a:ext cx="11091672" cy="0"/>
           </a:xfrm>
           <a:prstGeom prst="line">
             <a:avLst/>
           </a:prstGeom>
           <a:noFill/>
-          <a:ln w="19050">
+          <a:ln w="12700">
             <a:solidFill>
-              <a:srgbClr val="1E6B47"/>
+              <a:srgbClr val="D8E2DC"/>
             </a:solidFill>
             <a:prstDash val="solid"/>
           </a:ln>
@@ -4256,60 +5622,40 @@
       </p:sp>
       <p:sp>
         <p:nvSpPr>
-          <p:cNvPr id="15" name="Shape 13"/>
-          <p:cNvSpPr/>
-          <p:nvPr/>
-        </p:nvSpPr>
-        <p:spPr>
-          <a:xfrm>
-            <a:off x="548640" y="3648456"/>
-            <a:ext cx="566928" cy="566928"/>
-          </a:xfrm>
-          <a:prstGeom prst="ellipse">
-            <a:avLst/>
-          </a:prstGeom>
-          <a:solidFill>
-            <a:srgbClr val="1E6B47"/>
-          </a:solidFill>
-          <a:ln/>
-        </p:spPr>
-      </p:sp>
-      <p:sp>
-        <p:nvSpPr>
           <p:cNvPr id="16" name="Text 14"/>
           <p:cNvSpPr/>
           <p:nvPr/>
         </p:nvSpPr>
         <p:spPr>
           <a:xfrm>
-            <a:off x="548640" y="3648456"/>
-            <a:ext cx="566928" cy="566928"/>
-          </a:xfrm>
-          <a:prstGeom prst="rect">
-            <a:avLst/>
-          </a:prstGeom>
-          <a:noFill/>
-          <a:ln/>
-        </p:spPr>
-        <p:txBody>
-          <a:bodyPr wrap="square" lIns="0" tIns="0" rIns="0" bIns="0" rtlCol="0" anchor="ctr"/>
-          <a:lstStyle/>
-          <a:p>
-            <a:pPr algn="ctr" indent="0" marL="0">
-              <a:buNone/>
-            </a:pPr>
-            <a:r>
-              <a:rPr lang="en-US" sz="2000" b="1" dirty="0">
-                <a:solidFill>
-                  <a:srgbClr val="FFFFFF"/>
-                </a:solidFill>
-                <a:latin typeface="Arial" pitchFamily="34" charset="0"/>
-                <a:ea typeface="Arial" pitchFamily="34" charset="-122"/>
-                <a:cs typeface="Arial" pitchFamily="34" charset="-120"/>
-              </a:rPr>
-              <a:t>3</a:t>
-            </a:r>
-            <a:endParaRPr lang="en-US" sz="2000" dirty="0"/>
+            <a:off x="548640" y="4251960"/>
+            <a:ext cx="3291840" cy="548640"/>
+          </a:xfrm>
+          <a:prstGeom prst="rect">
+            <a:avLst/>
+          </a:prstGeom>
+          <a:noFill/>
+          <a:ln/>
+        </p:spPr>
+        <p:txBody>
+          <a:bodyPr wrap="square" lIns="0" tIns="0" rIns="0" bIns="0" rtlCol="0" anchor="ctr"/>
+          <a:lstStyle/>
+          <a:p>
+            <a:pPr indent="0" marL="0">
+              <a:buNone/>
+            </a:pPr>
+            <a:r>
+              <a:rPr lang="en-US" sz="1900" b="1" dirty="0">
+                <a:solidFill>
+                  <a:srgbClr val="1A2420"/>
+                </a:solidFill>
+                <a:latin typeface="Arial" pitchFamily="34" charset="0"/>
+                <a:ea typeface="Arial" pitchFamily="34" charset="-122"/>
+                <a:cs typeface="Arial" pitchFamily="34" charset="-120"/>
+              </a:rPr>
+              <a:t>Цена ошибки</a:t>
+            </a:r>
+            <a:endParaRPr lang="en-US" sz="1900" dirty="0"/>
           </a:p>
         </p:txBody>
       </p:sp>
@@ -4321,24 +5667,63 @@
         </p:nvSpPr>
         <p:spPr>
           <a:xfrm>
-            <a:off x="1417320" y="3666744"/>
-            <a:ext cx="2377440" cy="548640"/>
-          </a:xfrm>
-          <a:prstGeom prst="rect">
-            <a:avLst/>
-          </a:prstGeom>
-          <a:noFill/>
-          <a:ln/>
-        </p:spPr>
-        <p:txBody>
-          <a:bodyPr wrap="square" lIns="0" tIns="0" rIns="0" bIns="0" rtlCol="0" anchor="ctr"/>
-          <a:lstStyle/>
-          <a:p>
-            <a:pPr indent="0" marL="0">
-              <a:buNone/>
-            </a:pPr>
-            <a:r>
-              <a:rPr lang="en-US" sz="1800" b="1" spc="100" kern="0" dirty="0">
+            <a:off x="4297680" y="4206240"/>
+            <a:ext cx="3017520" cy="822960"/>
+          </a:xfrm>
+          <a:prstGeom prst="rect">
+            <a:avLst/>
+          </a:prstGeom>
+          <a:noFill/>
+          <a:ln/>
+        </p:spPr>
+        <p:txBody>
+          <a:bodyPr wrap="square" lIns="0" tIns="0" rIns="0" bIns="0" rtlCol="0" anchor="ctr"/>
+          <a:lstStyle/>
+          <a:p>
+            <a:pPr indent="0" marL="0">
+              <a:buNone/>
+            </a:pPr>
+            <a:r>
+              <a:rPr lang="en-US" sz="1500" dirty="0">
+                <a:solidFill>
+                  <a:srgbClr val="5C6B63"/>
+                </a:solidFill>
+                <a:latin typeface="Arial" pitchFamily="34" charset="0"/>
+                <a:ea typeface="Arial" pitchFamily="34" charset="-122"/>
+                <a:cs typeface="Arial" pitchFamily="34" charset="-120"/>
+              </a:rPr>
+              <a:t>место в лидерборде</a:t>
+            </a:r>
+            <a:endParaRPr lang="en-US" sz="1500" dirty="0"/>
+          </a:p>
+        </p:txBody>
+      </p:sp>
+      <p:sp>
+        <p:nvSpPr>
+          <p:cNvPr id="18" name="Text 16"/>
+          <p:cNvSpPr/>
+          <p:nvPr/>
+        </p:nvSpPr>
+        <p:spPr>
+          <a:xfrm>
+            <a:off x="7498080" y="4206240"/>
+            <a:ext cx="4023360" cy="822960"/>
+          </a:xfrm>
+          <a:prstGeom prst="rect">
+            <a:avLst/>
+          </a:prstGeom>
+          <a:noFill/>
+          <a:ln/>
+        </p:spPr>
+        <p:txBody>
+          <a:bodyPr wrap="square" lIns="0" tIns="0" rIns="0" bIns="0" rtlCol="0" anchor="ctr"/>
+          <a:lstStyle/>
+          <a:p>
+            <a:pPr indent="0" marL="0">
+              <a:buNone/>
+            </a:pPr>
+            <a:r>
+              <a:rPr lang="en-US" sz="1500" dirty="0">
                 <a:solidFill>
                   <a:srgbClr val="1A2420"/>
                 </a:solidFill>
@@ -4346,48 +5731,9 @@
                 <a:ea typeface="Arial" pitchFamily="34" charset="-122"/>
                 <a:cs typeface="Arial" pitchFamily="34" charset="-120"/>
               </a:rPr>
-              <a:t>МЕТРИКИ</a:t>
-            </a:r>
-            <a:endParaRPr lang="en-US" sz="1800" dirty="0"/>
-          </a:p>
-        </p:txBody>
-      </p:sp>
-      <p:sp>
-        <p:nvSpPr>
-          <p:cNvPr id="18" name="Text 16"/>
-          <p:cNvSpPr/>
-          <p:nvPr/>
-        </p:nvSpPr>
-        <p:spPr>
-          <a:xfrm>
-            <a:off x="4023360" y="3694176"/>
-            <a:ext cx="7498080" cy="548640"/>
-          </a:xfrm>
-          <a:prstGeom prst="rect">
-            <a:avLst/>
-          </a:prstGeom>
-          <a:noFill/>
-          <a:ln/>
-        </p:spPr>
-        <p:txBody>
-          <a:bodyPr wrap="square" lIns="0" tIns="0" rIns="0" bIns="0" rtlCol="0" anchor="ctr"/>
-          <a:lstStyle/>
-          <a:p>
-            <a:pPr indent="0" marL="0">
-              <a:buNone/>
-            </a:pPr>
-            <a:r>
-              <a:rPr lang="en-US" sz="1600" dirty="0">
-                <a:solidFill>
-                  <a:srgbClr val="5C6B63"/>
-                </a:solidFill>
-                <a:latin typeface="Arial" pitchFamily="34" charset="0"/>
-                <a:ea typeface="Arial" pitchFamily="34" charset="-122"/>
-                <a:cs typeface="Arial" pitchFamily="34" charset="-120"/>
-              </a:rPr>
-              <a:t>чем измерим успех и вред?</a:t>
-            </a:r>
-            <a:endParaRPr lang="en-US" sz="1600" dirty="0"/>
+              <a:t>деньги, доверие, иногда люди</a:t>
+            </a:r>
+            <a:endParaRPr lang="en-US" sz="1500" dirty="0"/>
           </a:p>
         </p:txBody>
       </p:sp>
@@ -4399,16 +5745,16 @@
         </p:nvSpPr>
         <p:spPr>
           <a:xfrm>
-            <a:off x="832104" y="4233672"/>
-            <a:ext cx="0" cy="237744"/>
+            <a:off x="548640" y="5047488"/>
+            <a:ext cx="11091672" cy="0"/>
           </a:xfrm>
           <a:prstGeom prst="line">
             <a:avLst/>
           </a:prstGeom>
           <a:noFill/>
-          <a:ln w="19050">
+          <a:ln w="12700">
             <a:solidFill>
-              <a:srgbClr val="1E6B47"/>
+              <a:srgbClr val="D8E2DC"/>
             </a:solidFill>
             <a:prstDash val="solid"/>
           </a:ln>
@@ -4416,23 +5762,42 @@
       </p:sp>
       <p:sp>
         <p:nvSpPr>
-          <p:cNvPr id="20" name="Shape 18"/>
-          <p:cNvSpPr/>
-          <p:nvPr/>
-        </p:nvSpPr>
-        <p:spPr>
-          <a:xfrm>
-            <a:off x="548640" y="4489704"/>
-            <a:ext cx="566928" cy="566928"/>
-          </a:xfrm>
-          <a:prstGeom prst="ellipse">
-            <a:avLst/>
-          </a:prstGeom>
-          <a:solidFill>
-            <a:srgbClr val="1E6B47"/>
-          </a:solidFill>
-          <a:ln/>
-        </p:spPr>
+          <p:cNvPr id="20" name="Text 18"/>
+          <p:cNvSpPr/>
+          <p:nvPr/>
+        </p:nvSpPr>
+        <p:spPr>
+          <a:xfrm>
+            <a:off x="548640" y="5212080"/>
+            <a:ext cx="3291840" cy="548640"/>
+          </a:xfrm>
+          <a:prstGeom prst="rect">
+            <a:avLst/>
+          </a:prstGeom>
+          <a:noFill/>
+          <a:ln/>
+        </p:spPr>
+        <p:txBody>
+          <a:bodyPr wrap="square" lIns="0" tIns="0" rIns="0" bIns="0" rtlCol="0" anchor="ctr"/>
+          <a:lstStyle/>
+          <a:p>
+            <a:pPr indent="0" marL="0">
+              <a:buNone/>
+            </a:pPr>
+            <a:r>
+              <a:rPr lang="en-US" sz="1900" b="1" dirty="0">
+                <a:solidFill>
+                  <a:srgbClr val="1A2420"/>
+                </a:solidFill>
+                <a:latin typeface="Arial" pitchFamily="34" charset="0"/>
+                <a:ea typeface="Arial" pitchFamily="34" charset="-122"/>
+                <a:cs typeface="Arial" pitchFamily="34" charset="-120"/>
+              </a:rPr>
+              <a:t>Финал</a:t>
+            </a:r>
+            <a:endParaRPr lang="en-US" sz="1900" dirty="0"/>
+          </a:p>
+        </p:txBody>
       </p:sp>
       <p:sp>
         <p:nvSpPr>
@@ -4442,34 +5807,34 @@
         </p:nvSpPr>
         <p:spPr>
           <a:xfrm>
-            <a:off x="548640" y="4489704"/>
-            <a:ext cx="566928" cy="566928"/>
-          </a:xfrm>
-          <a:prstGeom prst="rect">
-            <a:avLst/>
-          </a:prstGeom>
-          <a:noFill/>
-          <a:ln/>
-        </p:spPr>
-        <p:txBody>
-          <a:bodyPr wrap="square" lIns="0" tIns="0" rIns="0" bIns="0" rtlCol="0" anchor="ctr"/>
-          <a:lstStyle/>
-          <a:p>
-            <a:pPr algn="ctr" indent="0" marL="0">
-              <a:buNone/>
-            </a:pPr>
-            <a:r>
-              <a:rPr lang="en-US" sz="2000" b="1" dirty="0">
-                <a:solidFill>
-                  <a:srgbClr val="FFFFFF"/>
-                </a:solidFill>
-                <a:latin typeface="Arial" pitchFamily="34" charset="0"/>
-                <a:ea typeface="Arial" pitchFamily="34" charset="-122"/>
-                <a:cs typeface="Arial" pitchFamily="34" charset="-120"/>
-              </a:rPr>
-              <a:t>4</a:t>
-            </a:r>
-            <a:endParaRPr lang="en-US" sz="2000" dirty="0"/>
+            <a:off x="4297680" y="5166360"/>
+            <a:ext cx="3017520" cy="822960"/>
+          </a:xfrm>
+          <a:prstGeom prst="rect">
+            <a:avLst/>
+          </a:prstGeom>
+          <a:noFill/>
+          <a:ln/>
+        </p:spPr>
+        <p:txBody>
+          <a:bodyPr wrap="square" lIns="0" tIns="0" rIns="0" bIns="0" rtlCol="0" anchor="ctr"/>
+          <a:lstStyle/>
+          <a:p>
+            <a:pPr indent="0" marL="0">
+              <a:buNone/>
+            </a:pPr>
+            <a:r>
+              <a:rPr lang="en-US" sz="1500" dirty="0">
+                <a:solidFill>
+                  <a:srgbClr val="5C6B63"/>
+                </a:solidFill>
+                <a:latin typeface="Arial" pitchFamily="34" charset="0"/>
+                <a:ea typeface="Arial" pitchFamily="34" charset="-122"/>
+                <a:cs typeface="Arial" pitchFamily="34" charset="-120"/>
+              </a:rPr>
+              <a:t>сабмит</a:t>
+            </a:r>
+            <a:endParaRPr lang="en-US" sz="1500" dirty="0"/>
           </a:p>
         </p:txBody>
       </p:sp>
@@ -4481,24 +5846,24 @@
         </p:nvSpPr>
         <p:spPr>
           <a:xfrm>
-            <a:off x="1417320" y="4507992"/>
-            <a:ext cx="2377440" cy="548640"/>
-          </a:xfrm>
-          <a:prstGeom prst="rect">
-            <a:avLst/>
-          </a:prstGeom>
-          <a:noFill/>
-          <a:ln/>
-        </p:spPr>
-        <p:txBody>
-          <a:bodyPr wrap="square" lIns="0" tIns="0" rIns="0" bIns="0" rtlCol="0" anchor="ctr"/>
-          <a:lstStyle/>
-          <a:p>
-            <a:pPr indent="0" marL="0">
-              <a:buNone/>
-            </a:pPr>
-            <a:r>
-              <a:rPr lang="en-US" sz="1800" b="1" spc="100" kern="0" dirty="0">
+            <a:off x="7498080" y="5166360"/>
+            <a:ext cx="4023360" cy="822960"/>
+          </a:xfrm>
+          <a:prstGeom prst="rect">
+            <a:avLst/>
+          </a:prstGeom>
+          <a:noFill/>
+          <a:ln/>
+        </p:spPr>
+        <p:txBody>
+          <a:bodyPr wrap="square" lIns="0" tIns="0" rIns="0" bIns="0" rtlCol="0" anchor="ctr"/>
+          <a:lstStyle/>
+          <a:p>
+            <a:pPr indent="0" marL="0">
+              <a:buNone/>
+            </a:pPr>
+            <a:r>
+              <a:rPr lang="en-US" sz="1500" dirty="0">
                 <a:solidFill>
                   <a:srgbClr val="1A2420"/>
                 </a:solidFill>
@@ -4506,9 +5871,9 @@
                 <a:ea typeface="Arial" pitchFamily="34" charset="-122"/>
                 <a:cs typeface="Arial" pitchFamily="34" charset="-120"/>
               </a:rPr>
-              <a:t>ЭКОНОМИКА</a:t>
-            </a:r>
-            <a:endParaRPr lang="en-US" sz="1800" dirty="0"/>
+              <a:t>решение, которое кто-то примет и за которое ответит</a:t>
+            </a:r>
+            <a:endParaRPr lang="en-US" sz="1500" dirty="0"/>
           </a:p>
         </p:txBody>
       </p:sp>
@@ -4520,24 +5885,24 @@
         </p:nvSpPr>
         <p:spPr>
           <a:xfrm>
-            <a:off x="4023360" y="4535424"/>
-            <a:ext cx="7498080" cy="548640"/>
-          </a:xfrm>
-          <a:prstGeom prst="rect">
-            <a:avLst/>
-          </a:prstGeom>
-          <a:noFill/>
-          <a:ln/>
-        </p:spPr>
-        <p:txBody>
-          <a:bodyPr wrap="square" lIns="0" tIns="0" rIns="0" bIns="0" rtlCol="0" anchor="ctr"/>
-          <a:lstStyle/>
-          <a:p>
-            <a:pPr indent="0" marL="0">
-              <a:buNone/>
-            </a:pPr>
-            <a:r>
-              <a:rPr lang="en-US" sz="1600" dirty="0">
+            <a:off x="548640" y="6172200"/>
+            <a:ext cx="10424160" cy="457200"/>
+          </a:xfrm>
+          <a:prstGeom prst="rect">
+            <a:avLst/>
+          </a:prstGeom>
+          <a:noFill/>
+          <a:ln/>
+        </p:spPr>
+        <p:txBody>
+          <a:bodyPr wrap="square" lIns="0" tIns="0" rIns="0" bIns="0" rtlCol="0" anchor="ctr"/>
+          <a:lstStyle/>
+          <a:p>
+            <a:pPr indent="0" marL="0">
+              <a:buNone/>
+            </a:pPr>
+            <a:r>
+              <a:rPr lang="en-US" sz="1500" i="1" dirty="0">
                 <a:solidFill>
                   <a:srgbClr val="5C6B63"/>
                 </a:solidFill>
@@ -4545,214 +5910,15 @@
                 <a:ea typeface="Arial" pitchFamily="34" charset="-122"/>
                 <a:cs typeface="Arial" pitchFamily="34" charset="-120"/>
               </a:rPr>
-              <a:t>сколько стоит и принесёт? в каких сегментах иначе?</a:t>
-            </a:r>
-            <a:endParaRPr lang="en-US" sz="1600" dirty="0"/>
-          </a:p>
-        </p:txBody>
-      </p:sp>
-      <p:sp>
-        <p:nvSpPr>
-          <p:cNvPr id="24" name="Shape 22"/>
-          <p:cNvSpPr/>
-          <p:nvPr/>
-        </p:nvSpPr>
-        <p:spPr>
-          <a:xfrm>
-            <a:off x="832104" y="5074920"/>
-            <a:ext cx="0" cy="237744"/>
-          </a:xfrm>
-          <a:prstGeom prst="line">
-            <a:avLst/>
-          </a:prstGeom>
-          <a:noFill/>
-          <a:ln w="19050">
-            <a:solidFill>
-              <a:srgbClr val="1E6B47"/>
-            </a:solidFill>
-            <a:prstDash val="solid"/>
-          </a:ln>
-        </p:spPr>
-      </p:sp>
-      <p:sp>
-        <p:nvSpPr>
-          <p:cNvPr id="25" name="Shape 23"/>
-          <p:cNvSpPr/>
-          <p:nvPr/>
-        </p:nvSpPr>
-        <p:spPr>
-          <a:xfrm>
-            <a:off x="548640" y="5330952"/>
-            <a:ext cx="566928" cy="566928"/>
-          </a:xfrm>
-          <a:prstGeom prst="ellipse">
-            <a:avLst/>
-          </a:prstGeom>
-          <a:solidFill>
-            <a:srgbClr val="1E6B47"/>
-          </a:solidFill>
-          <a:ln/>
-        </p:spPr>
-      </p:sp>
-      <p:sp>
-        <p:nvSpPr>
-          <p:cNvPr id="26" name="Text 24"/>
-          <p:cNvSpPr/>
-          <p:nvPr/>
-        </p:nvSpPr>
-        <p:spPr>
-          <a:xfrm>
-            <a:off x="548640" y="5330952"/>
-            <a:ext cx="566928" cy="566928"/>
-          </a:xfrm>
-          <a:prstGeom prst="rect">
-            <a:avLst/>
-          </a:prstGeom>
-          <a:noFill/>
-          <a:ln/>
-        </p:spPr>
-        <p:txBody>
-          <a:bodyPr wrap="square" lIns="0" tIns="0" rIns="0" bIns="0" rtlCol="0" anchor="ctr"/>
-          <a:lstStyle/>
-          <a:p>
-            <a:pPr algn="ctr" indent="0" marL="0">
-              <a:buNone/>
-            </a:pPr>
-            <a:r>
-              <a:rPr lang="en-US" sz="2000" b="1" dirty="0">
-                <a:solidFill>
-                  <a:srgbClr val="FFFFFF"/>
-                </a:solidFill>
-                <a:latin typeface="Arial" pitchFamily="34" charset="0"/>
-                <a:ea typeface="Arial" pitchFamily="34" charset="-122"/>
-                <a:cs typeface="Arial" pitchFamily="34" charset="-120"/>
-              </a:rPr>
-              <a:t>5</a:t>
-            </a:r>
-            <a:endParaRPr lang="en-US" sz="2000" dirty="0"/>
-          </a:p>
-        </p:txBody>
-      </p:sp>
-      <p:sp>
-        <p:nvSpPr>
-          <p:cNvPr id="27" name="Text 25"/>
-          <p:cNvSpPr/>
-          <p:nvPr/>
-        </p:nvSpPr>
-        <p:spPr>
-          <a:xfrm>
-            <a:off x="1417320" y="5349240"/>
-            <a:ext cx="2377440" cy="548640"/>
-          </a:xfrm>
-          <a:prstGeom prst="rect">
-            <a:avLst/>
-          </a:prstGeom>
-          <a:noFill/>
-          <a:ln/>
-        </p:spPr>
-        <p:txBody>
-          <a:bodyPr wrap="square" lIns="0" tIns="0" rIns="0" bIns="0" rtlCol="0" anchor="ctr"/>
-          <a:lstStyle/>
-          <a:p>
-            <a:pPr indent="0" marL="0">
-              <a:buNone/>
-            </a:pPr>
-            <a:r>
-              <a:rPr lang="en-US" sz="1800" b="1" spc="100" kern="0" dirty="0">
-                <a:solidFill>
-                  <a:srgbClr val="1A2420"/>
-                </a:solidFill>
-                <a:latin typeface="Arial" pitchFamily="34" charset="0"/>
-                <a:ea typeface="Arial" pitchFamily="34" charset="-122"/>
-                <a:cs typeface="Arial" pitchFamily="34" charset="-120"/>
-              </a:rPr>
-              <a:t>ПРОВЕРКА</a:t>
-            </a:r>
-            <a:endParaRPr lang="en-US" sz="1800" dirty="0"/>
-          </a:p>
-        </p:txBody>
-      </p:sp>
-      <p:sp>
-        <p:nvSpPr>
-          <p:cNvPr id="28" name="Text 26"/>
-          <p:cNvSpPr/>
-          <p:nvPr/>
-        </p:nvSpPr>
-        <p:spPr>
-          <a:xfrm>
-            <a:off x="4023360" y="5376672"/>
-            <a:ext cx="7498080" cy="548640"/>
-          </a:xfrm>
-          <a:prstGeom prst="rect">
-            <a:avLst/>
-          </a:prstGeom>
-          <a:noFill/>
-          <a:ln/>
-        </p:spPr>
-        <p:txBody>
-          <a:bodyPr wrap="square" lIns="0" tIns="0" rIns="0" bIns="0" rtlCol="0" anchor="ctr"/>
-          <a:lstStyle/>
-          <a:p>
-            <a:pPr indent="0" marL="0">
-              <a:buNone/>
-            </a:pPr>
-            <a:r>
-              <a:rPr lang="en-US" sz="1600" dirty="0">
-                <a:solidFill>
-                  <a:srgbClr val="5C6B63"/>
-                </a:solidFill>
-                <a:latin typeface="Arial" pitchFamily="34" charset="0"/>
-                <a:ea typeface="Arial" pitchFamily="34" charset="-122"/>
-                <a:cs typeface="Arial" pitchFamily="34" charset="-120"/>
-              </a:rPr>
-              <a:t>как докажем эффект? A/B или что-то честнее?</a:t>
-            </a:r>
-            <a:endParaRPr lang="en-US" sz="1600" dirty="0"/>
-          </a:p>
-        </p:txBody>
-      </p:sp>
-      <p:sp>
-        <p:nvSpPr>
-          <p:cNvPr id="29" name="Text 27"/>
-          <p:cNvSpPr/>
-          <p:nvPr/>
-        </p:nvSpPr>
-        <p:spPr>
-          <a:xfrm>
-            <a:off x="548640" y="6263640"/>
-            <a:ext cx="10424160" cy="457200"/>
-          </a:xfrm>
-          <a:prstGeom prst="rect">
-            <a:avLst/>
-          </a:prstGeom>
-          <a:noFill/>
-          <a:ln/>
-        </p:spPr>
-        <p:txBody>
-          <a:bodyPr wrap="square" lIns="0" tIns="0" rIns="0" bIns="0" rtlCol="0" anchor="ctr"/>
-          <a:lstStyle/>
-          <a:p>
-            <a:pPr indent="0" marL="0">
-              <a:buNone/>
-            </a:pPr>
-            <a:r>
-              <a:rPr lang="en-US" sz="1600" b="1" dirty="0">
-                <a:solidFill>
-                  <a:srgbClr val="E8590C"/>
-                </a:solidFill>
-                <a:latin typeface="Arial" pitchFamily="34" charset="0"/>
-                <a:ea typeface="Arial" pitchFamily="34" charset="-122"/>
-                <a:cs typeface="Arial" pitchFamily="34" charset="-120"/>
-              </a:rPr>
-              <a:t>Над всем — ML-рычаг: в какой точке модель реально нужна, а в какой это карго-культ.</a:t>
-            </a:r>
-            <a:endParaRPr lang="en-US" sz="1600" dirty="0"/>
-          </a:p>
-        </p:txBody>
-      </p:sp>
-      <p:sp>
-        <p:nvSpPr>
-          <p:cNvPr id="30" name="Text 28"/>
+              <a:t>Вопрос залу: какой пункт чаще всего игнорируют ML-инженеры?</a:t>
+            </a:r>
+            <a:endParaRPr lang="en-US" sz="1500" dirty="0"/>
+          </a:p>
+        </p:txBody>
+      </p:sp>
+      <p:sp>
+        <p:nvSpPr>
+          <p:cNvPr id="24" name="Text 22"/>
           <p:cNvSpPr/>
           <p:nvPr/>
         </p:nvSpPr>
@@ -4854,7 +6020,7 @@
                 <a:ea typeface="Arial" pitchFamily="34" charset="-122"/>
                 <a:cs typeface="Arial" pitchFamily="34" charset="-120"/>
               </a:rPr>
-              <a:t>НЕДЕЛЯ 1 · ML-ПРИМЕР</a:t>
+              <a:t>НЕДЕЛЯ 1 · ЛЕКЦИЯ</a:t>
             </a:r>
             <a:endParaRPr lang="en-US" sz="1200" dirty="0"/>
           </a:p>
@@ -4893,7 +6059,7 @@
                 <a:ea typeface="Arial" pitchFamily="34" charset="-122"/>
                 <a:cs typeface="Arial" pitchFamily="34" charset="-120"/>
               </a:rPr>
-              <a:t>КВАРТАЛ РАБОТЫ RECSYS «ЛУКОШКО»</a:t>
+              <a:t>РЕФЛЕКС, КОТОРЫЙ ЛЕЧИМ ВЕСЬ КУРС</a:t>
             </a:r>
             <a:endParaRPr lang="en-US" sz="1200" dirty="0"/>
           </a:p>
@@ -4932,6 +6098,1477 @@
                 <a:ea typeface="Arial" pitchFamily="34" charset="-122"/>
                 <a:cs typeface="Arial" pitchFamily="34" charset="-120"/>
               </a:rPr>
+              <a:t>«Сначала модель» — не работает</a:t>
+            </a:r>
+            <a:endParaRPr lang="en-US" sz="3000" dirty="0"/>
+          </a:p>
+        </p:txBody>
+      </p:sp>
+      <p:sp>
+        <p:nvSpPr>
+          <p:cNvPr id="5" name="Shape 3"/>
+          <p:cNvSpPr/>
+          <p:nvPr/>
+        </p:nvSpPr>
+        <p:spPr>
+          <a:xfrm>
+            <a:off x="548640" y="2194560"/>
+            <a:ext cx="11091672" cy="1417320"/>
+          </a:xfrm>
+          <a:prstGeom prst="roundRect">
+            <a:avLst>
+              <a:gd name="adj" fmla="val 6452"/>
+            </a:avLst>
+          </a:prstGeom>
+          <a:solidFill>
+            <a:srgbClr val="ECEEEC"/>
+          </a:solidFill>
+          <a:ln/>
+        </p:spPr>
+      </p:sp>
+      <p:sp>
+        <p:nvSpPr>
+          <p:cNvPr id="6" name="Shape 4"/>
+          <p:cNvSpPr/>
+          <p:nvPr/>
+        </p:nvSpPr>
+        <p:spPr>
+          <a:xfrm>
+            <a:off x="868680" y="2601468"/>
+            <a:ext cx="603504" cy="603504"/>
+          </a:xfrm>
+          <a:prstGeom prst="ellipse">
+            <a:avLst/>
+          </a:prstGeom>
+          <a:solidFill>
+            <a:srgbClr val="B3543F"/>
+          </a:solidFill>
+          <a:ln/>
+        </p:spPr>
+      </p:sp>
+      <p:sp>
+        <p:nvSpPr>
+          <p:cNvPr id="7" name="Text 5"/>
+          <p:cNvSpPr/>
+          <p:nvPr/>
+        </p:nvSpPr>
+        <p:spPr>
+          <a:xfrm>
+            <a:off x="868680" y="2601468"/>
+            <a:ext cx="603504" cy="603504"/>
+          </a:xfrm>
+          <a:prstGeom prst="rect">
+            <a:avLst/>
+          </a:prstGeom>
+          <a:noFill/>
+          <a:ln/>
+        </p:spPr>
+        <p:txBody>
+          <a:bodyPr wrap="square" lIns="0" tIns="0" rIns="0" bIns="0" rtlCol="0" anchor="ctr"/>
+          <a:lstStyle/>
+          <a:p>
+            <a:pPr algn="ctr" indent="0" marL="0">
+              <a:buNone/>
+            </a:pPr>
+            <a:r>
+              <a:rPr lang="en-US" sz="2400" b="1" dirty="0">
+                <a:solidFill>
+                  <a:srgbClr val="FFFFFF"/>
+                </a:solidFill>
+                <a:latin typeface="Arial" pitchFamily="34" charset="0"/>
+                <a:ea typeface="Arial" pitchFamily="34" charset="-122"/>
+                <a:cs typeface="Arial" pitchFamily="34" charset="-120"/>
+              </a:rPr>
+              <a:t>✕</a:t>
+            </a:r>
+            <a:endParaRPr lang="en-US" sz="2400" dirty="0"/>
+          </a:p>
+        </p:txBody>
+      </p:sp>
+      <p:sp>
+        <p:nvSpPr>
+          <p:cNvPr id="8" name="Text 6"/>
+          <p:cNvSpPr/>
+          <p:nvPr/>
+        </p:nvSpPr>
+        <p:spPr>
+          <a:xfrm>
+            <a:off x="1783080" y="2331720"/>
+            <a:ext cx="9537192" cy="1143000"/>
+          </a:xfrm>
+          <a:prstGeom prst="rect">
+            <a:avLst/>
+          </a:prstGeom>
+          <a:noFill/>
+          <a:ln/>
+        </p:spPr>
+        <p:txBody>
+          <a:bodyPr wrap="square" lIns="0" tIns="0" rIns="0" bIns="0" rtlCol="0" anchor="ctr"/>
+          <a:lstStyle/>
+          <a:p>
+            <a:pPr indent="0" marL="0">
+              <a:buNone/>
+            </a:pPr>
+            <a:r>
+              <a:rPr lang="en-US" sz="1800" dirty="0">
+                <a:solidFill>
+                  <a:srgbClr val="4A4A4A"/>
+                </a:solidFill>
+                <a:latin typeface="Arial" pitchFamily="34" charset="0"/>
+                <a:ea typeface="Arial" pitchFamily="34" charset="-122"/>
+                <a:cs typeface="Arial" pitchFamily="34" charset="-120"/>
+              </a:rPr>
+              <a:t>Обучить модель, потому что «это в задании»</a:t>
+            </a:r>
+            <a:endParaRPr lang="en-US" sz="1800" dirty="0"/>
+          </a:p>
+        </p:txBody>
+      </p:sp>
+      <p:sp>
+        <p:nvSpPr>
+          <p:cNvPr id="9" name="Shape 7"/>
+          <p:cNvSpPr/>
+          <p:nvPr/>
+        </p:nvSpPr>
+        <p:spPr>
+          <a:xfrm>
+            <a:off x="548640" y="4023360"/>
+            <a:ext cx="11091672" cy="1417320"/>
+          </a:xfrm>
+          <a:prstGeom prst="roundRect">
+            <a:avLst>
+              <a:gd name="adj" fmla="val 6452"/>
+            </a:avLst>
+          </a:prstGeom>
+          <a:solidFill>
+            <a:srgbClr val="EDF4EF"/>
+          </a:solidFill>
+          <a:ln/>
+        </p:spPr>
+      </p:sp>
+      <p:sp>
+        <p:nvSpPr>
+          <p:cNvPr id="10" name="Shape 8"/>
+          <p:cNvSpPr/>
+          <p:nvPr/>
+        </p:nvSpPr>
+        <p:spPr>
+          <a:xfrm>
+            <a:off x="868680" y="4430268"/>
+            <a:ext cx="603504" cy="603504"/>
+          </a:xfrm>
+          <a:prstGeom prst="ellipse">
+            <a:avLst/>
+          </a:prstGeom>
+          <a:solidFill>
+            <a:srgbClr val="1E6B47"/>
+          </a:solidFill>
+          <a:ln/>
+        </p:spPr>
+      </p:sp>
+      <p:sp>
+        <p:nvSpPr>
+          <p:cNvPr id="11" name="Text 9"/>
+          <p:cNvSpPr/>
+          <p:nvPr/>
+        </p:nvSpPr>
+        <p:spPr>
+          <a:xfrm>
+            <a:off x="868680" y="4430268"/>
+            <a:ext cx="603504" cy="603504"/>
+          </a:xfrm>
+          <a:prstGeom prst="rect">
+            <a:avLst/>
+          </a:prstGeom>
+          <a:noFill/>
+          <a:ln/>
+        </p:spPr>
+        <p:txBody>
+          <a:bodyPr wrap="square" lIns="0" tIns="0" rIns="0" bIns="0" rtlCol="0" anchor="ctr"/>
+          <a:lstStyle/>
+          <a:p>
+            <a:pPr algn="ctr" indent="0" marL="0">
+              <a:buNone/>
+            </a:pPr>
+            <a:r>
+              <a:rPr lang="en-US" sz="2200" b="1" dirty="0">
+                <a:solidFill>
+                  <a:srgbClr val="FFFFFF"/>
+                </a:solidFill>
+                <a:latin typeface="Arial" pitchFamily="34" charset="0"/>
+                <a:ea typeface="Arial" pitchFamily="34" charset="-122"/>
+                <a:cs typeface="Arial" pitchFamily="34" charset="-120"/>
+              </a:rPr>
+              <a:t>✓</a:t>
+            </a:r>
+            <a:endParaRPr lang="en-US" sz="2200" dirty="0"/>
+          </a:p>
+        </p:txBody>
+      </p:sp>
+      <p:sp>
+        <p:nvSpPr>
+          <p:cNvPr id="12" name="Text 10"/>
+          <p:cNvSpPr/>
+          <p:nvPr/>
+        </p:nvSpPr>
+        <p:spPr>
+          <a:xfrm>
+            <a:off x="1783080" y="4160520"/>
+            <a:ext cx="9537192" cy="1143000"/>
+          </a:xfrm>
+          <a:prstGeom prst="rect">
+            <a:avLst/>
+          </a:prstGeom>
+          <a:noFill/>
+          <a:ln/>
+        </p:spPr>
+        <p:txBody>
+          <a:bodyPr wrap="square" lIns="0" tIns="0" rIns="0" bIns="0" rtlCol="0" anchor="ctr"/>
+          <a:lstStyle/>
+          <a:p>
+            <a:pPr indent="0" marL="0">
+              <a:buNone/>
+            </a:pPr>
+            <a:r>
+              <a:rPr lang="en-US" sz="1800" b="1" dirty="0">
+                <a:solidFill>
+                  <a:srgbClr val="1E6B47"/>
+                </a:solidFill>
+                <a:latin typeface="Arial" pitchFamily="34" charset="0"/>
+                <a:ea typeface="Arial" pitchFamily="34" charset="-122"/>
+                <a:cs typeface="Arial" pitchFamily="34" charset="-120"/>
+              </a:rPr>
+              <a:t>Сначала спросить: что изменит решение — и кто это заметит в деньгах</a:t>
+            </a:r>
+            <a:endParaRPr lang="en-US" sz="1800" dirty="0"/>
+          </a:p>
+        </p:txBody>
+      </p:sp>
+      <p:sp>
+        <p:nvSpPr>
+          <p:cNvPr id="13" name="Text 11"/>
+          <p:cNvSpPr/>
+          <p:nvPr/>
+        </p:nvSpPr>
+        <p:spPr>
+          <a:xfrm>
+            <a:off x="548640" y="5989320"/>
+            <a:ext cx="10424160" cy="457200"/>
+          </a:xfrm>
+          <a:prstGeom prst="rect">
+            <a:avLst/>
+          </a:prstGeom>
+          <a:noFill/>
+          <a:ln/>
+        </p:spPr>
+        <p:txBody>
+          <a:bodyPr wrap="square" lIns="0" tIns="0" rIns="0" bIns="0" rtlCol="0" anchor="ctr"/>
+          <a:lstStyle/>
+          <a:p>
+            <a:pPr indent="0" marL="0">
+              <a:buNone/>
+            </a:pPr>
+            <a:r>
+              <a:rPr lang="en-US" sz="1500" i="1" dirty="0">
+                <a:solidFill>
+                  <a:srgbClr val="5C6B63"/>
+                </a:solidFill>
+                <a:latin typeface="Arial" pitchFamily="34" charset="0"/>
+                <a:ea typeface="Arial" pitchFamily="34" charset="-122"/>
+                <a:cs typeface="Arial" pitchFamily="34" charset="-120"/>
+              </a:rPr>
+              <a:t>Если узнали себя — хорошо: курс ровно про это.</a:t>
+            </a:r>
+            <a:endParaRPr lang="en-US" sz="1500" dirty="0"/>
+          </a:p>
+        </p:txBody>
+      </p:sp>
+      <p:sp>
+        <p:nvSpPr>
+          <p:cNvPr id="14" name="Text 12"/>
+          <p:cNvSpPr/>
+          <p:nvPr/>
+        </p:nvSpPr>
+        <p:spPr>
+          <a:xfrm>
+            <a:off x="11000232" y="6400800"/>
+            <a:ext cx="640080" cy="274320"/>
+          </a:xfrm>
+          <a:prstGeom prst="rect">
+            <a:avLst/>
+          </a:prstGeom>
+          <a:noFill/>
+          <a:ln/>
+        </p:spPr>
+        <p:txBody>
+          <a:bodyPr wrap="square" lIns="0" tIns="0" rIns="0" bIns="0" rtlCol="0" anchor="ctr"/>
+          <a:lstStyle/>
+          <a:p>
+            <a:pPr algn="r" indent="0" marL="0">
+              <a:buNone/>
+            </a:pPr>
+            <a:r>
+              <a:rPr lang="en-US" sz="1200" dirty="0">
+                <a:solidFill>
+                  <a:srgbClr val="5C6B63"/>
+                </a:solidFill>
+                <a:latin typeface="Arial" pitchFamily="34" charset="0"/>
+                <a:ea typeface="Arial" pitchFamily="34" charset="-122"/>
+                <a:cs typeface="Arial" pitchFamily="34" charset="-120"/>
+              </a:rPr>
+              <a:t>12</a:t>
+            </a:r>
+            <a:endParaRPr lang="en-US" sz="1200" dirty="0"/>
+          </a:p>
+        </p:txBody>
+      </p:sp>
+    </p:spTree>
+  </p:cSld>
+  <p:clrMapOvr>
+    <a:masterClrMapping/>
+  </p:clrMapOvr>
+</p:sld>
+</file>
+
+<file path=ppt/slides/slide13.xml><?xml version="1.0" encoding="utf-8"?>
+<p:sld xmlns:a="http://schemas.openxmlformats.org/drawingml/2006/main" xmlns:r="http://schemas.openxmlformats.org/officeDocument/2006/relationships" xmlns:p="http://schemas.openxmlformats.org/presentationml/2006/main">
+  <p:cSld name="Slide 13">
+    <p:bg>
+      <p:bgPr>
+        <a:solidFill>
+          <a:srgbClr val="FFFFFF"/>
+        </a:solidFill>
+      </p:bgPr>
+    </p:bg>
+    <p:spTree>
+      <p:nvGrpSpPr>
+        <p:cNvPr id="1" name=""/>
+        <p:cNvGrpSpPr/>
+        <p:nvPr/>
+      </p:nvGrpSpPr>
+      <p:grpSpPr>
+        <a:xfrm>
+          <a:off x="0" y="0"/>
+          <a:ext cx="0" cy="0"/>
+          <a:chOff x="0" y="0"/>
+          <a:chExt cx="0" cy="0"/>
+        </a:xfrm>
+      </p:grpSpPr>
+      <p:sp>
+        <p:nvSpPr>
+          <p:cNvPr id="2" name="Text 0"/>
+          <p:cNvSpPr/>
+          <p:nvPr/>
+        </p:nvSpPr>
+        <p:spPr>
+          <a:xfrm>
+            <a:off x="9262872" y="384048"/>
+            <a:ext cx="2377440" cy="274320"/>
+          </a:xfrm>
+          <a:prstGeom prst="rect">
+            <a:avLst/>
+          </a:prstGeom>
+          <a:noFill/>
+          <a:ln/>
+        </p:spPr>
+        <p:txBody>
+          <a:bodyPr wrap="square" lIns="0" tIns="0" rIns="0" bIns="0" rtlCol="0" anchor="ctr"/>
+          <a:lstStyle/>
+          <a:p>
+            <a:pPr algn="r" indent="0" marL="0">
+              <a:buNone/>
+            </a:pPr>
+            <a:r>
+              <a:rPr lang="en-US" sz="1200" b="1" spc="200" kern="0" dirty="0">
+                <a:solidFill>
+                  <a:srgbClr val="5C6B63"/>
+                </a:solidFill>
+                <a:latin typeface="Arial" pitchFamily="34" charset="0"/>
+                <a:ea typeface="Arial" pitchFamily="34" charset="-122"/>
+                <a:cs typeface="Arial" pitchFamily="34" charset="-120"/>
+              </a:rPr>
+              <a:t>НЕДЕЛЯ 1 · ЛЕКЦИЯ</a:t>
+            </a:r>
+            <a:endParaRPr lang="en-US" sz="1200" dirty="0"/>
+          </a:p>
+        </p:txBody>
+      </p:sp>
+      <p:sp>
+        <p:nvSpPr>
+          <p:cNvPr id="3" name="Text 1"/>
+          <p:cNvSpPr/>
+          <p:nvPr/>
+        </p:nvSpPr>
+        <p:spPr>
+          <a:xfrm>
+            <a:off x="548640" y="384048"/>
+            <a:ext cx="7315200" cy="274320"/>
+          </a:xfrm>
+          <a:prstGeom prst="rect">
+            <a:avLst/>
+          </a:prstGeom>
+          <a:noFill/>
+          <a:ln/>
+        </p:spPr>
+        <p:txBody>
+          <a:bodyPr wrap="square" lIns="0" tIns="0" rIns="0" bIns="0" rtlCol="0" anchor="ctr"/>
+          <a:lstStyle/>
+          <a:p>
+            <a:pPr indent="0" marL="0">
+              <a:buNone/>
+            </a:pPr>
+            <a:r>
+              <a:rPr lang="en-US" sz="1200" b="1" spc="200" kern="0" dirty="0">
+                <a:solidFill>
+                  <a:srgbClr val="E8590C"/>
+                </a:solidFill>
+                <a:latin typeface="Arial" pitchFamily="34" charset="0"/>
+                <a:ea typeface="Arial" pitchFamily="34" charset="-122"/>
+                <a:cs typeface="Arial" pitchFamily="34" charset="-120"/>
+              </a:rPr>
+              <a:t>ОДИН ФРЕЙМВОРК НА ВЕСЬ КУРС</a:t>
+            </a:r>
+            <a:endParaRPr lang="en-US" sz="1200" dirty="0"/>
+          </a:p>
+        </p:txBody>
+      </p:sp>
+      <p:sp>
+        <p:nvSpPr>
+          <p:cNvPr id="4" name="Text 2"/>
+          <p:cNvSpPr/>
+          <p:nvPr/>
+        </p:nvSpPr>
+        <p:spPr>
+          <a:xfrm>
+            <a:off x="548640" y="658368"/>
+            <a:ext cx="9079992" cy="777240"/>
+          </a:xfrm>
+          <a:prstGeom prst="rect">
+            <a:avLst/>
+          </a:prstGeom>
+          <a:noFill/>
+          <a:ln/>
+        </p:spPr>
+        <p:txBody>
+          <a:bodyPr wrap="square" lIns="0" tIns="0" rIns="0" bIns="0" rtlCol="0" anchor="ctr"/>
+          <a:lstStyle/>
+          <a:p>
+            <a:pPr indent="0" marL="0">
+              <a:buNone/>
+            </a:pPr>
+            <a:r>
+              <a:rPr lang="en-US" sz="3000" b="1" dirty="0">
+                <a:solidFill>
+                  <a:srgbClr val="1A2420"/>
+                </a:solidFill>
+                <a:latin typeface="Arial" pitchFamily="34" charset="0"/>
+                <a:ea typeface="Arial" pitchFamily="34" charset="-122"/>
+                <a:cs typeface="Arial" pitchFamily="34" charset="-120"/>
+              </a:rPr>
+              <a:t>Пять шагов — повторяем каждую неделю, каждый раз глубже</a:t>
+            </a:r>
+            <a:endParaRPr lang="en-US" sz="3000" dirty="0"/>
+          </a:p>
+        </p:txBody>
+      </p:sp>
+      <p:sp>
+        <p:nvSpPr>
+          <p:cNvPr id="5" name="Shape 3"/>
+          <p:cNvSpPr/>
+          <p:nvPr/>
+        </p:nvSpPr>
+        <p:spPr>
+          <a:xfrm>
+            <a:off x="548640" y="1965960"/>
+            <a:ext cx="566928" cy="566928"/>
+          </a:xfrm>
+          <a:prstGeom prst="ellipse">
+            <a:avLst/>
+          </a:prstGeom>
+          <a:solidFill>
+            <a:srgbClr val="1E6B47"/>
+          </a:solidFill>
+          <a:ln/>
+        </p:spPr>
+      </p:sp>
+      <p:sp>
+        <p:nvSpPr>
+          <p:cNvPr id="6" name="Text 4"/>
+          <p:cNvSpPr/>
+          <p:nvPr/>
+        </p:nvSpPr>
+        <p:spPr>
+          <a:xfrm>
+            <a:off x="548640" y="1965960"/>
+            <a:ext cx="566928" cy="566928"/>
+          </a:xfrm>
+          <a:prstGeom prst="rect">
+            <a:avLst/>
+          </a:prstGeom>
+          <a:noFill/>
+          <a:ln/>
+        </p:spPr>
+        <p:txBody>
+          <a:bodyPr wrap="square" lIns="0" tIns="0" rIns="0" bIns="0" rtlCol="0" anchor="ctr"/>
+          <a:lstStyle/>
+          <a:p>
+            <a:pPr algn="ctr" indent="0" marL="0">
+              <a:buNone/>
+            </a:pPr>
+            <a:r>
+              <a:rPr lang="en-US" sz="2000" b="1" dirty="0">
+                <a:solidFill>
+                  <a:srgbClr val="FFFFFF"/>
+                </a:solidFill>
+                <a:latin typeface="Arial" pitchFamily="34" charset="0"/>
+                <a:ea typeface="Arial" pitchFamily="34" charset="-122"/>
+                <a:cs typeface="Arial" pitchFamily="34" charset="-120"/>
+              </a:rPr>
+              <a:t>1</a:t>
+            </a:r>
+            <a:endParaRPr lang="en-US" sz="2000" dirty="0"/>
+          </a:p>
+        </p:txBody>
+      </p:sp>
+      <p:sp>
+        <p:nvSpPr>
+          <p:cNvPr id="7" name="Text 5"/>
+          <p:cNvSpPr/>
+          <p:nvPr/>
+        </p:nvSpPr>
+        <p:spPr>
+          <a:xfrm>
+            <a:off x="1417320" y="1984248"/>
+            <a:ext cx="2377440" cy="548640"/>
+          </a:xfrm>
+          <a:prstGeom prst="rect">
+            <a:avLst/>
+          </a:prstGeom>
+          <a:noFill/>
+          <a:ln/>
+        </p:spPr>
+        <p:txBody>
+          <a:bodyPr wrap="square" lIns="0" tIns="0" rIns="0" bIns="0" rtlCol="0" anchor="ctr"/>
+          <a:lstStyle/>
+          <a:p>
+            <a:pPr indent="0" marL="0">
+              <a:buNone/>
+            </a:pPr>
+            <a:r>
+              <a:rPr lang="en-US" sz="1800" b="1" spc="100" kern="0" dirty="0">
+                <a:solidFill>
+                  <a:srgbClr val="1A2420"/>
+                </a:solidFill>
+                <a:latin typeface="Arial" pitchFamily="34" charset="0"/>
+                <a:ea typeface="Arial" pitchFamily="34" charset="-122"/>
+                <a:cs typeface="Arial" pitchFamily="34" charset="-120"/>
+              </a:rPr>
+              <a:t>ВОПРОС</a:t>
+            </a:r>
+            <a:endParaRPr lang="en-US" sz="1800" dirty="0"/>
+          </a:p>
+        </p:txBody>
+      </p:sp>
+      <p:sp>
+        <p:nvSpPr>
+          <p:cNvPr id="8" name="Text 6"/>
+          <p:cNvSpPr/>
+          <p:nvPr/>
+        </p:nvSpPr>
+        <p:spPr>
+          <a:xfrm>
+            <a:off x="4023360" y="2011680"/>
+            <a:ext cx="7498080" cy="548640"/>
+          </a:xfrm>
+          <a:prstGeom prst="rect">
+            <a:avLst/>
+          </a:prstGeom>
+          <a:noFill/>
+          <a:ln/>
+        </p:spPr>
+        <p:txBody>
+          <a:bodyPr wrap="square" lIns="0" tIns="0" rIns="0" bIns="0" rtlCol="0" anchor="ctr"/>
+          <a:lstStyle/>
+          <a:p>
+            <a:pPr indent="0" marL="0">
+              <a:buNone/>
+            </a:pPr>
+            <a:r>
+              <a:rPr lang="en-US" sz="1600" dirty="0">
+                <a:solidFill>
+                  <a:srgbClr val="5C6B63"/>
+                </a:solidFill>
+                <a:latin typeface="Arial" pitchFamily="34" charset="0"/>
+                <a:ea typeface="Arial" pitchFamily="34" charset="-122"/>
+                <a:cs typeface="Arial" pitchFamily="34" charset="-120"/>
+              </a:rPr>
+              <a:t>какой вопрос бизнеса? кто и что изменит от ответа?</a:t>
+            </a:r>
+            <a:endParaRPr lang="en-US" sz="1600" dirty="0"/>
+          </a:p>
+        </p:txBody>
+      </p:sp>
+      <p:sp>
+        <p:nvSpPr>
+          <p:cNvPr id="9" name="Shape 7"/>
+          <p:cNvSpPr/>
+          <p:nvPr/>
+        </p:nvSpPr>
+        <p:spPr>
+          <a:xfrm>
+            <a:off x="832104" y="2551176"/>
+            <a:ext cx="0" cy="237744"/>
+          </a:xfrm>
+          <a:prstGeom prst="line">
+            <a:avLst/>
+          </a:prstGeom>
+          <a:noFill/>
+          <a:ln w="19050">
+            <a:solidFill>
+              <a:srgbClr val="1E6B47"/>
+            </a:solidFill>
+            <a:prstDash val="solid"/>
+          </a:ln>
+        </p:spPr>
+      </p:sp>
+      <p:sp>
+        <p:nvSpPr>
+          <p:cNvPr id="10" name="Shape 8"/>
+          <p:cNvSpPr/>
+          <p:nvPr/>
+        </p:nvSpPr>
+        <p:spPr>
+          <a:xfrm>
+            <a:off x="548640" y="2807208"/>
+            <a:ext cx="566928" cy="566928"/>
+          </a:xfrm>
+          <a:prstGeom prst="ellipse">
+            <a:avLst/>
+          </a:prstGeom>
+          <a:solidFill>
+            <a:srgbClr val="1E6B47"/>
+          </a:solidFill>
+          <a:ln/>
+        </p:spPr>
+      </p:sp>
+      <p:sp>
+        <p:nvSpPr>
+          <p:cNvPr id="11" name="Text 9"/>
+          <p:cNvSpPr/>
+          <p:nvPr/>
+        </p:nvSpPr>
+        <p:spPr>
+          <a:xfrm>
+            <a:off x="548640" y="2807208"/>
+            <a:ext cx="566928" cy="566928"/>
+          </a:xfrm>
+          <a:prstGeom prst="rect">
+            <a:avLst/>
+          </a:prstGeom>
+          <a:noFill/>
+          <a:ln/>
+        </p:spPr>
+        <p:txBody>
+          <a:bodyPr wrap="square" lIns="0" tIns="0" rIns="0" bIns="0" rtlCol="0" anchor="ctr"/>
+          <a:lstStyle/>
+          <a:p>
+            <a:pPr algn="ctr" indent="0" marL="0">
+              <a:buNone/>
+            </a:pPr>
+            <a:r>
+              <a:rPr lang="en-US" sz="2000" b="1" dirty="0">
+                <a:solidFill>
+                  <a:srgbClr val="FFFFFF"/>
+                </a:solidFill>
+                <a:latin typeface="Arial" pitchFamily="34" charset="0"/>
+                <a:ea typeface="Arial" pitchFamily="34" charset="-122"/>
+                <a:cs typeface="Arial" pitchFamily="34" charset="-120"/>
+              </a:rPr>
+              <a:t>2</a:t>
+            </a:r>
+            <a:endParaRPr lang="en-US" sz="2000" dirty="0"/>
+          </a:p>
+        </p:txBody>
+      </p:sp>
+      <p:sp>
+        <p:nvSpPr>
+          <p:cNvPr id="12" name="Text 10"/>
+          <p:cNvSpPr/>
+          <p:nvPr/>
+        </p:nvSpPr>
+        <p:spPr>
+          <a:xfrm>
+            <a:off x="1417320" y="2825496"/>
+            <a:ext cx="2377440" cy="548640"/>
+          </a:xfrm>
+          <a:prstGeom prst="rect">
+            <a:avLst/>
+          </a:prstGeom>
+          <a:noFill/>
+          <a:ln/>
+        </p:spPr>
+        <p:txBody>
+          <a:bodyPr wrap="square" lIns="0" tIns="0" rIns="0" bIns="0" rtlCol="0" anchor="ctr"/>
+          <a:lstStyle/>
+          <a:p>
+            <a:pPr indent="0" marL="0">
+              <a:buNone/>
+            </a:pPr>
+            <a:r>
+              <a:rPr lang="en-US" sz="1800" b="1" spc="100" kern="0" dirty="0">
+                <a:solidFill>
+                  <a:srgbClr val="1A2420"/>
+                </a:solidFill>
+                <a:latin typeface="Arial" pitchFamily="34" charset="0"/>
+                <a:ea typeface="Arial" pitchFamily="34" charset="-122"/>
+                <a:cs typeface="Arial" pitchFamily="34" charset="-120"/>
+              </a:rPr>
+              <a:t>ВОРОНКА</a:t>
+            </a:r>
+            <a:endParaRPr lang="en-US" sz="1800" dirty="0"/>
+          </a:p>
+        </p:txBody>
+      </p:sp>
+      <p:sp>
+        <p:nvSpPr>
+          <p:cNvPr id="13" name="Text 11"/>
+          <p:cNvSpPr/>
+          <p:nvPr/>
+        </p:nvSpPr>
+        <p:spPr>
+          <a:xfrm>
+            <a:off x="4023360" y="2852928"/>
+            <a:ext cx="7498080" cy="548640"/>
+          </a:xfrm>
+          <a:prstGeom prst="rect">
+            <a:avLst/>
+          </a:prstGeom>
+          <a:noFill/>
+          <a:ln/>
+        </p:spPr>
+        <p:txBody>
+          <a:bodyPr wrap="square" lIns="0" tIns="0" rIns="0" bIns="0" rtlCol="0" anchor="ctr"/>
+          <a:lstStyle/>
+          <a:p>
+            <a:pPr indent="0" marL="0">
+              <a:buNone/>
+            </a:pPr>
+            <a:r>
+              <a:rPr lang="en-US" sz="1600" dirty="0">
+                <a:solidFill>
+                  <a:srgbClr val="5C6B63"/>
+                </a:solidFill>
+                <a:latin typeface="Arial" pitchFamily="34" charset="0"/>
+                <a:ea typeface="Arial" pitchFamily="34" charset="-122"/>
+                <a:cs typeface="Arial" pitchFamily="34" charset="-120"/>
+              </a:rPr>
+              <a:t>где в пути пользователя это живёт? где болит?</a:t>
+            </a:r>
+            <a:endParaRPr lang="en-US" sz="1600" dirty="0"/>
+          </a:p>
+        </p:txBody>
+      </p:sp>
+      <p:sp>
+        <p:nvSpPr>
+          <p:cNvPr id="14" name="Shape 12"/>
+          <p:cNvSpPr/>
+          <p:nvPr/>
+        </p:nvSpPr>
+        <p:spPr>
+          <a:xfrm>
+            <a:off x="832104" y="3392424"/>
+            <a:ext cx="0" cy="237744"/>
+          </a:xfrm>
+          <a:prstGeom prst="line">
+            <a:avLst/>
+          </a:prstGeom>
+          <a:noFill/>
+          <a:ln w="19050">
+            <a:solidFill>
+              <a:srgbClr val="1E6B47"/>
+            </a:solidFill>
+            <a:prstDash val="solid"/>
+          </a:ln>
+        </p:spPr>
+      </p:sp>
+      <p:sp>
+        <p:nvSpPr>
+          <p:cNvPr id="15" name="Shape 13"/>
+          <p:cNvSpPr/>
+          <p:nvPr/>
+        </p:nvSpPr>
+        <p:spPr>
+          <a:xfrm>
+            <a:off x="548640" y="3648456"/>
+            <a:ext cx="566928" cy="566928"/>
+          </a:xfrm>
+          <a:prstGeom prst="ellipse">
+            <a:avLst/>
+          </a:prstGeom>
+          <a:solidFill>
+            <a:srgbClr val="1E6B47"/>
+          </a:solidFill>
+          <a:ln/>
+        </p:spPr>
+      </p:sp>
+      <p:sp>
+        <p:nvSpPr>
+          <p:cNvPr id="16" name="Text 14"/>
+          <p:cNvSpPr/>
+          <p:nvPr/>
+        </p:nvSpPr>
+        <p:spPr>
+          <a:xfrm>
+            <a:off x="548640" y="3648456"/>
+            <a:ext cx="566928" cy="566928"/>
+          </a:xfrm>
+          <a:prstGeom prst="rect">
+            <a:avLst/>
+          </a:prstGeom>
+          <a:noFill/>
+          <a:ln/>
+        </p:spPr>
+        <p:txBody>
+          <a:bodyPr wrap="square" lIns="0" tIns="0" rIns="0" bIns="0" rtlCol="0" anchor="ctr"/>
+          <a:lstStyle/>
+          <a:p>
+            <a:pPr algn="ctr" indent="0" marL="0">
+              <a:buNone/>
+            </a:pPr>
+            <a:r>
+              <a:rPr lang="en-US" sz="2000" b="1" dirty="0">
+                <a:solidFill>
+                  <a:srgbClr val="FFFFFF"/>
+                </a:solidFill>
+                <a:latin typeface="Arial" pitchFamily="34" charset="0"/>
+                <a:ea typeface="Arial" pitchFamily="34" charset="-122"/>
+                <a:cs typeface="Arial" pitchFamily="34" charset="-120"/>
+              </a:rPr>
+              <a:t>3</a:t>
+            </a:r>
+            <a:endParaRPr lang="en-US" sz="2000" dirty="0"/>
+          </a:p>
+        </p:txBody>
+      </p:sp>
+      <p:sp>
+        <p:nvSpPr>
+          <p:cNvPr id="17" name="Text 15"/>
+          <p:cNvSpPr/>
+          <p:nvPr/>
+        </p:nvSpPr>
+        <p:spPr>
+          <a:xfrm>
+            <a:off x="1417320" y="3666744"/>
+            <a:ext cx="2377440" cy="548640"/>
+          </a:xfrm>
+          <a:prstGeom prst="rect">
+            <a:avLst/>
+          </a:prstGeom>
+          <a:noFill/>
+          <a:ln/>
+        </p:spPr>
+        <p:txBody>
+          <a:bodyPr wrap="square" lIns="0" tIns="0" rIns="0" bIns="0" rtlCol="0" anchor="ctr"/>
+          <a:lstStyle/>
+          <a:p>
+            <a:pPr indent="0" marL="0">
+              <a:buNone/>
+            </a:pPr>
+            <a:r>
+              <a:rPr lang="en-US" sz="1800" b="1" spc="100" kern="0" dirty="0">
+                <a:solidFill>
+                  <a:srgbClr val="1A2420"/>
+                </a:solidFill>
+                <a:latin typeface="Arial" pitchFamily="34" charset="0"/>
+                <a:ea typeface="Arial" pitchFamily="34" charset="-122"/>
+                <a:cs typeface="Arial" pitchFamily="34" charset="-120"/>
+              </a:rPr>
+              <a:t>МЕТРИКИ</a:t>
+            </a:r>
+            <a:endParaRPr lang="en-US" sz="1800" dirty="0"/>
+          </a:p>
+        </p:txBody>
+      </p:sp>
+      <p:sp>
+        <p:nvSpPr>
+          <p:cNvPr id="18" name="Text 16"/>
+          <p:cNvSpPr/>
+          <p:nvPr/>
+        </p:nvSpPr>
+        <p:spPr>
+          <a:xfrm>
+            <a:off x="4023360" y="3694176"/>
+            <a:ext cx="7498080" cy="548640"/>
+          </a:xfrm>
+          <a:prstGeom prst="rect">
+            <a:avLst/>
+          </a:prstGeom>
+          <a:noFill/>
+          <a:ln/>
+        </p:spPr>
+        <p:txBody>
+          <a:bodyPr wrap="square" lIns="0" tIns="0" rIns="0" bIns="0" rtlCol="0" anchor="ctr"/>
+          <a:lstStyle/>
+          <a:p>
+            <a:pPr indent="0" marL="0">
+              <a:buNone/>
+            </a:pPr>
+            <a:r>
+              <a:rPr lang="en-US" sz="1600" dirty="0">
+                <a:solidFill>
+                  <a:srgbClr val="5C6B63"/>
+                </a:solidFill>
+                <a:latin typeface="Arial" pitchFamily="34" charset="0"/>
+                <a:ea typeface="Arial" pitchFamily="34" charset="-122"/>
+                <a:cs typeface="Arial" pitchFamily="34" charset="-120"/>
+              </a:rPr>
+              <a:t>чем измерим успех и вред?</a:t>
+            </a:r>
+            <a:endParaRPr lang="en-US" sz="1600" dirty="0"/>
+          </a:p>
+        </p:txBody>
+      </p:sp>
+      <p:sp>
+        <p:nvSpPr>
+          <p:cNvPr id="19" name="Shape 17"/>
+          <p:cNvSpPr/>
+          <p:nvPr/>
+        </p:nvSpPr>
+        <p:spPr>
+          <a:xfrm>
+            <a:off x="832104" y="4233672"/>
+            <a:ext cx="0" cy="237744"/>
+          </a:xfrm>
+          <a:prstGeom prst="line">
+            <a:avLst/>
+          </a:prstGeom>
+          <a:noFill/>
+          <a:ln w="19050">
+            <a:solidFill>
+              <a:srgbClr val="1E6B47"/>
+            </a:solidFill>
+            <a:prstDash val="solid"/>
+          </a:ln>
+        </p:spPr>
+      </p:sp>
+      <p:sp>
+        <p:nvSpPr>
+          <p:cNvPr id="20" name="Shape 18"/>
+          <p:cNvSpPr/>
+          <p:nvPr/>
+        </p:nvSpPr>
+        <p:spPr>
+          <a:xfrm>
+            <a:off x="548640" y="4489704"/>
+            <a:ext cx="566928" cy="566928"/>
+          </a:xfrm>
+          <a:prstGeom prst="ellipse">
+            <a:avLst/>
+          </a:prstGeom>
+          <a:solidFill>
+            <a:srgbClr val="1E6B47"/>
+          </a:solidFill>
+          <a:ln/>
+        </p:spPr>
+      </p:sp>
+      <p:sp>
+        <p:nvSpPr>
+          <p:cNvPr id="21" name="Text 19"/>
+          <p:cNvSpPr/>
+          <p:nvPr/>
+        </p:nvSpPr>
+        <p:spPr>
+          <a:xfrm>
+            <a:off x="548640" y="4489704"/>
+            <a:ext cx="566928" cy="566928"/>
+          </a:xfrm>
+          <a:prstGeom prst="rect">
+            <a:avLst/>
+          </a:prstGeom>
+          <a:noFill/>
+          <a:ln/>
+        </p:spPr>
+        <p:txBody>
+          <a:bodyPr wrap="square" lIns="0" tIns="0" rIns="0" bIns="0" rtlCol="0" anchor="ctr"/>
+          <a:lstStyle/>
+          <a:p>
+            <a:pPr algn="ctr" indent="0" marL="0">
+              <a:buNone/>
+            </a:pPr>
+            <a:r>
+              <a:rPr lang="en-US" sz="2000" b="1" dirty="0">
+                <a:solidFill>
+                  <a:srgbClr val="FFFFFF"/>
+                </a:solidFill>
+                <a:latin typeface="Arial" pitchFamily="34" charset="0"/>
+                <a:ea typeface="Arial" pitchFamily="34" charset="-122"/>
+                <a:cs typeface="Arial" pitchFamily="34" charset="-120"/>
+              </a:rPr>
+              <a:t>4</a:t>
+            </a:r>
+            <a:endParaRPr lang="en-US" sz="2000" dirty="0"/>
+          </a:p>
+        </p:txBody>
+      </p:sp>
+      <p:sp>
+        <p:nvSpPr>
+          <p:cNvPr id="22" name="Text 20"/>
+          <p:cNvSpPr/>
+          <p:nvPr/>
+        </p:nvSpPr>
+        <p:spPr>
+          <a:xfrm>
+            <a:off x="1417320" y="4507992"/>
+            <a:ext cx="2377440" cy="548640"/>
+          </a:xfrm>
+          <a:prstGeom prst="rect">
+            <a:avLst/>
+          </a:prstGeom>
+          <a:noFill/>
+          <a:ln/>
+        </p:spPr>
+        <p:txBody>
+          <a:bodyPr wrap="square" lIns="0" tIns="0" rIns="0" bIns="0" rtlCol="0" anchor="ctr"/>
+          <a:lstStyle/>
+          <a:p>
+            <a:pPr indent="0" marL="0">
+              <a:buNone/>
+            </a:pPr>
+            <a:r>
+              <a:rPr lang="en-US" sz="1800" b="1" spc="100" kern="0" dirty="0">
+                <a:solidFill>
+                  <a:srgbClr val="1A2420"/>
+                </a:solidFill>
+                <a:latin typeface="Arial" pitchFamily="34" charset="0"/>
+                <a:ea typeface="Arial" pitchFamily="34" charset="-122"/>
+                <a:cs typeface="Arial" pitchFamily="34" charset="-120"/>
+              </a:rPr>
+              <a:t>ЭКОНОМИКА</a:t>
+            </a:r>
+            <a:endParaRPr lang="en-US" sz="1800" dirty="0"/>
+          </a:p>
+        </p:txBody>
+      </p:sp>
+      <p:sp>
+        <p:nvSpPr>
+          <p:cNvPr id="23" name="Text 21"/>
+          <p:cNvSpPr/>
+          <p:nvPr/>
+        </p:nvSpPr>
+        <p:spPr>
+          <a:xfrm>
+            <a:off x="4023360" y="4535424"/>
+            <a:ext cx="7498080" cy="548640"/>
+          </a:xfrm>
+          <a:prstGeom prst="rect">
+            <a:avLst/>
+          </a:prstGeom>
+          <a:noFill/>
+          <a:ln/>
+        </p:spPr>
+        <p:txBody>
+          <a:bodyPr wrap="square" lIns="0" tIns="0" rIns="0" bIns="0" rtlCol="0" anchor="ctr"/>
+          <a:lstStyle/>
+          <a:p>
+            <a:pPr indent="0" marL="0">
+              <a:buNone/>
+            </a:pPr>
+            <a:r>
+              <a:rPr lang="en-US" sz="1600" dirty="0">
+                <a:solidFill>
+                  <a:srgbClr val="5C6B63"/>
+                </a:solidFill>
+                <a:latin typeface="Arial" pitchFamily="34" charset="0"/>
+                <a:ea typeface="Arial" pitchFamily="34" charset="-122"/>
+                <a:cs typeface="Arial" pitchFamily="34" charset="-120"/>
+              </a:rPr>
+              <a:t>сколько стоит и принесёт? в каких сегментах иначе?</a:t>
+            </a:r>
+            <a:endParaRPr lang="en-US" sz="1600" dirty="0"/>
+          </a:p>
+        </p:txBody>
+      </p:sp>
+      <p:sp>
+        <p:nvSpPr>
+          <p:cNvPr id="24" name="Shape 22"/>
+          <p:cNvSpPr/>
+          <p:nvPr/>
+        </p:nvSpPr>
+        <p:spPr>
+          <a:xfrm>
+            <a:off x="832104" y="5074920"/>
+            <a:ext cx="0" cy="237744"/>
+          </a:xfrm>
+          <a:prstGeom prst="line">
+            <a:avLst/>
+          </a:prstGeom>
+          <a:noFill/>
+          <a:ln w="19050">
+            <a:solidFill>
+              <a:srgbClr val="1E6B47"/>
+            </a:solidFill>
+            <a:prstDash val="solid"/>
+          </a:ln>
+        </p:spPr>
+      </p:sp>
+      <p:sp>
+        <p:nvSpPr>
+          <p:cNvPr id="25" name="Shape 23"/>
+          <p:cNvSpPr/>
+          <p:nvPr/>
+        </p:nvSpPr>
+        <p:spPr>
+          <a:xfrm>
+            <a:off x="548640" y="5330952"/>
+            <a:ext cx="566928" cy="566928"/>
+          </a:xfrm>
+          <a:prstGeom prst="ellipse">
+            <a:avLst/>
+          </a:prstGeom>
+          <a:solidFill>
+            <a:srgbClr val="1E6B47"/>
+          </a:solidFill>
+          <a:ln/>
+        </p:spPr>
+      </p:sp>
+      <p:sp>
+        <p:nvSpPr>
+          <p:cNvPr id="26" name="Text 24"/>
+          <p:cNvSpPr/>
+          <p:nvPr/>
+        </p:nvSpPr>
+        <p:spPr>
+          <a:xfrm>
+            <a:off x="548640" y="5330952"/>
+            <a:ext cx="566928" cy="566928"/>
+          </a:xfrm>
+          <a:prstGeom prst="rect">
+            <a:avLst/>
+          </a:prstGeom>
+          <a:noFill/>
+          <a:ln/>
+        </p:spPr>
+        <p:txBody>
+          <a:bodyPr wrap="square" lIns="0" tIns="0" rIns="0" bIns="0" rtlCol="0" anchor="ctr"/>
+          <a:lstStyle/>
+          <a:p>
+            <a:pPr algn="ctr" indent="0" marL="0">
+              <a:buNone/>
+            </a:pPr>
+            <a:r>
+              <a:rPr lang="en-US" sz="2000" b="1" dirty="0">
+                <a:solidFill>
+                  <a:srgbClr val="FFFFFF"/>
+                </a:solidFill>
+                <a:latin typeface="Arial" pitchFamily="34" charset="0"/>
+                <a:ea typeface="Arial" pitchFamily="34" charset="-122"/>
+                <a:cs typeface="Arial" pitchFamily="34" charset="-120"/>
+              </a:rPr>
+              <a:t>5</a:t>
+            </a:r>
+            <a:endParaRPr lang="en-US" sz="2000" dirty="0"/>
+          </a:p>
+        </p:txBody>
+      </p:sp>
+      <p:sp>
+        <p:nvSpPr>
+          <p:cNvPr id="27" name="Text 25"/>
+          <p:cNvSpPr/>
+          <p:nvPr/>
+        </p:nvSpPr>
+        <p:spPr>
+          <a:xfrm>
+            <a:off x="1417320" y="5349240"/>
+            <a:ext cx="2377440" cy="548640"/>
+          </a:xfrm>
+          <a:prstGeom prst="rect">
+            <a:avLst/>
+          </a:prstGeom>
+          <a:noFill/>
+          <a:ln/>
+        </p:spPr>
+        <p:txBody>
+          <a:bodyPr wrap="square" lIns="0" tIns="0" rIns="0" bIns="0" rtlCol="0" anchor="ctr"/>
+          <a:lstStyle/>
+          <a:p>
+            <a:pPr indent="0" marL="0">
+              <a:buNone/>
+            </a:pPr>
+            <a:r>
+              <a:rPr lang="en-US" sz="1800" b="1" spc="100" kern="0" dirty="0">
+                <a:solidFill>
+                  <a:srgbClr val="1A2420"/>
+                </a:solidFill>
+                <a:latin typeface="Arial" pitchFamily="34" charset="0"/>
+                <a:ea typeface="Arial" pitchFamily="34" charset="-122"/>
+                <a:cs typeface="Arial" pitchFamily="34" charset="-120"/>
+              </a:rPr>
+              <a:t>ПРОВЕРКА</a:t>
+            </a:r>
+            <a:endParaRPr lang="en-US" sz="1800" dirty="0"/>
+          </a:p>
+        </p:txBody>
+      </p:sp>
+      <p:sp>
+        <p:nvSpPr>
+          <p:cNvPr id="28" name="Text 26"/>
+          <p:cNvSpPr/>
+          <p:nvPr/>
+        </p:nvSpPr>
+        <p:spPr>
+          <a:xfrm>
+            <a:off x="4023360" y="5376672"/>
+            <a:ext cx="7498080" cy="548640"/>
+          </a:xfrm>
+          <a:prstGeom prst="rect">
+            <a:avLst/>
+          </a:prstGeom>
+          <a:noFill/>
+          <a:ln/>
+        </p:spPr>
+        <p:txBody>
+          <a:bodyPr wrap="square" lIns="0" tIns="0" rIns="0" bIns="0" rtlCol="0" anchor="ctr"/>
+          <a:lstStyle/>
+          <a:p>
+            <a:pPr indent="0" marL="0">
+              <a:buNone/>
+            </a:pPr>
+            <a:r>
+              <a:rPr lang="en-US" sz="1600" dirty="0">
+                <a:solidFill>
+                  <a:srgbClr val="5C6B63"/>
+                </a:solidFill>
+                <a:latin typeface="Arial" pitchFamily="34" charset="0"/>
+                <a:ea typeface="Arial" pitchFamily="34" charset="-122"/>
+                <a:cs typeface="Arial" pitchFamily="34" charset="-120"/>
+              </a:rPr>
+              <a:t>как докажем эффект? A/B или что-то честнее?</a:t>
+            </a:r>
+            <a:endParaRPr lang="en-US" sz="1600" dirty="0"/>
+          </a:p>
+        </p:txBody>
+      </p:sp>
+      <p:sp>
+        <p:nvSpPr>
+          <p:cNvPr id="29" name="Text 27"/>
+          <p:cNvSpPr/>
+          <p:nvPr/>
+        </p:nvSpPr>
+        <p:spPr>
+          <a:xfrm>
+            <a:off x="548640" y="6263640"/>
+            <a:ext cx="10424160" cy="457200"/>
+          </a:xfrm>
+          <a:prstGeom prst="rect">
+            <a:avLst/>
+          </a:prstGeom>
+          <a:noFill/>
+          <a:ln/>
+        </p:spPr>
+        <p:txBody>
+          <a:bodyPr wrap="square" lIns="0" tIns="0" rIns="0" bIns="0" rtlCol="0" anchor="ctr"/>
+          <a:lstStyle/>
+          <a:p>
+            <a:pPr indent="0" marL="0">
+              <a:buNone/>
+            </a:pPr>
+            <a:r>
+              <a:rPr lang="en-US" sz="1600" b="1" dirty="0">
+                <a:solidFill>
+                  <a:srgbClr val="E8590C"/>
+                </a:solidFill>
+                <a:latin typeface="Arial" pitchFamily="34" charset="0"/>
+                <a:ea typeface="Arial" pitchFamily="34" charset="-122"/>
+                <a:cs typeface="Arial" pitchFamily="34" charset="-120"/>
+              </a:rPr>
+              <a:t>Над всем — ML-рычаг: в какой точке модель реально нужна, а в какой это карго-культ.</a:t>
+            </a:r>
+            <a:endParaRPr lang="en-US" sz="1600" dirty="0"/>
+          </a:p>
+        </p:txBody>
+      </p:sp>
+      <p:sp>
+        <p:nvSpPr>
+          <p:cNvPr id="30" name="Text 28"/>
+          <p:cNvSpPr/>
+          <p:nvPr/>
+        </p:nvSpPr>
+        <p:spPr>
+          <a:xfrm>
+            <a:off x="11000232" y="6400800"/>
+            <a:ext cx="640080" cy="274320"/>
+          </a:xfrm>
+          <a:prstGeom prst="rect">
+            <a:avLst/>
+          </a:prstGeom>
+          <a:noFill/>
+          <a:ln/>
+        </p:spPr>
+        <p:txBody>
+          <a:bodyPr wrap="square" lIns="0" tIns="0" rIns="0" bIns="0" rtlCol="0" anchor="ctr"/>
+          <a:lstStyle/>
+          <a:p>
+            <a:pPr algn="r" indent="0" marL="0">
+              <a:buNone/>
+            </a:pPr>
+            <a:r>
+              <a:rPr lang="en-US" sz="1200" dirty="0">
+                <a:solidFill>
+                  <a:srgbClr val="5C6B63"/>
+                </a:solidFill>
+                <a:latin typeface="Arial" pitchFamily="34" charset="0"/>
+                <a:ea typeface="Arial" pitchFamily="34" charset="-122"/>
+                <a:cs typeface="Arial" pitchFamily="34" charset="-120"/>
+              </a:rPr>
+              <a:t>13</a:t>
+            </a:r>
+            <a:endParaRPr lang="en-US" sz="1200" dirty="0"/>
+          </a:p>
+        </p:txBody>
+      </p:sp>
+    </p:spTree>
+  </p:cSld>
+  <p:clrMapOvr>
+    <a:masterClrMapping/>
+  </p:clrMapOvr>
+</p:sld>
+</file>
+
+<file path=ppt/slides/slide14.xml><?xml version="1.0" encoding="utf-8"?>
+<p:sld xmlns:a="http://schemas.openxmlformats.org/drawingml/2006/main" xmlns:r="http://schemas.openxmlformats.org/officeDocument/2006/relationships" xmlns:p="http://schemas.openxmlformats.org/presentationml/2006/main">
+  <p:cSld name="Slide 14">
+    <p:bg>
+      <p:bgPr>
+        <a:solidFill>
+          <a:srgbClr val="FFFFFF"/>
+        </a:solidFill>
+      </p:bgPr>
+    </p:bg>
+    <p:spTree>
+      <p:nvGrpSpPr>
+        <p:cNvPr id="1" name=""/>
+        <p:cNvGrpSpPr/>
+        <p:nvPr/>
+      </p:nvGrpSpPr>
+      <p:grpSpPr>
+        <a:xfrm>
+          <a:off x="0" y="0"/>
+          <a:ext cx="0" cy="0"/>
+          <a:chOff x="0" y="0"/>
+          <a:chExt cx="0" cy="0"/>
+        </a:xfrm>
+      </p:grpSpPr>
+      <p:sp>
+        <p:nvSpPr>
+          <p:cNvPr id="2" name="Text 0"/>
+          <p:cNvSpPr/>
+          <p:nvPr/>
+        </p:nvSpPr>
+        <p:spPr>
+          <a:xfrm>
+            <a:off x="9262872" y="384048"/>
+            <a:ext cx="2377440" cy="274320"/>
+          </a:xfrm>
+          <a:prstGeom prst="rect">
+            <a:avLst/>
+          </a:prstGeom>
+          <a:noFill/>
+          <a:ln/>
+        </p:spPr>
+        <p:txBody>
+          <a:bodyPr wrap="square" lIns="0" tIns="0" rIns="0" bIns="0" rtlCol="0" anchor="ctr"/>
+          <a:lstStyle/>
+          <a:p>
+            <a:pPr algn="r" indent="0" marL="0">
+              <a:buNone/>
+            </a:pPr>
+            <a:r>
+              <a:rPr lang="en-US" sz="1200" b="1" spc="200" kern="0" dirty="0">
+                <a:solidFill>
+                  <a:srgbClr val="5C6B63"/>
+                </a:solidFill>
+                <a:latin typeface="Arial" pitchFamily="34" charset="0"/>
+                <a:ea typeface="Arial" pitchFamily="34" charset="-122"/>
+                <a:cs typeface="Arial" pitchFamily="34" charset="-120"/>
+              </a:rPr>
+              <a:t>НЕДЕЛЯ 1 · ML-ПРИМЕР</a:t>
+            </a:r>
+            <a:endParaRPr lang="en-US" sz="1200" dirty="0"/>
+          </a:p>
+        </p:txBody>
+      </p:sp>
+      <p:sp>
+        <p:nvSpPr>
+          <p:cNvPr id="3" name="Text 1"/>
+          <p:cNvSpPr/>
+          <p:nvPr/>
+        </p:nvSpPr>
+        <p:spPr>
+          <a:xfrm>
+            <a:off x="548640" y="384048"/>
+            <a:ext cx="7315200" cy="274320"/>
+          </a:xfrm>
+          <a:prstGeom prst="rect">
+            <a:avLst/>
+          </a:prstGeom>
+          <a:noFill/>
+          <a:ln/>
+        </p:spPr>
+        <p:txBody>
+          <a:bodyPr wrap="square" lIns="0" tIns="0" rIns="0" bIns="0" rtlCol="0" anchor="ctr"/>
+          <a:lstStyle/>
+          <a:p>
+            <a:pPr indent="0" marL="0">
+              <a:buNone/>
+            </a:pPr>
+            <a:r>
+              <a:rPr lang="en-US" sz="1200" b="1" spc="200" kern="0" dirty="0">
+                <a:solidFill>
+                  <a:srgbClr val="E8590C"/>
+                </a:solidFill>
+                <a:latin typeface="Arial" pitchFamily="34" charset="0"/>
+                <a:ea typeface="Arial" pitchFamily="34" charset="-122"/>
+                <a:cs typeface="Arial" pitchFamily="34" charset="-120"/>
+              </a:rPr>
+              <a:t>КВАРТАЛ РАБОТЫ RECSYS «ЛУКОШКО»</a:t>
+            </a:r>
+            <a:endParaRPr lang="en-US" sz="1200" dirty="0"/>
+          </a:p>
+        </p:txBody>
+      </p:sp>
+      <p:sp>
+        <p:nvSpPr>
+          <p:cNvPr id="4" name="Text 2"/>
+          <p:cNvSpPr/>
+          <p:nvPr/>
+        </p:nvSpPr>
+        <p:spPr>
+          <a:xfrm>
+            <a:off x="548640" y="658368"/>
+            <a:ext cx="9079992" cy="777240"/>
+          </a:xfrm>
+          <a:prstGeom prst="rect">
+            <a:avLst/>
+          </a:prstGeom>
+          <a:noFill/>
+          <a:ln/>
+        </p:spPr>
+        <p:txBody>
+          <a:bodyPr wrap="square" lIns="0" tIns="0" rIns="0" bIns="0" rtlCol="0" anchor="ctr"/>
+          <a:lstStyle/>
+          <a:p>
+            <a:pPr indent="0" marL="0">
+              <a:buNone/>
+            </a:pPr>
+            <a:r>
+              <a:rPr lang="en-US" sz="3000" b="1" dirty="0">
+                <a:solidFill>
+                  <a:srgbClr val="1A2420"/>
+                </a:solidFill>
+                <a:latin typeface="Arial" pitchFamily="34" charset="0"/>
+                <a:ea typeface="Arial" pitchFamily="34" charset="-122"/>
+                <a:cs typeface="Arial" pitchFamily="34" charset="-120"/>
+              </a:rPr>
               <a:t>Offline-метрики выросли. Деньги — нет</a:t>
             </a:r>
             <a:endParaRPr lang="en-US" sz="3000" dirty="0"/>
@@ -4940,7 +7577,7 @@
       </p:sp>
       <p:graphicFrame>
         <p:nvGraphicFramePr>
-          <p:cNvPr id="13" name="Table 0"/>
+          <p:cNvPr id="15" name="Table 0"/>
           <p:cNvGraphicFramePr>
             <a:graphicFrameLocks noGrp="1"/>
           </p:cNvGraphicFramePr>
@@ -7038,7 +9675,7 @@
                 <a:ea typeface="Arial" pitchFamily="34" charset="-122"/>
                 <a:cs typeface="Arial" pitchFamily="34" charset="-120"/>
               </a:rPr>
-              <a:t>12</a:t>
+              <a:t>14</a:t>
             </a:r>
             <a:endParaRPr lang="en-US" sz="1200" dirty="0"/>
           </a:p>
@@ -7052,9 +9689,9 @@
 </p:sld>
 </file>
 
-<file path=ppt/slides/slide13.xml><?xml version="1.0" encoding="utf-8"?>
+<file path=ppt/slides/slide15.xml><?xml version="1.0" encoding="utf-8"?>
 <p:sld xmlns:a="http://schemas.openxmlformats.org/drawingml/2006/main" xmlns:r="http://schemas.openxmlformats.org/officeDocument/2006/relationships" xmlns:p="http://schemas.openxmlformats.org/presentationml/2006/main">
-  <p:cSld name="Slide 13">
+  <p:cSld name="Slide 15">
     <p:bg>
       <p:bgPr>
         <a:solidFill>
@@ -7761,7 +10398,7 @@
                 <a:ea typeface="Arial" pitchFamily="34" charset="-122"/>
                 <a:cs typeface="Arial" pitchFamily="34" charset="-120"/>
               </a:rPr>
-              <a:t>13</a:t>
+              <a:t>15</a:t>
             </a:r>
             <a:endParaRPr lang="en-US" sz="1200" dirty="0"/>
           </a:p>
@@ -7775,9 +10412,9 @@
 </p:sld>
 </file>
 
-<file path=ppt/slides/slide14.xml><?xml version="1.0" encoding="utf-8"?>
+<file path=ppt/slides/slide16.xml><?xml version="1.0" encoding="utf-8"?>
 <p:sld xmlns:a="http://schemas.openxmlformats.org/drawingml/2006/main" xmlns:r="http://schemas.openxmlformats.org/officeDocument/2006/relationships" xmlns:p="http://schemas.openxmlformats.org/presentationml/2006/main">
-  <p:cSld name="Slide 14">
+  <p:cSld name="Slide 16">
     <p:bg>
       <p:bgPr>
         <a:solidFill>
@@ -8205,7 +10842,7 @@
                 <a:ea typeface="Arial" pitchFamily="34" charset="-122"/>
                 <a:cs typeface="Arial" pitchFamily="34" charset="-120"/>
               </a:rPr>
-              <a:t>14</a:t>
+              <a:t>16</a:t>
             </a:r>
             <a:endParaRPr lang="en-US" sz="1200" dirty="0"/>
           </a:p>
@@ -8219,9 +10856,436 @@
 </p:sld>
 </file>
 
-<file path=ppt/slides/slide15.xml><?xml version="1.0" encoding="utf-8"?>
+<file path=ppt/slides/slide17.xml><?xml version="1.0" encoding="utf-8"?>
 <p:sld xmlns:a="http://schemas.openxmlformats.org/drawingml/2006/main" xmlns:r="http://schemas.openxmlformats.org/officeDocument/2006/relationships" xmlns:p="http://schemas.openxmlformats.org/presentationml/2006/main">
-  <p:cSld name="Slide 15">
+  <p:cSld name="Slide 17">
+    <p:bg>
+      <p:bgPr>
+        <a:solidFill>
+          <a:srgbClr val="FFFFFF"/>
+        </a:solidFill>
+      </p:bgPr>
+    </p:bg>
+    <p:spTree>
+      <p:nvGrpSpPr>
+        <p:cNvPr id="1" name=""/>
+        <p:cNvGrpSpPr/>
+        <p:nvPr/>
+      </p:nvGrpSpPr>
+      <p:grpSpPr>
+        <a:xfrm>
+          <a:off x="0" y="0"/>
+          <a:ext cx="0" cy="0"/>
+          <a:chOff x="0" y="0"/>
+          <a:chExt cx="0" cy="0"/>
+        </a:xfrm>
+      </p:grpSpPr>
+      <p:sp>
+        <p:nvSpPr>
+          <p:cNvPr id="2" name="Text 0"/>
+          <p:cNvSpPr/>
+          <p:nvPr/>
+        </p:nvSpPr>
+        <p:spPr>
+          <a:xfrm>
+            <a:off x="9262872" y="384048"/>
+            <a:ext cx="2377440" cy="274320"/>
+          </a:xfrm>
+          <a:prstGeom prst="rect">
+            <a:avLst/>
+          </a:prstGeom>
+          <a:noFill/>
+          <a:ln/>
+        </p:spPr>
+        <p:txBody>
+          <a:bodyPr wrap="square" lIns="0" tIns="0" rIns="0" bIns="0" rtlCol="0" anchor="ctr"/>
+          <a:lstStyle/>
+          <a:p>
+            <a:pPr algn="r" indent="0" marL="0">
+              <a:buNone/>
+            </a:pPr>
+            <a:r>
+              <a:rPr lang="en-US" sz="1200" b="1" spc="200" kern="0" dirty="0">
+                <a:solidFill>
+                  <a:srgbClr val="5C6B63"/>
+                </a:solidFill>
+                <a:latin typeface="Arial" pitchFamily="34" charset="0"/>
+                <a:ea typeface="Arial" pitchFamily="34" charset="-122"/>
+                <a:cs typeface="Arial" pitchFamily="34" charset="-120"/>
+              </a:rPr>
+              <a:t>НЕДЕЛЯ 1 · ML-ПРИМЕР</a:t>
+            </a:r>
+            <a:endParaRPr lang="en-US" sz="1200" dirty="0"/>
+          </a:p>
+        </p:txBody>
+      </p:sp>
+      <p:sp>
+        <p:nvSpPr>
+          <p:cNvPr id="3" name="Text 1"/>
+          <p:cNvSpPr/>
+          <p:nvPr/>
+        </p:nvSpPr>
+        <p:spPr>
+          <a:xfrm>
+            <a:off x="548640" y="384048"/>
+            <a:ext cx="7315200" cy="274320"/>
+          </a:xfrm>
+          <a:prstGeom prst="rect">
+            <a:avLst/>
+          </a:prstGeom>
+          <a:noFill/>
+          <a:ln/>
+        </p:spPr>
+        <p:txBody>
+          <a:bodyPr wrap="square" lIns="0" tIns="0" rIns="0" bIns="0" rtlCol="0" anchor="ctr"/>
+          <a:lstStyle/>
+          <a:p>
+            <a:pPr indent="0" marL="0">
+              <a:buNone/>
+            </a:pPr>
+            <a:r>
+              <a:rPr lang="en-US" sz="1200" b="1" spc="200" kern="0" dirty="0">
+                <a:solidFill>
+                  <a:srgbClr val="E8590C"/>
+                </a:solidFill>
+                <a:latin typeface="Arial" pitchFamily="34" charset="0"/>
+                <a:ea typeface="Arial" pitchFamily="34" charset="-122"/>
+                <a:cs typeface="Arial" pitchFamily="34" charset="-120"/>
+              </a:rPr>
+              <a:t>ЗАПУСК ML-ФИЧИ</a:t>
+            </a:r>
+            <a:endParaRPr lang="en-US" sz="1200" dirty="0"/>
+          </a:p>
+        </p:txBody>
+      </p:sp>
+      <p:sp>
+        <p:nvSpPr>
+          <p:cNvPr id="4" name="Text 2"/>
+          <p:cNvSpPr/>
+          <p:nvPr/>
+        </p:nvSpPr>
+        <p:spPr>
+          <a:xfrm>
+            <a:off x="548640" y="658368"/>
+            <a:ext cx="9079992" cy="777240"/>
+          </a:xfrm>
+          <a:prstGeom prst="rect">
+            <a:avLst/>
+          </a:prstGeom>
+          <a:noFill/>
+          <a:ln/>
+        </p:spPr>
+        <p:txBody>
+          <a:bodyPr wrap="square" lIns="0" tIns="0" rIns="0" bIns="0" rtlCol="0" anchor="ctr"/>
+          <a:lstStyle/>
+          <a:p>
+            <a:pPr indent="0" marL="0">
+              <a:buNone/>
+            </a:pPr>
+            <a:r>
+              <a:rPr lang="en-US" sz="3000" b="1" dirty="0">
+                <a:solidFill>
+                  <a:srgbClr val="1A2420"/>
+                </a:solidFill>
+                <a:latin typeface="Arial" pitchFamily="34" charset="0"/>
+                <a:ea typeface="Arial" pitchFamily="34" charset="-122"/>
+                <a:cs typeface="Arial" pitchFamily="34" charset="-120"/>
+              </a:rPr>
+              <a:t>Ожидание и реальность</a:t>
+            </a:r>
+            <a:endParaRPr lang="en-US" sz="3000" dirty="0"/>
+          </a:p>
+        </p:txBody>
+      </p:sp>
+      <p:sp>
+        <p:nvSpPr>
+          <p:cNvPr id="5" name="Shape 3"/>
+          <p:cNvSpPr/>
+          <p:nvPr/>
+        </p:nvSpPr>
+        <p:spPr>
+          <a:xfrm>
+            <a:off x="548640" y="2286000"/>
+            <a:ext cx="5120640" cy="2651760"/>
+          </a:xfrm>
+          <a:prstGeom prst="roundRect">
+            <a:avLst>
+              <a:gd name="adj" fmla="val 3448"/>
+            </a:avLst>
+          </a:prstGeom>
+          <a:solidFill>
+            <a:srgbClr val="ECEEEC"/>
+          </a:solidFill>
+          <a:ln/>
+        </p:spPr>
+      </p:sp>
+      <p:sp>
+        <p:nvSpPr>
+          <p:cNvPr id="6" name="Text 4"/>
+          <p:cNvSpPr/>
+          <p:nvPr/>
+        </p:nvSpPr>
+        <p:spPr>
+          <a:xfrm>
+            <a:off x="868680" y="2560320"/>
+            <a:ext cx="4480560" cy="502920"/>
+          </a:xfrm>
+          <a:prstGeom prst="rect">
+            <a:avLst/>
+          </a:prstGeom>
+          <a:noFill/>
+          <a:ln/>
+        </p:spPr>
+        <p:txBody>
+          <a:bodyPr wrap="square" lIns="0" tIns="0" rIns="0" bIns="0" rtlCol="0" anchor="ctr"/>
+          <a:lstStyle/>
+          <a:p>
+            <a:pPr indent="0" marL="0">
+              <a:buNone/>
+            </a:pPr>
+            <a:r>
+              <a:rPr lang="en-US" sz="2400" b="1" spc="200" kern="0" dirty="0">
+                <a:solidFill>
+                  <a:srgbClr val="6A6A6A"/>
+                </a:solidFill>
+                <a:latin typeface="Arial" pitchFamily="34" charset="0"/>
+                <a:ea typeface="Arial" pitchFamily="34" charset="-122"/>
+                <a:cs typeface="Arial" pitchFamily="34" charset="-120"/>
+              </a:rPr>
+              <a:t>ОЖИДАНИЕ</a:t>
+            </a:r>
+            <a:endParaRPr lang="en-US" sz="2400" dirty="0"/>
+          </a:p>
+        </p:txBody>
+      </p:sp>
+      <p:sp>
+        <p:nvSpPr>
+          <p:cNvPr id="7" name="Text 5"/>
+          <p:cNvSpPr/>
+          <p:nvPr/>
+        </p:nvSpPr>
+        <p:spPr>
+          <a:xfrm>
+            <a:off x="868680" y="3200400"/>
+            <a:ext cx="4480560" cy="1463040"/>
+          </a:xfrm>
+          <a:prstGeom prst="rect">
+            <a:avLst/>
+          </a:prstGeom>
+          <a:noFill/>
+          <a:ln/>
+        </p:spPr>
+        <p:txBody>
+          <a:bodyPr wrap="square" lIns="0" tIns="0" rIns="0" bIns="0" rtlCol="0" anchor="ctr"/>
+          <a:lstStyle/>
+          <a:p>
+            <a:pPr indent="0" marL="0">
+              <a:buNone/>
+            </a:pPr>
+            <a:r>
+              <a:rPr lang="en-US" sz="1650" dirty="0">
+                <a:solidFill>
+                  <a:srgbClr val="4A4A4A"/>
+                </a:solidFill>
+                <a:latin typeface="Arial" pitchFamily="34" charset="0"/>
+                <a:ea typeface="Arial" pitchFamily="34" charset="-122"/>
+                <a:cs typeface="Arial" pitchFamily="34" charset="-120"/>
+              </a:rPr>
+              <a:t>Evals 4,6/5 — катим на всю базу, все в восторге</a:t>
+            </a:r>
+            <a:endParaRPr lang="en-US" sz="1650" dirty="0"/>
+          </a:p>
+        </p:txBody>
+      </p:sp>
+      <p:sp>
+        <p:nvSpPr>
+          <p:cNvPr id="8" name="Shape 6"/>
+          <p:cNvSpPr/>
+          <p:nvPr/>
+        </p:nvSpPr>
+        <p:spPr>
+          <a:xfrm>
+            <a:off x="6217920" y="2286000"/>
+            <a:ext cx="5120640" cy="2651760"/>
+          </a:xfrm>
+          <a:prstGeom prst="roundRect">
+            <a:avLst>
+              <a:gd name="adj" fmla="val 3448"/>
+            </a:avLst>
+          </a:prstGeom>
+          <a:solidFill>
+            <a:srgbClr val="EDF4EF"/>
+          </a:solidFill>
+          <a:ln/>
+        </p:spPr>
+      </p:sp>
+      <p:sp>
+        <p:nvSpPr>
+          <p:cNvPr id="9" name="Text 7"/>
+          <p:cNvSpPr/>
+          <p:nvPr/>
+        </p:nvSpPr>
+        <p:spPr>
+          <a:xfrm>
+            <a:off x="6537960" y="2560320"/>
+            <a:ext cx="4480560" cy="502920"/>
+          </a:xfrm>
+          <a:prstGeom prst="rect">
+            <a:avLst/>
+          </a:prstGeom>
+          <a:noFill/>
+          <a:ln/>
+        </p:spPr>
+        <p:txBody>
+          <a:bodyPr wrap="square" lIns="0" tIns="0" rIns="0" bIns="0" rtlCol="0" anchor="ctr"/>
+          <a:lstStyle/>
+          <a:p>
+            <a:pPr indent="0" marL="0">
+              <a:buNone/>
+            </a:pPr>
+            <a:r>
+              <a:rPr lang="en-US" sz="2400" b="1" spc="200" kern="0" dirty="0">
+                <a:solidFill>
+                  <a:srgbClr val="E8590C"/>
+                </a:solidFill>
+                <a:latin typeface="Arial" pitchFamily="34" charset="0"/>
+                <a:ea typeface="Arial" pitchFamily="34" charset="-122"/>
+                <a:cs typeface="Arial" pitchFamily="34" charset="-120"/>
+              </a:rPr>
+              <a:t>РЕАЛЬНОСТЬ</a:t>
+            </a:r>
+            <a:endParaRPr lang="en-US" sz="2400" dirty="0"/>
+          </a:p>
+        </p:txBody>
+      </p:sp>
+      <p:sp>
+        <p:nvSpPr>
+          <p:cNvPr id="10" name="Text 8"/>
+          <p:cNvSpPr/>
+          <p:nvPr/>
+        </p:nvSpPr>
+        <p:spPr>
+          <a:xfrm>
+            <a:off x="6537960" y="3200400"/>
+            <a:ext cx="4480560" cy="1463040"/>
+          </a:xfrm>
+          <a:prstGeom prst="rect">
+            <a:avLst/>
+          </a:prstGeom>
+          <a:noFill/>
+          <a:ln/>
+        </p:spPr>
+        <p:txBody>
+          <a:bodyPr wrap="square" lIns="0" tIns="0" rIns="0" bIns="0" rtlCol="0" anchor="ctr"/>
+          <a:lstStyle/>
+          <a:p>
+            <a:pPr indent="0" marL="0">
+              <a:buNone/>
+            </a:pPr>
+            <a:r>
+              <a:rPr lang="en-US" sz="1650" b="1" dirty="0">
+                <a:solidFill>
+                  <a:srgbClr val="1A2420"/>
+                </a:solidFill>
+                <a:latin typeface="Arial" pitchFamily="34" charset="0"/>
+                <a:ea typeface="Arial" pitchFamily="34" charset="-122"/>
+                <a:cs typeface="Arial" pitchFamily="34" charset="-120"/>
+              </a:rPr>
+              <a:t>Adoption 0,4%: разворачивают двое из 500 в день</a:t>
+            </a:r>
+            <a:endParaRPr lang="en-US" sz="1650" dirty="0"/>
+          </a:p>
+        </p:txBody>
+      </p:sp>
+      <p:sp>
+        <p:nvSpPr>
+          <p:cNvPr id="11" name="Text 9"/>
+          <p:cNvSpPr/>
+          <p:nvPr/>
+        </p:nvSpPr>
+        <p:spPr>
+          <a:xfrm>
+            <a:off x="548640" y="5623560"/>
+            <a:ext cx="10424160" cy="640080"/>
+          </a:xfrm>
+          <a:prstGeom prst="rect">
+            <a:avLst/>
+          </a:prstGeom>
+          <a:noFill/>
+          <a:ln/>
+        </p:spPr>
+        <p:txBody>
+          <a:bodyPr wrap="square" lIns="0" tIns="0" rIns="0" bIns="0" rtlCol="0" anchor="ctr"/>
+          <a:lstStyle/>
+          <a:p>
+            <a:pPr indent="0" marL="0">
+              <a:buNone/>
+            </a:pPr>
+            <a:r>
+              <a:rPr lang="en-US" sz="1500" i="1" dirty="0">
+                <a:solidFill>
+                  <a:srgbClr val="5C6B63"/>
+                </a:solidFill>
+                <a:latin typeface="Arial" pitchFamily="34" charset="0"/>
+                <a:ea typeface="Arial" pitchFamily="34" charset="-122"/>
+                <a:cs typeface="Arial" pitchFamily="34" charset="-120"/>
+              </a:rPr>
+              <a:t>Ценность фичи = (сколько людей в какой боли) × (насколько она решает). Считаем до разработки, а не после.</a:t>
+            </a:r>
+            <a:endParaRPr lang="en-US" sz="1500" dirty="0"/>
+          </a:p>
+        </p:txBody>
+      </p:sp>
+      <p:sp>
+        <p:nvSpPr>
+          <p:cNvPr id="12" name="Text 10"/>
+          <p:cNvSpPr/>
+          <p:nvPr/>
+        </p:nvSpPr>
+        <p:spPr>
+          <a:xfrm>
+            <a:off x="11000232" y="6400800"/>
+            <a:ext cx="640080" cy="274320"/>
+          </a:xfrm>
+          <a:prstGeom prst="rect">
+            <a:avLst/>
+          </a:prstGeom>
+          <a:noFill/>
+          <a:ln/>
+        </p:spPr>
+        <p:txBody>
+          <a:bodyPr wrap="square" lIns="0" tIns="0" rIns="0" bIns="0" rtlCol="0" anchor="ctr"/>
+          <a:lstStyle/>
+          <a:p>
+            <a:pPr algn="r" indent="0" marL="0">
+              <a:buNone/>
+            </a:pPr>
+            <a:r>
+              <a:rPr lang="en-US" sz="1200" dirty="0">
+                <a:solidFill>
+                  <a:srgbClr val="5C6B63"/>
+                </a:solidFill>
+                <a:latin typeface="Arial" pitchFamily="34" charset="0"/>
+                <a:ea typeface="Arial" pitchFamily="34" charset="-122"/>
+                <a:cs typeface="Arial" pitchFamily="34" charset="-120"/>
+              </a:rPr>
+              <a:t>17</a:t>
+            </a:r>
+            <a:endParaRPr lang="en-US" sz="1200" dirty="0"/>
+          </a:p>
+        </p:txBody>
+      </p:sp>
+    </p:spTree>
+  </p:cSld>
+  <p:clrMapOvr>
+    <a:masterClrMapping/>
+  </p:clrMapOvr>
+</p:sld>
+</file>
+
+<file path=ppt/slides/slide18.xml><?xml version="1.0" encoding="utf-8"?>
+<p:sld xmlns:a="http://schemas.openxmlformats.org/drawingml/2006/main" xmlns:r="http://schemas.openxmlformats.org/officeDocument/2006/relationships" xmlns:p="http://schemas.openxmlformats.org/presentationml/2006/main">
+  <p:cSld name="Slide 18">
     <p:bg>
       <p:bgPr>
         <a:solidFill>
@@ -8615,7 +11679,7 @@
                 <a:ea typeface="Arial" pitchFamily="34" charset="-122"/>
                 <a:cs typeface="Arial" pitchFamily="34" charset="-120"/>
               </a:rPr>
-              <a:t>15</a:t>
+              <a:t>18</a:t>
             </a:r>
             <a:endParaRPr lang="en-US" sz="1200" dirty="0"/>
           </a:p>
@@ -10665,7 +13729,7 @@
                 <a:gridCol w="2011680"/>
                 <a:gridCol w="1554480"/>
                 <a:gridCol w="2743200"/>
-                <a:gridCol w="2468880"/>
+                <a:gridCol w="2286000"/>
               </a:tblGrid>
               <a:tr h="566928">
                 <a:tc>
@@ -14520,7 +17584,7 @@
                 <a:ea typeface="Arial" pitchFamily="34" charset="-122"/>
                 <a:cs typeface="Arial" pitchFamily="34" charset="-120"/>
               </a:rPr>
-              <a:t>ГДЕ ТЕРЯЕТСЯ СМЫСЛ</a:t>
+              <a:t>КАК ЭТО ВЫГЛЯДИТ В РЕАЛЬНОСТИ</a:t>
             </a:r>
             <a:endParaRPr lang="en-US" sz="1200" dirty="0"/>
           </a:p>
@@ -14559,7 +17623,7 @@
                 <a:ea typeface="Arial" pitchFamily="34" charset="-122"/>
                 <a:cs typeface="Arial" pitchFamily="34" charset="-120"/>
               </a:rPr>
-              <a:t>Эстафета со сломанным переводом</a:t>
+              <a:t>Входящие заявки, понедельник 09:47</a:t>
             </a:r>
             <a:endParaRPr lang="en-US" sz="3000" dirty="0"/>
           </a:p>
@@ -14573,16 +17637,16 @@
         </p:nvSpPr>
         <p:spPr>
           <a:xfrm>
-            <a:off x="548640" y="2103120"/>
-            <a:ext cx="2331720" cy="1691640"/>
+            <a:off x="548640" y="1828800"/>
+            <a:ext cx="7863840" cy="3931920"/>
           </a:xfrm>
           <a:prstGeom prst="roundRect">
             <a:avLst>
-              <a:gd name="adj" fmla="val 4324"/>
+              <a:gd name="adj" fmla="val 2326"/>
             </a:avLst>
           </a:prstGeom>
           <a:solidFill>
-            <a:srgbClr val="EDF4EF"/>
+            <a:srgbClr val="0E2A1F"/>
           </a:solidFill>
           <a:ln/>
         </p:spPr>
@@ -14595,480 +17659,268 @@
         </p:nvSpPr>
         <p:spPr>
           <a:xfrm>
-            <a:off x="749808" y="2286000"/>
-            <a:ext cx="1920240" cy="365760"/>
-          </a:xfrm>
-          <a:prstGeom prst="rect">
-            <a:avLst/>
-          </a:prstGeom>
-          <a:noFill/>
-          <a:ln/>
-        </p:spPr>
-        <p:txBody>
-          <a:bodyPr wrap="square" lIns="0" tIns="0" rIns="0" bIns="0" rtlCol="0" anchor="ctr"/>
-          <a:lstStyle/>
-          <a:p>
-            <a:pPr indent="0" marL="0">
-              <a:buNone/>
-            </a:pPr>
-            <a:r>
-              <a:rPr lang="en-US" sz="1400" b="1" spc="100" kern="0" dirty="0">
-                <a:solidFill>
-                  <a:srgbClr val="5C6B63"/>
-                </a:solidFill>
-                <a:latin typeface="Arial" pitchFamily="34" charset="0"/>
-                <a:ea typeface="Arial" pitchFamily="34" charset="-122"/>
-                <a:cs typeface="Arial" pitchFamily="34" charset="-120"/>
-              </a:rPr>
-              <a:t>Бизнес</a:t>
-            </a:r>
-            <a:endParaRPr lang="en-US" sz="1400" dirty="0"/>
-          </a:p>
-        </p:txBody>
-      </p:sp>
-      <p:sp>
-        <p:nvSpPr>
-          <p:cNvPr id="7" name="Text 5"/>
-          <p:cNvSpPr/>
-          <p:nvPr/>
-        </p:nvSpPr>
-        <p:spPr>
-          <a:xfrm>
-            <a:off x="749808" y="2697480"/>
-            <a:ext cx="1965960" cy="960120"/>
-          </a:xfrm>
-          <a:prstGeom prst="rect">
-            <a:avLst/>
-          </a:prstGeom>
-          <a:noFill/>
-          <a:ln/>
-        </p:spPr>
-        <p:txBody>
-          <a:bodyPr wrap="square" lIns="0" tIns="0" rIns="0" bIns="0" rtlCol="0" anchor="ctr"/>
-          <a:lstStyle/>
-          <a:p>
-            <a:pPr indent="0" marL="0">
-              <a:buNone/>
-            </a:pPr>
-            <a:r>
-              <a:rPr lang="en-US" sz="1600" dirty="0">
-                <a:solidFill>
-                  <a:srgbClr val="1A2420"/>
-                </a:solidFill>
-                <a:latin typeface="Arial" pitchFamily="34" charset="0"/>
-                <a:ea typeface="Arial" pitchFamily="34" charset="-122"/>
-                <a:cs typeface="Arial" pitchFamily="34" charset="-120"/>
-              </a:rPr>
-              <a:t>«Что-то отток растёт»</a:t>
-            </a:r>
-            <a:endParaRPr lang="en-US" sz="1600" dirty="0"/>
-          </a:p>
-        </p:txBody>
-      </p:sp>
-      <p:sp>
-        <p:nvSpPr>
-          <p:cNvPr id="8" name="Text 6"/>
-          <p:cNvSpPr/>
-          <p:nvPr/>
-        </p:nvSpPr>
-        <p:spPr>
-          <a:xfrm>
-            <a:off x="2889504" y="2697480"/>
-            <a:ext cx="411480" cy="548640"/>
-          </a:xfrm>
-          <a:prstGeom prst="rect">
-            <a:avLst/>
-          </a:prstGeom>
-          <a:noFill/>
-          <a:ln/>
-        </p:spPr>
-        <p:txBody>
-          <a:bodyPr wrap="square" lIns="0" tIns="0" rIns="0" bIns="0" rtlCol="0" anchor="ctr"/>
-          <a:lstStyle/>
-          <a:p>
-            <a:pPr indent="0" marL="0">
-              <a:buNone/>
-            </a:pPr>
-            <a:r>
-              <a:rPr lang="en-US" sz="2400" b="1" dirty="0">
-                <a:solidFill>
-                  <a:srgbClr val="5C6B63"/>
-                </a:solidFill>
-                <a:latin typeface="Arial" pitchFamily="34" charset="0"/>
-                <a:ea typeface="Arial" pitchFamily="34" charset="-122"/>
-                <a:cs typeface="Arial" pitchFamily="34" charset="-120"/>
-              </a:rPr>
-              <a:t>→</a:t>
-            </a:r>
-            <a:endParaRPr lang="en-US" sz="2400" dirty="0"/>
-          </a:p>
-        </p:txBody>
-      </p:sp>
-      <p:sp>
-        <p:nvSpPr>
-          <p:cNvPr id="9" name="Shape 7"/>
-          <p:cNvSpPr/>
-          <p:nvPr/>
-        </p:nvSpPr>
-        <p:spPr>
-          <a:xfrm>
-            <a:off x="3291840" y="2103120"/>
-            <a:ext cx="2331720" cy="1691640"/>
+            <a:off x="822960" y="1956816"/>
+            <a:ext cx="7315200" cy="320040"/>
+          </a:xfrm>
+          <a:prstGeom prst="rect">
+            <a:avLst/>
+          </a:prstGeom>
+          <a:noFill/>
+          <a:ln/>
+        </p:spPr>
+        <p:txBody>
+          <a:bodyPr wrap="square" lIns="0" tIns="0" rIns="0" bIns="0" rtlCol="0" anchor="ctr"/>
+          <a:lstStyle/>
+          <a:p>
+            <a:pPr indent="0" marL="0">
+              <a:buNone/>
+            </a:pPr>
+            <a:r>
+              <a:rPr lang="en-US" sz="1300" b="1" spc="100" kern="0" dirty="0">
+                <a:solidFill>
+                  <a:srgbClr val="8FC7A8"/>
+                </a:solidFill>
+                <a:latin typeface="Arial" pitchFamily="34" charset="0"/>
+                <a:ea typeface="Arial" pitchFamily="34" charset="-122"/>
+                <a:cs typeface="Arial" pitchFamily="34" charset="-120"/>
+              </a:rPr>
+              <a:t>«Лукошко» · продуктовый чат</a:t>
+            </a:r>
+            <a:endParaRPr lang="en-US" sz="1300" dirty="0"/>
+          </a:p>
+        </p:txBody>
+      </p:sp>
+      <p:sp>
+        <p:nvSpPr>
+          <p:cNvPr id="7" name="Shape 5"/>
+          <p:cNvSpPr/>
+          <p:nvPr/>
+        </p:nvSpPr>
+        <p:spPr>
+          <a:xfrm>
+            <a:off x="804672" y="2395728"/>
+            <a:ext cx="5852160" cy="713232"/>
           </a:xfrm>
           <a:prstGeom prst="roundRect">
             <a:avLst>
-              <a:gd name="adj" fmla="val 4324"/>
+              <a:gd name="adj" fmla="val 15385"/>
             </a:avLst>
           </a:prstGeom>
           <a:solidFill>
-            <a:srgbClr val="EDF4EF"/>
+            <a:srgbClr val="1D4634"/>
           </a:solidFill>
           <a:ln/>
         </p:spPr>
       </p:sp>
       <p:sp>
         <p:nvSpPr>
-          <p:cNvPr id="10" name="Text 8"/>
-          <p:cNvSpPr/>
-          <p:nvPr/>
-        </p:nvSpPr>
-        <p:spPr>
-          <a:xfrm>
-            <a:off x="3493008" y="2286000"/>
-            <a:ext cx="1920240" cy="365760"/>
-          </a:xfrm>
-          <a:prstGeom prst="rect">
-            <a:avLst/>
-          </a:prstGeom>
-          <a:noFill/>
-          <a:ln/>
-        </p:spPr>
-        <p:txBody>
-          <a:bodyPr wrap="square" lIns="0" tIns="0" rIns="0" bIns="0" rtlCol="0" anchor="ctr"/>
-          <a:lstStyle/>
-          <a:p>
-            <a:pPr indent="0" marL="0">
-              <a:buNone/>
-            </a:pPr>
-            <a:r>
-              <a:rPr lang="en-US" sz="1400" b="1" spc="100" kern="0" dirty="0">
-                <a:solidFill>
-                  <a:srgbClr val="5C6B63"/>
-                </a:solidFill>
-                <a:latin typeface="Arial" pitchFamily="34" charset="0"/>
-                <a:ea typeface="Arial" pitchFamily="34" charset="-122"/>
-                <a:cs typeface="Arial" pitchFamily="34" charset="-120"/>
-              </a:rPr>
-              <a:t>Продакт</a:t>
-            </a:r>
-            <a:endParaRPr lang="en-US" sz="1400" dirty="0"/>
-          </a:p>
-        </p:txBody>
-      </p:sp>
-      <p:sp>
-        <p:nvSpPr>
-          <p:cNvPr id="11" name="Text 9"/>
-          <p:cNvSpPr/>
-          <p:nvPr/>
-        </p:nvSpPr>
-        <p:spPr>
-          <a:xfrm>
-            <a:off x="3493008" y="2697480"/>
-            <a:ext cx="1965960" cy="960120"/>
-          </a:xfrm>
-          <a:prstGeom prst="rect">
-            <a:avLst/>
-          </a:prstGeom>
-          <a:noFill/>
-          <a:ln/>
-        </p:spPr>
-        <p:txBody>
-          <a:bodyPr wrap="square" lIns="0" tIns="0" rIns="0" bIns="0" rtlCol="0" anchor="ctr"/>
-          <a:lstStyle/>
-          <a:p>
-            <a:pPr indent="0" marL="0">
-              <a:buNone/>
-            </a:pPr>
-            <a:r>
-              <a:rPr lang="en-US" sz="1600" dirty="0">
-                <a:solidFill>
-                  <a:srgbClr val="1A2420"/>
-                </a:solidFill>
-                <a:latin typeface="Arial" pitchFamily="34" charset="0"/>
-                <a:ea typeface="Arial" pitchFamily="34" charset="-122"/>
-                <a:cs typeface="Arial" pitchFamily="34" charset="-120"/>
-              </a:rPr>
-              <a:t>«Нужна churn-модель»</a:t>
-            </a:r>
-            <a:endParaRPr lang="en-US" sz="1600" dirty="0"/>
-          </a:p>
-        </p:txBody>
-      </p:sp>
-      <p:sp>
-        <p:nvSpPr>
-          <p:cNvPr id="12" name="Text 10"/>
-          <p:cNvSpPr/>
-          <p:nvPr/>
-        </p:nvSpPr>
-        <p:spPr>
-          <a:xfrm>
-            <a:off x="5632704" y="2697480"/>
-            <a:ext cx="411480" cy="548640"/>
-          </a:xfrm>
-          <a:prstGeom prst="rect">
-            <a:avLst/>
-          </a:prstGeom>
-          <a:noFill/>
-          <a:ln/>
-        </p:spPr>
-        <p:txBody>
-          <a:bodyPr wrap="square" lIns="0" tIns="0" rIns="0" bIns="0" rtlCol="0" anchor="ctr"/>
-          <a:lstStyle/>
-          <a:p>
-            <a:pPr indent="0" marL="0">
-              <a:buNone/>
-            </a:pPr>
-            <a:r>
-              <a:rPr lang="en-US" sz="2400" b="1" dirty="0">
-                <a:solidFill>
-                  <a:srgbClr val="5C6B63"/>
-                </a:solidFill>
-                <a:latin typeface="Arial" pitchFamily="34" charset="0"/>
-                <a:ea typeface="Arial" pitchFamily="34" charset="-122"/>
-                <a:cs typeface="Arial" pitchFamily="34" charset="-120"/>
-              </a:rPr>
-              <a:t>→</a:t>
-            </a:r>
-            <a:endParaRPr lang="en-US" sz="2400" dirty="0"/>
-          </a:p>
-        </p:txBody>
-      </p:sp>
-      <p:sp>
-        <p:nvSpPr>
-          <p:cNvPr id="13" name="Shape 11"/>
-          <p:cNvSpPr/>
-          <p:nvPr/>
-        </p:nvSpPr>
-        <p:spPr>
-          <a:xfrm>
-            <a:off x="6035040" y="2103120"/>
-            <a:ext cx="2331720" cy="1691640"/>
+          <p:cNvPr id="8" name="Text 6"/>
+          <p:cNvSpPr/>
+          <p:nvPr/>
+        </p:nvSpPr>
+        <p:spPr>
+          <a:xfrm>
+            <a:off x="1024128" y="2441448"/>
+            <a:ext cx="5413248" cy="621792"/>
+          </a:xfrm>
+          <a:prstGeom prst="rect">
+            <a:avLst/>
+          </a:prstGeom>
+          <a:noFill/>
+          <a:ln/>
+        </p:spPr>
+        <p:txBody>
+          <a:bodyPr wrap="square" lIns="0" tIns="0" rIns="0" bIns="0" rtlCol="0" anchor="ctr"/>
+          <a:lstStyle/>
+          <a:p>
+            <a:pPr indent="0" marL="0">
+              <a:buNone/>
+            </a:pPr>
+            <a:r>
+              <a:rPr lang="en-US" sz="1350" dirty="0">
+                <a:solidFill>
+                  <a:srgbClr val="D9EADF"/>
+                </a:solidFill>
+                <a:latin typeface="Arial" pitchFamily="34" charset="0"/>
+                <a:ea typeface="Arial" pitchFamily="34" charset="-122"/>
+                <a:cs typeface="Arial" pitchFamily="34" charset="-120"/>
+              </a:rPr>
+              <a:t>Отток растёт. Внедрим ML-модель удержания? Бюджет 20 млн/год</a:t>
+            </a:r>
+            <a:endParaRPr lang="en-US" sz="1350" dirty="0"/>
+          </a:p>
+        </p:txBody>
+      </p:sp>
+      <p:sp>
+        <p:nvSpPr>
+          <p:cNvPr id="9" name="Shape 7"/>
+          <p:cNvSpPr/>
+          <p:nvPr/>
+        </p:nvSpPr>
+        <p:spPr>
+          <a:xfrm>
+            <a:off x="804672" y="3236976"/>
+            <a:ext cx="5852160" cy="713232"/>
           </a:xfrm>
           <a:prstGeom prst="roundRect">
             <a:avLst>
-              <a:gd name="adj" fmla="val 4324"/>
+              <a:gd name="adj" fmla="val 15385"/>
             </a:avLst>
           </a:prstGeom>
           <a:solidFill>
-            <a:srgbClr val="EDF4EF"/>
+            <a:srgbClr val="1D4634"/>
           </a:solidFill>
           <a:ln/>
         </p:spPr>
       </p:sp>
       <p:sp>
         <p:nvSpPr>
-          <p:cNvPr id="14" name="Text 12"/>
-          <p:cNvSpPr/>
-          <p:nvPr/>
-        </p:nvSpPr>
-        <p:spPr>
-          <a:xfrm>
-            <a:off x="6236208" y="2286000"/>
-            <a:ext cx="1920240" cy="365760"/>
-          </a:xfrm>
-          <a:prstGeom prst="rect">
-            <a:avLst/>
-          </a:prstGeom>
-          <a:noFill/>
-          <a:ln/>
-        </p:spPr>
-        <p:txBody>
-          <a:bodyPr wrap="square" lIns="0" tIns="0" rIns="0" bIns="0" rtlCol="0" anchor="ctr"/>
-          <a:lstStyle/>
-          <a:p>
-            <a:pPr indent="0" marL="0">
-              <a:buNone/>
-            </a:pPr>
-            <a:r>
-              <a:rPr lang="en-US" sz="1400" b="1" spc="100" kern="0" dirty="0">
-                <a:solidFill>
-                  <a:srgbClr val="5C6B63"/>
-                </a:solidFill>
-                <a:latin typeface="Arial" pitchFamily="34" charset="0"/>
-                <a:ea typeface="Arial" pitchFamily="34" charset="-122"/>
-                <a:cs typeface="Arial" pitchFamily="34" charset="-120"/>
-              </a:rPr>
-              <a:t>DS</a:t>
-            </a:r>
-            <a:endParaRPr lang="en-US" sz="1400" dirty="0"/>
-          </a:p>
-        </p:txBody>
-      </p:sp>
-      <p:sp>
-        <p:nvSpPr>
-          <p:cNvPr id="15" name="Text 13"/>
-          <p:cNvSpPr/>
-          <p:nvPr/>
-        </p:nvSpPr>
-        <p:spPr>
-          <a:xfrm>
-            <a:off x="6236208" y="2697480"/>
-            <a:ext cx="1965960" cy="960120"/>
-          </a:xfrm>
-          <a:prstGeom prst="rect">
-            <a:avLst/>
-          </a:prstGeom>
-          <a:noFill/>
-          <a:ln/>
-        </p:spPr>
-        <p:txBody>
-          <a:bodyPr wrap="square" lIns="0" tIns="0" rIns="0" bIns="0" rtlCol="0" anchor="ctr"/>
-          <a:lstStyle/>
-          <a:p>
-            <a:pPr indent="0" marL="0">
-              <a:buNone/>
-            </a:pPr>
-            <a:r>
-              <a:rPr lang="en-US" sz="1600" dirty="0">
-                <a:solidFill>
-                  <a:srgbClr val="1A2420"/>
-                </a:solidFill>
-                <a:latin typeface="Arial" pitchFamily="34" charset="0"/>
-                <a:ea typeface="Arial" pitchFamily="34" charset="-122"/>
-                <a:cs typeface="Arial" pitchFamily="34" charset="-120"/>
-              </a:rPr>
-              <a:t>«Обучите классификатор оттока»</a:t>
-            </a:r>
-            <a:endParaRPr lang="en-US" sz="1600" dirty="0"/>
-          </a:p>
-        </p:txBody>
-      </p:sp>
-      <p:sp>
-        <p:nvSpPr>
-          <p:cNvPr id="16" name="Text 14"/>
-          <p:cNvSpPr/>
-          <p:nvPr/>
-        </p:nvSpPr>
-        <p:spPr>
-          <a:xfrm>
-            <a:off x="8375904" y="2697480"/>
-            <a:ext cx="411480" cy="548640"/>
-          </a:xfrm>
-          <a:prstGeom prst="rect">
-            <a:avLst/>
-          </a:prstGeom>
-          <a:noFill/>
-          <a:ln/>
-        </p:spPr>
-        <p:txBody>
-          <a:bodyPr wrap="square" lIns="0" tIns="0" rIns="0" bIns="0" rtlCol="0" anchor="ctr"/>
-          <a:lstStyle/>
-          <a:p>
-            <a:pPr indent="0" marL="0">
-              <a:buNone/>
-            </a:pPr>
-            <a:r>
-              <a:rPr lang="en-US" sz="2400" b="1" dirty="0">
-                <a:solidFill>
-                  <a:srgbClr val="5C6B63"/>
-                </a:solidFill>
-                <a:latin typeface="Arial" pitchFamily="34" charset="0"/>
-                <a:ea typeface="Arial" pitchFamily="34" charset="-122"/>
-                <a:cs typeface="Arial" pitchFamily="34" charset="-120"/>
-              </a:rPr>
-              <a:t>→</a:t>
-            </a:r>
-            <a:endParaRPr lang="en-US" sz="2400" dirty="0"/>
-          </a:p>
-        </p:txBody>
-      </p:sp>
-      <p:sp>
-        <p:nvSpPr>
-          <p:cNvPr id="17" name="Shape 15"/>
-          <p:cNvSpPr/>
-          <p:nvPr/>
-        </p:nvSpPr>
-        <p:spPr>
-          <a:xfrm>
-            <a:off x="8778240" y="2103120"/>
-            <a:ext cx="2331720" cy="1691640"/>
+          <p:cNvPr id="10" name="Text 8"/>
+          <p:cNvSpPr/>
+          <p:nvPr/>
+        </p:nvSpPr>
+        <p:spPr>
+          <a:xfrm>
+            <a:off x="1024128" y="3282696"/>
+            <a:ext cx="5413248" cy="621792"/>
+          </a:xfrm>
+          <a:prstGeom prst="rect">
+            <a:avLst/>
+          </a:prstGeom>
+          <a:noFill/>
+          <a:ln/>
+        </p:spPr>
+        <p:txBody>
+          <a:bodyPr wrap="square" lIns="0" tIns="0" rIns="0" bIns="0" rtlCol="0" anchor="ctr"/>
+          <a:lstStyle/>
+          <a:p>
+            <a:pPr indent="0" marL="0">
+              <a:buNone/>
+            </a:pPr>
+            <a:r>
+              <a:rPr lang="en-US" sz="1350" dirty="0">
+                <a:solidFill>
+                  <a:srgbClr val="D9EADF"/>
+                </a:solidFill>
+                <a:latin typeface="Arial" pitchFamily="34" charset="0"/>
+                <a:ea typeface="Arial" pitchFamily="34" charset="-122"/>
+                <a:cs typeface="Arial" pitchFamily="34" charset="-120"/>
+              </a:rPr>
+              <a:t>LLM сократит 30% операторов поддержки — я видел демо</a:t>
+            </a:r>
+            <a:endParaRPr lang="en-US" sz="1350" dirty="0"/>
+          </a:p>
+        </p:txBody>
+      </p:sp>
+      <p:sp>
+        <p:nvSpPr>
+          <p:cNvPr id="11" name="Shape 9"/>
+          <p:cNvSpPr/>
+          <p:nvPr/>
+        </p:nvSpPr>
+        <p:spPr>
+          <a:xfrm>
+            <a:off x="804672" y="4078224"/>
+            <a:ext cx="5852160" cy="713232"/>
           </a:xfrm>
           <a:prstGeom prst="roundRect">
             <a:avLst>
-              <a:gd name="adj" fmla="val 4324"/>
+              <a:gd name="adj" fmla="val 15385"/>
             </a:avLst>
           </a:prstGeom>
           <a:solidFill>
-            <a:srgbClr val="E8590C"/>
+            <a:srgbClr val="1D4634"/>
           </a:solidFill>
           <a:ln/>
         </p:spPr>
       </p:sp>
       <p:sp>
         <p:nvSpPr>
-          <p:cNvPr id="18" name="Text 16"/>
-          <p:cNvSpPr/>
-          <p:nvPr/>
-        </p:nvSpPr>
-        <p:spPr>
-          <a:xfrm>
-            <a:off x="8979408" y="2286000"/>
-            <a:ext cx="1920240" cy="365760"/>
-          </a:xfrm>
-          <a:prstGeom prst="rect">
-            <a:avLst/>
-          </a:prstGeom>
-          <a:noFill/>
-          <a:ln/>
-        </p:spPr>
-        <p:txBody>
-          <a:bodyPr wrap="square" lIns="0" tIns="0" rIns="0" bIns="0" rtlCol="0" anchor="ctr"/>
-          <a:lstStyle/>
-          <a:p>
-            <a:pPr indent="0" marL="0">
-              <a:buNone/>
-            </a:pPr>
-            <a:r>
-              <a:rPr lang="en-US" sz="1400" b="1" spc="100" kern="0" dirty="0">
-                <a:solidFill>
-                  <a:srgbClr val="FFE3D1"/>
-                </a:solidFill>
-                <a:latin typeface="Arial" pitchFamily="34" charset="0"/>
-                <a:ea typeface="Arial" pitchFamily="34" charset="-122"/>
-                <a:cs typeface="Arial" pitchFamily="34" charset="-120"/>
-              </a:rPr>
-              <a:t>Через месяц</a:t>
-            </a:r>
-            <a:endParaRPr lang="en-US" sz="1400" dirty="0"/>
-          </a:p>
-        </p:txBody>
-      </p:sp>
-      <p:sp>
-        <p:nvSpPr>
-          <p:cNvPr id="19" name="Text 17"/>
-          <p:cNvSpPr/>
-          <p:nvPr/>
-        </p:nvSpPr>
-        <p:spPr>
-          <a:xfrm>
-            <a:off x="8979408" y="2697480"/>
-            <a:ext cx="1965960" cy="960120"/>
-          </a:xfrm>
-          <a:prstGeom prst="rect">
-            <a:avLst/>
-          </a:prstGeom>
-          <a:noFill/>
-          <a:ln/>
-        </p:spPr>
-        <p:txBody>
-          <a:bodyPr wrap="square" lIns="0" tIns="0" rIns="0" bIns="0" rtlCol="0" anchor="ctr"/>
-          <a:lstStyle/>
-          <a:p>
-            <a:pPr indent="0" marL="0">
-              <a:buNone/>
-            </a:pPr>
-            <a:r>
-              <a:rPr lang="en-US" sz="1600" b="1" dirty="0">
+          <p:cNvPr id="12" name="Text 10"/>
+          <p:cNvSpPr/>
+          <p:nvPr/>
+        </p:nvSpPr>
+        <p:spPr>
+          <a:xfrm>
+            <a:off x="1024128" y="4123944"/>
+            <a:ext cx="5413248" cy="621792"/>
+          </a:xfrm>
+          <a:prstGeom prst="rect">
+            <a:avLst/>
+          </a:prstGeom>
+          <a:noFill/>
+          <a:ln/>
+        </p:spPr>
+        <p:txBody>
+          <a:bodyPr wrap="square" lIns="0" tIns="0" rIns="0" bIns="0" rtlCol="0" anchor="ctr"/>
+          <a:lstStyle/>
+          <a:p>
+            <a:pPr indent="0" marL="0">
+              <a:buNone/>
+            </a:pPr>
+            <a:r>
+              <a:rPr lang="en-US" sz="1350" dirty="0">
+                <a:solidFill>
+                  <a:srgbClr val="D9EADF"/>
+                </a:solidFill>
+                <a:latin typeface="Arial" pitchFamily="34" charset="0"/>
+                <a:ea typeface="Arial" pitchFamily="34" charset="-122"/>
+                <a:cs typeface="Arial" pitchFamily="34" charset="-120"/>
+              </a:rPr>
+              <a:t>AUC 0.79! Показываем баннер всем, у кого высокая вероятность покупки</a:t>
+            </a:r>
+            <a:endParaRPr lang="en-US" sz="1350" dirty="0"/>
+          </a:p>
+        </p:txBody>
+      </p:sp>
+      <p:sp>
+        <p:nvSpPr>
+          <p:cNvPr id="13" name="Shape 11"/>
+          <p:cNvSpPr/>
+          <p:nvPr/>
+        </p:nvSpPr>
+        <p:spPr>
+          <a:xfrm>
+            <a:off x="2304288" y="4919472"/>
+            <a:ext cx="5852160" cy="713232"/>
+          </a:xfrm>
+          <a:prstGeom prst="roundRect">
+            <a:avLst>
+              <a:gd name="adj" fmla="val 15385"/>
+            </a:avLst>
+          </a:prstGeom>
+          <a:solidFill>
+            <a:srgbClr val="1E6B47"/>
+          </a:solidFill>
+          <a:ln/>
+        </p:spPr>
+      </p:sp>
+      <p:sp>
+        <p:nvSpPr>
+          <p:cNvPr id="14" name="Text 12"/>
+          <p:cNvSpPr/>
+          <p:nvPr/>
+        </p:nvSpPr>
+        <p:spPr>
+          <a:xfrm>
+            <a:off x="2523744" y="4965192"/>
+            <a:ext cx="5413248" cy="621792"/>
+          </a:xfrm>
+          <a:prstGeom prst="rect">
+            <a:avLst/>
+          </a:prstGeom>
+          <a:noFill/>
+          <a:ln/>
+        </p:spPr>
+        <p:txBody>
+          <a:bodyPr wrap="square" lIns="0" tIns="0" rIns="0" bIns="0" rtlCol="0" anchor="ctr"/>
+          <a:lstStyle/>
+          <a:p>
+            <a:pPr indent="0" marL="0">
+              <a:buNone/>
+            </a:pPr>
+            <a:r>
+              <a:rPr lang="en-US" sz="1350" dirty="0">
                 <a:solidFill>
                   <a:srgbClr val="FFFFFF"/>
                 </a:solidFill>
@@ -15076,93 +17928,54 @@
                 <a:ea typeface="Arial" pitchFamily="34" charset="-122"/>
                 <a:cs typeface="Arial" pitchFamily="34" charset="-120"/>
               </a:rPr>
-              <a:t>AUC 0.87 · отток не сдвинулся</a:t>
-            </a:r>
-            <a:endParaRPr lang="en-US" sz="1600" dirty="0"/>
-          </a:p>
-        </p:txBody>
-      </p:sp>
-      <p:sp>
-        <p:nvSpPr>
-          <p:cNvPr id="20" name="Text 18"/>
-          <p:cNvSpPr/>
-          <p:nvPr/>
-        </p:nvSpPr>
-        <p:spPr>
-          <a:xfrm>
-            <a:off x="548640" y="4251960"/>
-            <a:ext cx="10424160" cy="548640"/>
-          </a:xfrm>
-          <a:prstGeom prst="rect">
-            <a:avLst/>
-          </a:prstGeom>
-          <a:noFill/>
-          <a:ln/>
-        </p:spPr>
-        <p:txBody>
-          <a:bodyPr wrap="square" lIns="0" tIns="0" rIns="0" bIns="0" rtlCol="0" anchor="ctr"/>
-          <a:lstStyle/>
-          <a:p>
-            <a:pPr indent="0" marL="0">
-              <a:buNone/>
-            </a:pPr>
-            <a:r>
-              <a:rPr lang="en-US" sz="2100" b="1" dirty="0">
-                <a:solidFill>
-                  <a:srgbClr val="1E6B47"/>
-                </a:solidFill>
-                <a:latin typeface="Arial" pitchFamily="34" charset="0"/>
-                <a:ea typeface="Arial" pitchFamily="34" charset="-122"/>
-                <a:cs typeface="Arial" pitchFamily="34" charset="-120"/>
-              </a:rPr>
-              <a:t>Кто-то должен был спросить: что мы будем делать с предсказанием — и как оно вернёт деньги?</a:t>
-            </a:r>
-            <a:endParaRPr lang="en-US" sz="2100" dirty="0"/>
-          </a:p>
-        </p:txBody>
-      </p:sp>
-      <p:sp>
-        <p:nvSpPr>
-          <p:cNvPr id="21" name="Text 19"/>
-          <p:cNvSpPr/>
-          <p:nvPr/>
-        </p:nvSpPr>
-        <p:spPr>
-          <a:xfrm>
-            <a:off x="548640" y="5029200"/>
-            <a:ext cx="10424160" cy="822960"/>
-          </a:xfrm>
-          <a:prstGeom prst="rect">
-            <a:avLst/>
-          </a:prstGeom>
-          <a:noFill/>
-          <a:ln/>
-        </p:spPr>
-        <p:txBody>
-          <a:bodyPr wrap="square" lIns="0" tIns="0" rIns="0" bIns="0" rtlCol="0" anchor="ctr"/>
-          <a:lstStyle/>
-          <a:p>
-            <a:pPr indent="0" marL="0">
-              <a:buNone/>
-            </a:pPr>
-            <a:r>
-              <a:rPr lang="en-US" sz="1700" dirty="0">
-                <a:solidFill>
-                  <a:srgbClr val="1A2420"/>
-                </a:solidFill>
-                <a:latin typeface="Arial" pitchFamily="34" charset="0"/>
-                <a:ea typeface="Arial" pitchFamily="34" charset="-122"/>
-                <a:cs typeface="Arial" pitchFamily="34" charset="-120"/>
-              </a:rPr>
-              <a:t>Эта роль — аналитик в широком смысле. Не «человек-функция качества модели»: сформулировал задачу, построил, измерил эффект, ответил бизнесу.</a:t>
-            </a:r>
-            <a:endParaRPr lang="en-US" sz="1700" dirty="0"/>
-          </a:p>
-        </p:txBody>
-      </p:sp>
-      <p:sp>
-        <p:nvSpPr>
-          <p:cNvPr id="22" name="Text 20"/>
+              <a:t>…а что должно измениться в деньгах?</a:t>
+            </a:r>
+            <a:endParaRPr lang="en-US" sz="1350" dirty="0"/>
+          </a:p>
+        </p:txBody>
+      </p:sp>
+      <p:sp>
+        <p:nvSpPr>
+          <p:cNvPr id="15" name="Text 13"/>
+          <p:cNvSpPr/>
+          <p:nvPr/>
+        </p:nvSpPr>
+        <p:spPr>
+          <a:xfrm>
+            <a:off x="548640" y="5989320"/>
+            <a:ext cx="11091672" cy="822960"/>
+          </a:xfrm>
+          <a:prstGeom prst="rect">
+            <a:avLst/>
+          </a:prstGeom>
+          <a:noFill/>
+          <a:ln/>
+        </p:spPr>
+        <p:txBody>
+          <a:bodyPr wrap="square" lIns="0" tIns="0" rIns="0" bIns="0" rtlCol="0" anchor="ctr"/>
+          <a:lstStyle/>
+          <a:p>
+            <a:pPr indent="0" marL="0">
+              <a:buNone/>
+            </a:pPr>
+            <a:r>
+              <a:rPr lang="en-US" sz="1550" i="1" dirty="0">
+                <a:solidFill>
+                  <a:srgbClr val="5C6B63"/>
+                </a:solidFill>
+                <a:latin typeface="Arial" pitchFamily="34" charset="0"/>
+                <a:ea typeface="Arial" pitchFamily="34" charset="-122"/>
+                <a:cs typeface="Arial" pitchFamily="34" charset="-120"/>
+              </a:rPr>
+              <a:t>Занятие недели 1: переписываем каждую в гипотезу — вопрос → метрика → guardrail → нужен ли ML вообще.</a:t>
+            </a:r>
+            <a:endParaRPr lang="en-US" sz="1550" dirty="0"/>
+          </a:p>
+        </p:txBody>
+      </p:sp>
+      <p:sp>
+        <p:nvSpPr>
+          <p:cNvPr id="16" name="Text 14"/>
           <p:cNvSpPr/>
           <p:nvPr/>
         </p:nvSpPr>
@@ -15303,7 +18116,7 @@
                 <a:ea typeface="Arial" pitchFamily="34" charset="-122"/>
                 <a:cs typeface="Arial" pitchFamily="34" charset="-120"/>
               </a:rPr>
-              <a:t>ТИПЫ ЗАДАЧ АНАЛИТИКА</a:t>
+              <a:t>ГДЕ ТЕРЯЕТСЯ СМЫСЛ</a:t>
             </a:r>
             <a:endParaRPr lang="en-US" sz="1200" dirty="0"/>
           </a:p>
@@ -15342,1697 +18155,538 @@
                 <a:ea typeface="Arial" pitchFamily="34" charset="-122"/>
                 <a:cs typeface="Arial" pitchFamily="34" charset="-120"/>
               </a:rPr>
-              <a:t>Пять жанров работы — и главная ошибка новичка в каждом</a:t>
+              <a:t>Эстафета со сломанным переводом</a:t>
             </a:r>
             <a:endParaRPr lang="en-US" sz="3000" dirty="0"/>
           </a:p>
         </p:txBody>
       </p:sp>
-      <p:graphicFrame>
-        <p:nvGraphicFramePr>
-          <p:cNvPr id="10" name="Table 0"/>
-          <p:cNvGraphicFramePr>
-            <a:graphicFrameLocks noGrp="1"/>
-          </p:cNvGraphicFramePr>
-          <p:nvPr>
-            <p:extLst>
-              <p:ext uri="{D42A27DB-BD31-4B8C-83A1-F6EECF244321}">
-                <p14:modId xmlns:p14="http://schemas.microsoft.com/office/powerpoint/2010/main" val="1579011935"/>
-              </p:ext>
-            </p:extLst>
-          </p:nvPr>
-        </p:nvGraphicFramePr>
-        <p:xfrm>
-          <a:off x="548640" y="1874520"/>
-          <a:ext cx="11091672" cy="914400"/>
-        </p:xfrm>
-        <a:graphic>
-          <a:graphicData uri="http://schemas.openxmlformats.org/drawingml/2006/table">
-            <a:tbl>
-              <a:tblPr/>
-              <a:tblGrid>
-                <a:gridCol w="2560320"/>
-                <a:gridCol w="2468880"/>
-                <a:gridCol w="2834640"/>
-                <a:gridCol w="3200400"/>
-              </a:tblGrid>
-              <a:tr h="603504">
-                <a:tc>
-                  <a:txBody>
-                    <a:bodyPr/>
-                    <a:lstStyle/>
-                    <a:p>
-                      <a:pPr indent="0" marL="0">
-                        <a:buNone/>
-                      </a:pPr>
-                      <a:r>
-                        <a:rPr lang="en-US" sz="1400" b="1" dirty="0">
-                          <a:solidFill>
-                            <a:srgbClr val="FFFFFF"/>
-                          </a:solidFill>
-                          <a:latin typeface="Arial" pitchFamily="34" charset="0"/>
-                          <a:ea typeface="Arial" pitchFamily="34" charset="-122"/>
-                          <a:cs typeface="Arial" pitchFamily="34" charset="-120"/>
-                        </a:rPr>
-                        <a:t>Жанр</a:t>
-                      </a:r>
-                      <a:endParaRPr lang="en-US" sz="1400" dirty="0">
-                        <a:latin typeface="Arial" charset="0"/>
-                        <a:ea typeface="Arial" charset="0"/>
-                        <a:cs typeface="Arial" charset="0"/>
-                      </a:endParaRPr>
-                    </a:p>
-                  </a:txBody>
-                  <a:tcPr marL="73152" marR="73152" marT="73152" marB="73152" anchor="ctr">
-                    <a:lnL w="12700" cap="flat" cmpd="sng" algn="ctr">
-                      <a:solidFill>
-                        <a:srgbClr val="D8E2DC"/>
-                      </a:solidFill>
-                      <a:prstDash val="solid"/>
-                      <a:round/>
-                      <a:headEnd type="none" w="med" len="med"/>
-                      <a:tailEnd type="none" w="med" len="med"/>
-                    </a:lnL>
-                    <a:lnR w="12700" cap="flat" cmpd="sng" algn="ctr">
-                      <a:solidFill>
-                        <a:srgbClr val="D8E2DC"/>
-                      </a:solidFill>
-                      <a:prstDash val="solid"/>
-                      <a:round/>
-                      <a:headEnd type="none" w="med" len="med"/>
-                      <a:tailEnd type="none" w="med" len="med"/>
-                    </a:lnR>
-                    <a:lnT w="12700" cap="flat" cmpd="sng" algn="ctr">
-                      <a:solidFill>
-                        <a:srgbClr val="D8E2DC"/>
-                      </a:solidFill>
-                      <a:prstDash val="solid"/>
-                      <a:round/>
-                      <a:headEnd type="none" w="med" len="med"/>
-                      <a:tailEnd type="none" w="med" len="med"/>
-                    </a:lnT>
-                    <a:lnB w="12700" cap="flat" cmpd="sng" algn="ctr">
-                      <a:solidFill>
-                        <a:srgbClr val="D8E2DC"/>
-                      </a:solidFill>
-                      <a:prstDash val="solid"/>
-                      <a:round/>
-                      <a:headEnd type="none" w="med" len="med"/>
-                      <a:tailEnd type="none" w="med" len="med"/>
-                    </a:lnB>
-                    <a:solidFill>
-                      <a:srgbClr val="1E6B47"/>
-                    </a:solidFill>
-                  </a:tcPr>
-                </a:tc>
-                <a:tc>
-                  <a:txBody>
-                    <a:bodyPr/>
-                    <a:lstStyle/>
-                    <a:p>
-                      <a:pPr indent="0" marL="0">
-                        <a:buNone/>
-                      </a:pPr>
-                      <a:r>
-                        <a:rPr lang="en-US" sz="1400" b="1" dirty="0">
-                          <a:solidFill>
-                            <a:srgbClr val="FFFFFF"/>
-                          </a:solidFill>
-                          <a:latin typeface="Arial" pitchFamily="34" charset="0"/>
-                          <a:ea typeface="Arial" pitchFamily="34" charset="-122"/>
-                          <a:cs typeface="Arial" pitchFamily="34" charset="-120"/>
-                        </a:rPr>
-                        <a:t>Вопрос</a:t>
-                      </a:r>
-                      <a:endParaRPr lang="en-US" sz="1400" dirty="0">
-                        <a:latin typeface="Arial" charset="0"/>
-                        <a:ea typeface="Arial" charset="0"/>
-                        <a:cs typeface="Arial" charset="0"/>
-                      </a:endParaRPr>
-                    </a:p>
-                  </a:txBody>
-                  <a:tcPr marL="73152" marR="73152" marT="73152" marB="73152" anchor="ctr">
-                    <a:lnL w="12700" cap="flat" cmpd="sng" algn="ctr">
-                      <a:solidFill>
-                        <a:srgbClr val="D8E2DC"/>
-                      </a:solidFill>
-                      <a:prstDash val="solid"/>
-                      <a:round/>
-                      <a:headEnd type="none" w="med" len="med"/>
-                      <a:tailEnd type="none" w="med" len="med"/>
-                    </a:lnL>
-                    <a:lnR w="12700" cap="flat" cmpd="sng" algn="ctr">
-                      <a:solidFill>
-                        <a:srgbClr val="D8E2DC"/>
-                      </a:solidFill>
-                      <a:prstDash val="solid"/>
-                      <a:round/>
-                      <a:headEnd type="none" w="med" len="med"/>
-                      <a:tailEnd type="none" w="med" len="med"/>
-                    </a:lnR>
-                    <a:lnT w="12700" cap="flat" cmpd="sng" algn="ctr">
-                      <a:solidFill>
-                        <a:srgbClr val="D8E2DC"/>
-                      </a:solidFill>
-                      <a:prstDash val="solid"/>
-                      <a:round/>
-                      <a:headEnd type="none" w="med" len="med"/>
-                      <a:tailEnd type="none" w="med" len="med"/>
-                    </a:lnT>
-                    <a:lnB w="12700" cap="flat" cmpd="sng" algn="ctr">
-                      <a:solidFill>
-                        <a:srgbClr val="D8E2DC"/>
-                      </a:solidFill>
-                      <a:prstDash val="solid"/>
-                      <a:round/>
-                      <a:headEnd type="none" w="med" len="med"/>
-                      <a:tailEnd type="none" w="med" len="med"/>
-                    </a:lnB>
-                    <a:solidFill>
-                      <a:srgbClr val="1E6B47"/>
-                    </a:solidFill>
-                  </a:tcPr>
-                </a:tc>
-                <a:tc>
-                  <a:txBody>
-                    <a:bodyPr/>
-                    <a:lstStyle/>
-                    <a:p>
-                      <a:pPr indent="0" marL="0">
-                        <a:buNone/>
-                      </a:pPr>
-                      <a:r>
-                        <a:rPr lang="en-US" sz="1400" b="1" dirty="0">
-                          <a:solidFill>
-                            <a:srgbClr val="FFFFFF"/>
-                          </a:solidFill>
-                          <a:latin typeface="Arial" pitchFamily="34" charset="0"/>
-                          <a:ea typeface="Arial" pitchFamily="34" charset="-122"/>
-                          <a:cs typeface="Arial" pitchFamily="34" charset="-120"/>
-                        </a:rPr>
-                        <a:t>Артефакт</a:t>
-                      </a:r>
-                      <a:endParaRPr lang="en-US" sz="1400" dirty="0">
-                        <a:latin typeface="Arial" charset="0"/>
-                        <a:ea typeface="Arial" charset="0"/>
-                        <a:cs typeface="Arial" charset="0"/>
-                      </a:endParaRPr>
-                    </a:p>
-                  </a:txBody>
-                  <a:tcPr marL="73152" marR="73152" marT="73152" marB="73152" anchor="ctr">
-                    <a:lnL w="12700" cap="flat" cmpd="sng" algn="ctr">
-                      <a:solidFill>
-                        <a:srgbClr val="D8E2DC"/>
-                      </a:solidFill>
-                      <a:prstDash val="solid"/>
-                      <a:round/>
-                      <a:headEnd type="none" w="med" len="med"/>
-                      <a:tailEnd type="none" w="med" len="med"/>
-                    </a:lnL>
-                    <a:lnR w="12700" cap="flat" cmpd="sng" algn="ctr">
-                      <a:solidFill>
-                        <a:srgbClr val="D8E2DC"/>
-                      </a:solidFill>
-                      <a:prstDash val="solid"/>
-                      <a:round/>
-                      <a:headEnd type="none" w="med" len="med"/>
-                      <a:tailEnd type="none" w="med" len="med"/>
-                    </a:lnR>
-                    <a:lnT w="12700" cap="flat" cmpd="sng" algn="ctr">
-                      <a:solidFill>
-                        <a:srgbClr val="D8E2DC"/>
-                      </a:solidFill>
-                      <a:prstDash val="solid"/>
-                      <a:round/>
-                      <a:headEnd type="none" w="med" len="med"/>
-                      <a:tailEnd type="none" w="med" len="med"/>
-                    </a:lnT>
-                    <a:lnB w="12700" cap="flat" cmpd="sng" algn="ctr">
-                      <a:solidFill>
-                        <a:srgbClr val="D8E2DC"/>
-                      </a:solidFill>
-                      <a:prstDash val="solid"/>
-                      <a:round/>
-                      <a:headEnd type="none" w="med" len="med"/>
-                      <a:tailEnd type="none" w="med" len="med"/>
-                    </a:lnB>
-                    <a:solidFill>
-                      <a:srgbClr val="1E6B47"/>
-                    </a:solidFill>
-                  </a:tcPr>
-                </a:tc>
-                <a:tc>
-                  <a:txBody>
-                    <a:bodyPr/>
-                    <a:lstStyle/>
-                    <a:p>
-                      <a:pPr indent="0" marL="0">
-                        <a:buNone/>
-                      </a:pPr>
-                      <a:r>
-                        <a:rPr lang="en-US" sz="1400" b="1" dirty="0">
-                          <a:solidFill>
-                            <a:srgbClr val="FFFFFF"/>
-                          </a:solidFill>
-                          <a:latin typeface="Arial" pitchFamily="34" charset="0"/>
-                          <a:ea typeface="Arial" pitchFamily="34" charset="-122"/>
-                          <a:cs typeface="Arial" pitchFamily="34" charset="-120"/>
-                        </a:rPr>
-                        <a:t>Ошибка новичка</a:t>
-                      </a:r>
-                      <a:endParaRPr lang="en-US" sz="1400" dirty="0">
-                        <a:latin typeface="Arial" charset="0"/>
-                        <a:ea typeface="Arial" charset="0"/>
-                        <a:cs typeface="Arial" charset="0"/>
-                      </a:endParaRPr>
-                    </a:p>
-                  </a:txBody>
-                  <a:tcPr marL="73152" marR="73152" marT="73152" marB="73152" anchor="ctr">
-                    <a:lnL w="12700" cap="flat" cmpd="sng" algn="ctr">
-                      <a:solidFill>
-                        <a:srgbClr val="D8E2DC"/>
-                      </a:solidFill>
-                      <a:prstDash val="solid"/>
-                      <a:round/>
-                      <a:headEnd type="none" w="med" len="med"/>
-                      <a:tailEnd type="none" w="med" len="med"/>
-                    </a:lnL>
-                    <a:lnR w="12700" cap="flat" cmpd="sng" algn="ctr">
-                      <a:solidFill>
-                        <a:srgbClr val="D8E2DC"/>
-                      </a:solidFill>
-                      <a:prstDash val="solid"/>
-                      <a:round/>
-                      <a:headEnd type="none" w="med" len="med"/>
-                      <a:tailEnd type="none" w="med" len="med"/>
-                    </a:lnR>
-                    <a:lnT w="12700" cap="flat" cmpd="sng" algn="ctr">
-                      <a:solidFill>
-                        <a:srgbClr val="D8E2DC"/>
-                      </a:solidFill>
-                      <a:prstDash val="solid"/>
-                      <a:round/>
-                      <a:headEnd type="none" w="med" len="med"/>
-                      <a:tailEnd type="none" w="med" len="med"/>
-                    </a:lnT>
-                    <a:lnB w="12700" cap="flat" cmpd="sng" algn="ctr">
-                      <a:solidFill>
-                        <a:srgbClr val="D8E2DC"/>
-                      </a:solidFill>
-                      <a:prstDash val="solid"/>
-                      <a:round/>
-                      <a:headEnd type="none" w="med" len="med"/>
-                      <a:tailEnd type="none" w="med" len="med"/>
-                    </a:lnB>
-                    <a:solidFill>
-                      <a:srgbClr val="1E6B47"/>
-                    </a:solidFill>
-                  </a:tcPr>
-                </a:tc>
-              </a:tr>
-              <a:tr h="603504">
-                <a:tc>
-                  <a:txBody>
-                    <a:bodyPr/>
-                    <a:lstStyle/>
-                    <a:p>
-                      <a:pPr indent="0" marL="0">
-                        <a:buNone/>
-                      </a:pPr>
-                      <a:r>
-                        <a:rPr lang="en-US" sz="1400" dirty="0">
-                          <a:solidFill>
-                            <a:srgbClr val="1A2420"/>
-                          </a:solidFill>
-                          <a:latin typeface="Arial" pitchFamily="34" charset="0"/>
-                          <a:ea typeface="Arial" pitchFamily="34" charset="-122"/>
-                          <a:cs typeface="Arial" pitchFamily="34" charset="-120"/>
-                        </a:rPr>
-                        <a:t>Дашборд</a:t>
-                      </a:r>
-                      <a:endParaRPr lang="en-US" sz="1400" dirty="0">
-                        <a:latin typeface="Arial" charset="0"/>
-                        <a:ea typeface="Arial" charset="0"/>
-                        <a:cs typeface="Arial" charset="0"/>
-                      </a:endParaRPr>
-                    </a:p>
-                  </a:txBody>
-                  <a:tcPr marL="73152" marR="73152" marT="73152" marB="73152" anchor="ctr">
-                    <a:lnL w="12700" cap="flat" cmpd="sng" algn="ctr">
-                      <a:solidFill>
-                        <a:srgbClr val="D8E2DC"/>
-                      </a:solidFill>
-                      <a:prstDash val="solid"/>
-                      <a:round/>
-                      <a:headEnd type="none" w="med" len="med"/>
-                      <a:tailEnd type="none" w="med" len="med"/>
-                    </a:lnL>
-                    <a:lnR w="12700" cap="flat" cmpd="sng" algn="ctr">
-                      <a:solidFill>
-                        <a:srgbClr val="D8E2DC"/>
-                      </a:solidFill>
-                      <a:prstDash val="solid"/>
-                      <a:round/>
-                      <a:headEnd type="none" w="med" len="med"/>
-                      <a:tailEnd type="none" w="med" len="med"/>
-                    </a:lnR>
-                    <a:lnT w="12700" cap="flat" cmpd="sng" algn="ctr">
-                      <a:solidFill>
-                        <a:srgbClr val="D8E2DC"/>
-                      </a:solidFill>
-                      <a:prstDash val="solid"/>
-                      <a:round/>
-                      <a:headEnd type="none" w="med" len="med"/>
-                      <a:tailEnd type="none" w="med" len="med"/>
-                    </a:lnT>
-                    <a:lnB w="12700" cap="flat" cmpd="sng" algn="ctr">
-                      <a:solidFill>
-                        <a:srgbClr val="D8E2DC"/>
-                      </a:solidFill>
-                      <a:prstDash val="solid"/>
-                      <a:round/>
-                      <a:headEnd type="none" w="med" len="med"/>
-                      <a:tailEnd type="none" w="med" len="med"/>
-                    </a:lnB>
-                    <a:solidFill>
-                      <a:srgbClr val="FFFFFF"/>
-                    </a:solidFill>
-                  </a:tcPr>
-                </a:tc>
-                <a:tc>
-                  <a:txBody>
-                    <a:bodyPr/>
-                    <a:lstStyle/>
-                    <a:p>
-                      <a:pPr indent="0" marL="0">
-                        <a:buNone/>
-                      </a:pPr>
-                      <a:r>
-                        <a:rPr lang="en-US" sz="1400" dirty="0">
-                          <a:solidFill>
-                            <a:srgbClr val="1A2420"/>
-                          </a:solidFill>
-                          <a:latin typeface="Arial" pitchFamily="34" charset="0"/>
-                          <a:ea typeface="Arial" pitchFamily="34" charset="-122"/>
-                          <a:cs typeface="Arial" pitchFamily="34" charset="-120"/>
-                        </a:rPr>
-                        <a:t>как дела?</a:t>
-                      </a:r>
-                      <a:endParaRPr lang="en-US" sz="1400" dirty="0">
-                        <a:latin typeface="Arial" charset="0"/>
-                        <a:ea typeface="Arial" charset="0"/>
-                        <a:cs typeface="Arial" charset="0"/>
-                      </a:endParaRPr>
-                    </a:p>
-                  </a:txBody>
-                  <a:tcPr marL="73152" marR="73152" marT="73152" marB="73152" anchor="ctr">
-                    <a:lnL w="12700" cap="flat" cmpd="sng" algn="ctr">
-                      <a:solidFill>
-                        <a:srgbClr val="D8E2DC"/>
-                      </a:solidFill>
-                      <a:prstDash val="solid"/>
-                      <a:round/>
-                      <a:headEnd type="none" w="med" len="med"/>
-                      <a:tailEnd type="none" w="med" len="med"/>
-                    </a:lnL>
-                    <a:lnR w="12700" cap="flat" cmpd="sng" algn="ctr">
-                      <a:solidFill>
-                        <a:srgbClr val="D8E2DC"/>
-                      </a:solidFill>
-                      <a:prstDash val="solid"/>
-                      <a:round/>
-                      <a:headEnd type="none" w="med" len="med"/>
-                      <a:tailEnd type="none" w="med" len="med"/>
-                    </a:lnR>
-                    <a:lnT w="12700" cap="flat" cmpd="sng" algn="ctr">
-                      <a:solidFill>
-                        <a:srgbClr val="D8E2DC"/>
-                      </a:solidFill>
-                      <a:prstDash val="solid"/>
-                      <a:round/>
-                      <a:headEnd type="none" w="med" len="med"/>
-                      <a:tailEnd type="none" w="med" len="med"/>
-                    </a:lnT>
-                    <a:lnB w="12700" cap="flat" cmpd="sng" algn="ctr">
-                      <a:solidFill>
-                        <a:srgbClr val="D8E2DC"/>
-                      </a:solidFill>
-                      <a:prstDash val="solid"/>
-                      <a:round/>
-                      <a:headEnd type="none" w="med" len="med"/>
-                      <a:tailEnd type="none" w="med" len="med"/>
-                    </a:lnB>
-                    <a:solidFill>
-                      <a:srgbClr val="FFFFFF"/>
-                    </a:solidFill>
-                  </a:tcPr>
-                </a:tc>
-                <a:tc>
-                  <a:txBody>
-                    <a:bodyPr/>
-                    <a:lstStyle/>
-                    <a:p>
-                      <a:pPr indent="0" marL="0">
-                        <a:buNone/>
-                      </a:pPr>
-                      <a:r>
-                        <a:rPr lang="en-US" sz="1400" dirty="0">
-                          <a:solidFill>
-                            <a:srgbClr val="1A2420"/>
-                          </a:solidFill>
-                          <a:latin typeface="Arial" pitchFamily="34" charset="0"/>
-                          <a:ea typeface="Arial" pitchFamily="34" charset="-122"/>
-                          <a:cs typeface="Arial" pitchFamily="34" charset="-120"/>
-                        </a:rPr>
-                        <a:t>витрина + графики</a:t>
-                      </a:r>
-                      <a:endParaRPr lang="en-US" sz="1400" dirty="0">
-                        <a:latin typeface="Arial" charset="0"/>
-                        <a:ea typeface="Arial" charset="0"/>
-                        <a:cs typeface="Arial" charset="0"/>
-                      </a:endParaRPr>
-                    </a:p>
-                  </a:txBody>
-                  <a:tcPr marL="73152" marR="73152" marT="73152" marB="73152" anchor="ctr">
-                    <a:lnL w="12700" cap="flat" cmpd="sng" algn="ctr">
-                      <a:solidFill>
-                        <a:srgbClr val="D8E2DC"/>
-                      </a:solidFill>
-                      <a:prstDash val="solid"/>
-                      <a:round/>
-                      <a:headEnd type="none" w="med" len="med"/>
-                      <a:tailEnd type="none" w="med" len="med"/>
-                    </a:lnL>
-                    <a:lnR w="12700" cap="flat" cmpd="sng" algn="ctr">
-                      <a:solidFill>
-                        <a:srgbClr val="D8E2DC"/>
-                      </a:solidFill>
-                      <a:prstDash val="solid"/>
-                      <a:round/>
-                      <a:headEnd type="none" w="med" len="med"/>
-                      <a:tailEnd type="none" w="med" len="med"/>
-                    </a:lnR>
-                    <a:lnT w="12700" cap="flat" cmpd="sng" algn="ctr">
-                      <a:solidFill>
-                        <a:srgbClr val="D8E2DC"/>
-                      </a:solidFill>
-                      <a:prstDash val="solid"/>
-                      <a:round/>
-                      <a:headEnd type="none" w="med" len="med"/>
-                      <a:tailEnd type="none" w="med" len="med"/>
-                    </a:lnT>
-                    <a:lnB w="12700" cap="flat" cmpd="sng" algn="ctr">
-                      <a:solidFill>
-                        <a:srgbClr val="D8E2DC"/>
-                      </a:solidFill>
-                      <a:prstDash val="solid"/>
-                      <a:round/>
-                      <a:headEnd type="none" w="med" len="med"/>
-                      <a:tailEnd type="none" w="med" len="med"/>
-                    </a:lnB>
-                    <a:solidFill>
-                      <a:srgbClr val="FFFFFF"/>
-                    </a:solidFill>
-                  </a:tcPr>
-                </a:tc>
-                <a:tc>
-                  <a:txBody>
-                    <a:bodyPr/>
-                    <a:lstStyle/>
-                    <a:p>
-                      <a:pPr indent="0" marL="0">
-                        <a:buNone/>
-                      </a:pPr>
-                      <a:r>
-                        <a:rPr lang="en-US" sz="1400" dirty="0">
-                          <a:solidFill>
-                            <a:srgbClr val="1A2420"/>
-                          </a:solidFill>
-                          <a:latin typeface="Arial" pitchFamily="34" charset="0"/>
-                          <a:ea typeface="Arial" pitchFamily="34" charset="-122"/>
-                          <a:cs typeface="Arial" pitchFamily="34" charset="-120"/>
-                        </a:rPr>
-                        <a:t>мониторить всё подряд</a:t>
-                      </a:r>
-                      <a:endParaRPr lang="en-US" sz="1400" dirty="0">
-                        <a:latin typeface="Arial" charset="0"/>
-                        <a:ea typeface="Arial" charset="0"/>
-                        <a:cs typeface="Arial" charset="0"/>
-                      </a:endParaRPr>
-                    </a:p>
-                  </a:txBody>
-                  <a:tcPr marL="73152" marR="73152" marT="73152" marB="73152" anchor="ctr">
-                    <a:lnL w="12700" cap="flat" cmpd="sng" algn="ctr">
-                      <a:solidFill>
-                        <a:srgbClr val="D8E2DC"/>
-                      </a:solidFill>
-                      <a:prstDash val="solid"/>
-                      <a:round/>
-                      <a:headEnd type="none" w="med" len="med"/>
-                      <a:tailEnd type="none" w="med" len="med"/>
-                    </a:lnL>
-                    <a:lnR w="12700" cap="flat" cmpd="sng" algn="ctr">
-                      <a:solidFill>
-                        <a:srgbClr val="D8E2DC"/>
-                      </a:solidFill>
-                      <a:prstDash val="solid"/>
-                      <a:round/>
-                      <a:headEnd type="none" w="med" len="med"/>
-                      <a:tailEnd type="none" w="med" len="med"/>
-                    </a:lnR>
-                    <a:lnT w="12700" cap="flat" cmpd="sng" algn="ctr">
-                      <a:solidFill>
-                        <a:srgbClr val="D8E2DC"/>
-                      </a:solidFill>
-                      <a:prstDash val="solid"/>
-                      <a:round/>
-                      <a:headEnd type="none" w="med" len="med"/>
-                      <a:tailEnd type="none" w="med" len="med"/>
-                    </a:lnT>
-                    <a:lnB w="12700" cap="flat" cmpd="sng" algn="ctr">
-                      <a:solidFill>
-                        <a:srgbClr val="D8E2DC"/>
-                      </a:solidFill>
-                      <a:prstDash val="solid"/>
-                      <a:round/>
-                      <a:headEnd type="none" w="med" len="med"/>
-                      <a:tailEnd type="none" w="med" len="med"/>
-                    </a:lnB>
-                    <a:solidFill>
-                      <a:srgbClr val="FFFFFF"/>
-                    </a:solidFill>
-                  </a:tcPr>
-                </a:tc>
-              </a:tr>
-              <a:tr h="603504">
-                <a:tc>
-                  <a:txBody>
-                    <a:bodyPr/>
-                    <a:lstStyle/>
-                    <a:p>
-                      <a:pPr indent="0" marL="0">
-                        <a:buNone/>
-                      </a:pPr>
-                      <a:r>
-                        <a:rPr lang="en-US" sz="1400" dirty="0">
-                          <a:solidFill>
-                            <a:srgbClr val="1A2420"/>
-                          </a:solidFill>
-                          <a:latin typeface="Arial" pitchFamily="34" charset="0"/>
-                          <a:ea typeface="Arial" pitchFamily="34" charset="-122"/>
-                          <a:cs typeface="Arial" pitchFamily="34" charset="-120"/>
-                        </a:rPr>
-                        <a:t>Ad-hoc</a:t>
-                      </a:r>
-                      <a:endParaRPr lang="en-US" sz="1400" dirty="0">
-                        <a:latin typeface="Arial" charset="0"/>
-                        <a:ea typeface="Arial" charset="0"/>
-                        <a:cs typeface="Arial" charset="0"/>
-                      </a:endParaRPr>
-                    </a:p>
-                  </a:txBody>
-                  <a:tcPr marL="73152" marR="73152" marT="73152" marB="73152" anchor="ctr">
-                    <a:lnL w="12700" cap="flat" cmpd="sng" algn="ctr">
-                      <a:solidFill>
-                        <a:srgbClr val="D8E2DC"/>
-                      </a:solidFill>
-                      <a:prstDash val="solid"/>
-                      <a:round/>
-                      <a:headEnd type="none" w="med" len="med"/>
-                      <a:tailEnd type="none" w="med" len="med"/>
-                    </a:lnL>
-                    <a:lnR w="12700" cap="flat" cmpd="sng" algn="ctr">
-                      <a:solidFill>
-                        <a:srgbClr val="D8E2DC"/>
-                      </a:solidFill>
-                      <a:prstDash val="solid"/>
-                      <a:round/>
-                      <a:headEnd type="none" w="med" len="med"/>
-                      <a:tailEnd type="none" w="med" len="med"/>
-                    </a:lnR>
-                    <a:lnT w="12700" cap="flat" cmpd="sng" algn="ctr">
-                      <a:solidFill>
-                        <a:srgbClr val="D8E2DC"/>
-                      </a:solidFill>
-                      <a:prstDash val="solid"/>
-                      <a:round/>
-                      <a:headEnd type="none" w="med" len="med"/>
-                      <a:tailEnd type="none" w="med" len="med"/>
-                    </a:lnT>
-                    <a:lnB w="12700" cap="flat" cmpd="sng" algn="ctr">
-                      <a:solidFill>
-                        <a:srgbClr val="D8E2DC"/>
-                      </a:solidFill>
-                      <a:prstDash val="solid"/>
-                      <a:round/>
-                      <a:headEnd type="none" w="med" len="med"/>
-                      <a:tailEnd type="none" w="med" len="med"/>
-                    </a:lnB>
-                    <a:solidFill>
-                      <a:srgbClr val="EDF4EF"/>
-                    </a:solidFill>
-                  </a:tcPr>
-                </a:tc>
-                <a:tc>
-                  <a:txBody>
-                    <a:bodyPr/>
-                    <a:lstStyle/>
-                    <a:p>
-                      <a:pPr indent="0" marL="0">
-                        <a:buNone/>
-                      </a:pPr>
-                      <a:r>
-                        <a:rPr lang="en-US" sz="1400" dirty="0">
-                          <a:solidFill>
-                            <a:srgbClr val="1A2420"/>
-                          </a:solidFill>
-                          <a:latin typeface="Arial" pitchFamily="34" charset="0"/>
-                          <a:ea typeface="Arial" pitchFamily="34" charset="-122"/>
-                          <a:cs typeface="Arial" pitchFamily="34" charset="-120"/>
-                        </a:rPr>
-                        <a:t>почему так вышло?</a:t>
-                      </a:r>
-                      <a:endParaRPr lang="en-US" sz="1400" dirty="0">
-                        <a:latin typeface="Arial" charset="0"/>
-                        <a:ea typeface="Arial" charset="0"/>
-                        <a:cs typeface="Arial" charset="0"/>
-                      </a:endParaRPr>
-                    </a:p>
-                  </a:txBody>
-                  <a:tcPr marL="73152" marR="73152" marT="73152" marB="73152" anchor="ctr">
-                    <a:lnL w="12700" cap="flat" cmpd="sng" algn="ctr">
-                      <a:solidFill>
-                        <a:srgbClr val="D8E2DC"/>
-                      </a:solidFill>
-                      <a:prstDash val="solid"/>
-                      <a:round/>
-                      <a:headEnd type="none" w="med" len="med"/>
-                      <a:tailEnd type="none" w="med" len="med"/>
-                    </a:lnL>
-                    <a:lnR w="12700" cap="flat" cmpd="sng" algn="ctr">
-                      <a:solidFill>
-                        <a:srgbClr val="D8E2DC"/>
-                      </a:solidFill>
-                      <a:prstDash val="solid"/>
-                      <a:round/>
-                      <a:headEnd type="none" w="med" len="med"/>
-                      <a:tailEnd type="none" w="med" len="med"/>
-                    </a:lnR>
-                    <a:lnT w="12700" cap="flat" cmpd="sng" algn="ctr">
-                      <a:solidFill>
-                        <a:srgbClr val="D8E2DC"/>
-                      </a:solidFill>
-                      <a:prstDash val="solid"/>
-                      <a:round/>
-                      <a:headEnd type="none" w="med" len="med"/>
-                      <a:tailEnd type="none" w="med" len="med"/>
-                    </a:lnT>
-                    <a:lnB w="12700" cap="flat" cmpd="sng" algn="ctr">
-                      <a:solidFill>
-                        <a:srgbClr val="D8E2DC"/>
-                      </a:solidFill>
-                      <a:prstDash val="solid"/>
-                      <a:round/>
-                      <a:headEnd type="none" w="med" len="med"/>
-                      <a:tailEnd type="none" w="med" len="med"/>
-                    </a:lnB>
-                    <a:solidFill>
-                      <a:srgbClr val="EDF4EF"/>
-                    </a:solidFill>
-                  </a:tcPr>
-                </a:tc>
-                <a:tc>
-                  <a:txBody>
-                    <a:bodyPr/>
-                    <a:lstStyle/>
-                    <a:p>
-                      <a:pPr indent="0" marL="0">
-                        <a:buNone/>
-                      </a:pPr>
-                      <a:r>
-                        <a:rPr lang="en-US" sz="1400" dirty="0">
-                          <a:solidFill>
-                            <a:srgbClr val="1A2420"/>
-                          </a:solidFill>
-                          <a:latin typeface="Arial" pitchFamily="34" charset="0"/>
-                          <a:ea typeface="Arial" pitchFamily="34" charset="-122"/>
-                          <a:cs typeface="Arial" pitchFamily="34" charset="-120"/>
-                        </a:rPr>
-                        <a:t>короткий ответ</a:t>
-                      </a:r>
-                      <a:endParaRPr lang="en-US" sz="1400" dirty="0">
-                        <a:latin typeface="Arial" charset="0"/>
-                        <a:ea typeface="Arial" charset="0"/>
-                        <a:cs typeface="Arial" charset="0"/>
-                      </a:endParaRPr>
-                    </a:p>
-                  </a:txBody>
-                  <a:tcPr marL="73152" marR="73152" marT="73152" marB="73152" anchor="ctr">
-                    <a:lnL w="12700" cap="flat" cmpd="sng" algn="ctr">
-                      <a:solidFill>
-                        <a:srgbClr val="D8E2DC"/>
-                      </a:solidFill>
-                      <a:prstDash val="solid"/>
-                      <a:round/>
-                      <a:headEnd type="none" w="med" len="med"/>
-                      <a:tailEnd type="none" w="med" len="med"/>
-                    </a:lnL>
-                    <a:lnR w="12700" cap="flat" cmpd="sng" algn="ctr">
-                      <a:solidFill>
-                        <a:srgbClr val="D8E2DC"/>
-                      </a:solidFill>
-                      <a:prstDash val="solid"/>
-                      <a:round/>
-                      <a:headEnd type="none" w="med" len="med"/>
-                      <a:tailEnd type="none" w="med" len="med"/>
-                    </a:lnR>
-                    <a:lnT w="12700" cap="flat" cmpd="sng" algn="ctr">
-                      <a:solidFill>
-                        <a:srgbClr val="D8E2DC"/>
-                      </a:solidFill>
-                      <a:prstDash val="solid"/>
-                      <a:round/>
-                      <a:headEnd type="none" w="med" len="med"/>
-                      <a:tailEnd type="none" w="med" len="med"/>
-                    </a:lnT>
-                    <a:lnB w="12700" cap="flat" cmpd="sng" algn="ctr">
-                      <a:solidFill>
-                        <a:srgbClr val="D8E2DC"/>
-                      </a:solidFill>
-                      <a:prstDash val="solid"/>
-                      <a:round/>
-                      <a:headEnd type="none" w="med" len="med"/>
-                      <a:tailEnd type="none" w="med" len="med"/>
-                    </a:lnB>
-                    <a:solidFill>
-                      <a:srgbClr val="EDF4EF"/>
-                    </a:solidFill>
-                  </a:tcPr>
-                </a:tc>
-                <a:tc>
-                  <a:txBody>
-                    <a:bodyPr/>
-                    <a:lstStyle/>
-                    <a:p>
-                      <a:pPr indent="0" marL="0">
-                        <a:buNone/>
-                      </a:pPr>
-                      <a:r>
-                        <a:rPr lang="en-US" sz="1400" dirty="0">
-                          <a:solidFill>
-                            <a:srgbClr val="1A2420"/>
-                          </a:solidFill>
-                          <a:latin typeface="Arial" pitchFamily="34" charset="0"/>
-                          <a:ea typeface="Arial" pitchFamily="34" charset="-122"/>
-                          <a:cs typeface="Arial" pitchFamily="34" charset="-120"/>
-                        </a:rPr>
-                        <a:t>ответить корреляцией</a:t>
-                      </a:r>
-                      <a:endParaRPr lang="en-US" sz="1400" dirty="0">
-                        <a:latin typeface="Arial" charset="0"/>
-                        <a:ea typeface="Arial" charset="0"/>
-                        <a:cs typeface="Arial" charset="0"/>
-                      </a:endParaRPr>
-                    </a:p>
-                  </a:txBody>
-                  <a:tcPr marL="73152" marR="73152" marT="73152" marB="73152" anchor="ctr">
-                    <a:lnL w="12700" cap="flat" cmpd="sng" algn="ctr">
-                      <a:solidFill>
-                        <a:srgbClr val="D8E2DC"/>
-                      </a:solidFill>
-                      <a:prstDash val="solid"/>
-                      <a:round/>
-                      <a:headEnd type="none" w="med" len="med"/>
-                      <a:tailEnd type="none" w="med" len="med"/>
-                    </a:lnL>
-                    <a:lnR w="12700" cap="flat" cmpd="sng" algn="ctr">
-                      <a:solidFill>
-                        <a:srgbClr val="D8E2DC"/>
-                      </a:solidFill>
-                      <a:prstDash val="solid"/>
-                      <a:round/>
-                      <a:headEnd type="none" w="med" len="med"/>
-                      <a:tailEnd type="none" w="med" len="med"/>
-                    </a:lnR>
-                    <a:lnT w="12700" cap="flat" cmpd="sng" algn="ctr">
-                      <a:solidFill>
-                        <a:srgbClr val="D8E2DC"/>
-                      </a:solidFill>
-                      <a:prstDash val="solid"/>
-                      <a:round/>
-                      <a:headEnd type="none" w="med" len="med"/>
-                      <a:tailEnd type="none" w="med" len="med"/>
-                    </a:lnT>
-                    <a:lnB w="12700" cap="flat" cmpd="sng" algn="ctr">
-                      <a:solidFill>
-                        <a:srgbClr val="D8E2DC"/>
-                      </a:solidFill>
-                      <a:prstDash val="solid"/>
-                      <a:round/>
-                      <a:headEnd type="none" w="med" len="med"/>
-                      <a:tailEnd type="none" w="med" len="med"/>
-                    </a:lnB>
-                    <a:solidFill>
-                      <a:srgbClr val="EDF4EF"/>
-                    </a:solidFill>
-                  </a:tcPr>
-                </a:tc>
-              </a:tr>
-              <a:tr h="603504">
-                <a:tc>
-                  <a:txBody>
-                    <a:bodyPr/>
-                    <a:lstStyle/>
-                    <a:p>
-                      <a:pPr indent="0" marL="0">
-                        <a:buNone/>
-                      </a:pPr>
-                      <a:r>
-                        <a:rPr lang="en-US" sz="1400" dirty="0">
-                          <a:solidFill>
-                            <a:srgbClr val="1A2420"/>
-                          </a:solidFill>
-                          <a:latin typeface="Arial" pitchFamily="34" charset="0"/>
-                          <a:ea typeface="Arial" pitchFamily="34" charset="-122"/>
-                          <a:cs typeface="Arial" pitchFamily="34" charset="-120"/>
-                        </a:rPr>
-                        <a:t>Исследование</a:t>
-                      </a:r>
-                      <a:endParaRPr lang="en-US" sz="1400" dirty="0">
-                        <a:latin typeface="Arial" charset="0"/>
-                        <a:ea typeface="Arial" charset="0"/>
-                        <a:cs typeface="Arial" charset="0"/>
-                      </a:endParaRPr>
-                    </a:p>
-                  </a:txBody>
-                  <a:tcPr marL="73152" marR="73152" marT="73152" marB="73152" anchor="ctr">
-                    <a:lnL w="12700" cap="flat" cmpd="sng" algn="ctr">
-                      <a:solidFill>
-                        <a:srgbClr val="D8E2DC"/>
-                      </a:solidFill>
-                      <a:prstDash val="solid"/>
-                      <a:round/>
-                      <a:headEnd type="none" w="med" len="med"/>
-                      <a:tailEnd type="none" w="med" len="med"/>
-                    </a:lnL>
-                    <a:lnR w="12700" cap="flat" cmpd="sng" algn="ctr">
-                      <a:solidFill>
-                        <a:srgbClr val="D8E2DC"/>
-                      </a:solidFill>
-                      <a:prstDash val="solid"/>
-                      <a:round/>
-                      <a:headEnd type="none" w="med" len="med"/>
-                      <a:tailEnd type="none" w="med" len="med"/>
-                    </a:lnR>
-                    <a:lnT w="12700" cap="flat" cmpd="sng" algn="ctr">
-                      <a:solidFill>
-                        <a:srgbClr val="D8E2DC"/>
-                      </a:solidFill>
-                      <a:prstDash val="solid"/>
-                      <a:round/>
-                      <a:headEnd type="none" w="med" len="med"/>
-                      <a:tailEnd type="none" w="med" len="med"/>
-                    </a:lnT>
-                    <a:lnB w="12700" cap="flat" cmpd="sng" algn="ctr">
-                      <a:solidFill>
-                        <a:srgbClr val="D8E2DC"/>
-                      </a:solidFill>
-                      <a:prstDash val="solid"/>
-                      <a:round/>
-                      <a:headEnd type="none" w="med" len="med"/>
-                      <a:tailEnd type="none" w="med" len="med"/>
-                    </a:lnB>
-                    <a:solidFill>
-                      <a:srgbClr val="FFFFFF"/>
-                    </a:solidFill>
-                  </a:tcPr>
-                </a:tc>
-                <a:tc>
-                  <a:txBody>
-                    <a:bodyPr/>
-                    <a:lstStyle/>
-                    <a:p>
-                      <a:pPr indent="0" marL="0">
-                        <a:buNone/>
-                      </a:pPr>
-                      <a:r>
-                        <a:rPr lang="en-US" sz="1400" dirty="0">
-                          <a:solidFill>
-                            <a:srgbClr val="1A2420"/>
-                          </a:solidFill>
-                          <a:latin typeface="Arial" pitchFamily="34" charset="0"/>
-                          <a:ea typeface="Arial" pitchFamily="34" charset="-122"/>
-                          <a:cs typeface="Arial" pitchFamily="34" charset="-120"/>
-                        </a:rPr>
-                        <a:t>как устроено?</a:t>
-                      </a:r>
-                      <a:endParaRPr lang="en-US" sz="1400" dirty="0">
-                        <a:latin typeface="Arial" charset="0"/>
-                        <a:ea typeface="Arial" charset="0"/>
-                        <a:cs typeface="Arial" charset="0"/>
-                      </a:endParaRPr>
-                    </a:p>
-                  </a:txBody>
-                  <a:tcPr marL="73152" marR="73152" marT="73152" marB="73152" anchor="ctr">
-                    <a:lnL w="12700" cap="flat" cmpd="sng" algn="ctr">
-                      <a:solidFill>
-                        <a:srgbClr val="D8E2DC"/>
-                      </a:solidFill>
-                      <a:prstDash val="solid"/>
-                      <a:round/>
-                      <a:headEnd type="none" w="med" len="med"/>
-                      <a:tailEnd type="none" w="med" len="med"/>
-                    </a:lnL>
-                    <a:lnR w="12700" cap="flat" cmpd="sng" algn="ctr">
-                      <a:solidFill>
-                        <a:srgbClr val="D8E2DC"/>
-                      </a:solidFill>
-                      <a:prstDash val="solid"/>
-                      <a:round/>
-                      <a:headEnd type="none" w="med" len="med"/>
-                      <a:tailEnd type="none" w="med" len="med"/>
-                    </a:lnR>
-                    <a:lnT w="12700" cap="flat" cmpd="sng" algn="ctr">
-                      <a:solidFill>
-                        <a:srgbClr val="D8E2DC"/>
-                      </a:solidFill>
-                      <a:prstDash val="solid"/>
-                      <a:round/>
-                      <a:headEnd type="none" w="med" len="med"/>
-                      <a:tailEnd type="none" w="med" len="med"/>
-                    </a:lnT>
-                    <a:lnB w="12700" cap="flat" cmpd="sng" algn="ctr">
-                      <a:solidFill>
-                        <a:srgbClr val="D8E2DC"/>
-                      </a:solidFill>
-                      <a:prstDash val="solid"/>
-                      <a:round/>
-                      <a:headEnd type="none" w="med" len="med"/>
-                      <a:tailEnd type="none" w="med" len="med"/>
-                    </a:lnB>
-                    <a:solidFill>
-                      <a:srgbClr val="FFFFFF"/>
-                    </a:solidFill>
-                  </a:tcPr>
-                </a:tc>
-                <a:tc>
-                  <a:txBody>
-                    <a:bodyPr/>
-                    <a:lstStyle/>
-                    <a:p>
-                      <a:pPr indent="0" marL="0">
-                        <a:buNone/>
-                      </a:pPr>
-                      <a:r>
-                        <a:rPr lang="en-US" sz="1400" dirty="0">
-                          <a:solidFill>
-                            <a:srgbClr val="1A2420"/>
-                          </a:solidFill>
-                          <a:latin typeface="Arial" pitchFamily="34" charset="0"/>
-                          <a:ea typeface="Arial" pitchFamily="34" charset="-122"/>
-                          <a:cs typeface="Arial" pitchFamily="34" charset="-120"/>
-                        </a:rPr>
-                        <a:t>инсайт + рекомендации</a:t>
-                      </a:r>
-                      <a:endParaRPr lang="en-US" sz="1400" dirty="0">
-                        <a:latin typeface="Arial" charset="0"/>
-                        <a:ea typeface="Arial" charset="0"/>
-                        <a:cs typeface="Arial" charset="0"/>
-                      </a:endParaRPr>
-                    </a:p>
-                  </a:txBody>
-                  <a:tcPr marL="73152" marR="73152" marT="73152" marB="73152" anchor="ctr">
-                    <a:lnL w="12700" cap="flat" cmpd="sng" algn="ctr">
-                      <a:solidFill>
-                        <a:srgbClr val="D8E2DC"/>
-                      </a:solidFill>
-                      <a:prstDash val="solid"/>
-                      <a:round/>
-                      <a:headEnd type="none" w="med" len="med"/>
-                      <a:tailEnd type="none" w="med" len="med"/>
-                    </a:lnL>
-                    <a:lnR w="12700" cap="flat" cmpd="sng" algn="ctr">
-                      <a:solidFill>
-                        <a:srgbClr val="D8E2DC"/>
-                      </a:solidFill>
-                      <a:prstDash val="solid"/>
-                      <a:round/>
-                      <a:headEnd type="none" w="med" len="med"/>
-                      <a:tailEnd type="none" w="med" len="med"/>
-                    </a:lnR>
-                    <a:lnT w="12700" cap="flat" cmpd="sng" algn="ctr">
-                      <a:solidFill>
-                        <a:srgbClr val="D8E2DC"/>
-                      </a:solidFill>
-                      <a:prstDash val="solid"/>
-                      <a:round/>
-                      <a:headEnd type="none" w="med" len="med"/>
-                      <a:tailEnd type="none" w="med" len="med"/>
-                    </a:lnT>
-                    <a:lnB w="12700" cap="flat" cmpd="sng" algn="ctr">
-                      <a:solidFill>
-                        <a:srgbClr val="D8E2DC"/>
-                      </a:solidFill>
-                      <a:prstDash val="solid"/>
-                      <a:round/>
-                      <a:headEnd type="none" w="med" len="med"/>
-                      <a:tailEnd type="none" w="med" len="med"/>
-                    </a:lnB>
-                    <a:solidFill>
-                      <a:srgbClr val="FFFFFF"/>
-                    </a:solidFill>
-                  </a:tcPr>
-                </a:tc>
-                <a:tc>
-                  <a:txBody>
-                    <a:bodyPr/>
-                    <a:lstStyle/>
-                    <a:p>
-                      <a:pPr indent="0" marL="0">
-                        <a:buNone/>
-                      </a:pPr>
-                      <a:r>
-                        <a:rPr lang="en-US" sz="1400" dirty="0">
-                          <a:solidFill>
-                            <a:srgbClr val="1A2420"/>
-                          </a:solidFill>
-                          <a:latin typeface="Arial" pitchFamily="34" charset="0"/>
-                          <a:ea typeface="Arial" pitchFamily="34" charset="-122"/>
-                          <a:cs typeface="Arial" pitchFamily="34" charset="-120"/>
-                        </a:rPr>
-                        <a:t>копать без связи с решением</a:t>
-                      </a:r>
-                      <a:endParaRPr lang="en-US" sz="1400" dirty="0">
-                        <a:latin typeface="Arial" charset="0"/>
-                        <a:ea typeface="Arial" charset="0"/>
-                        <a:cs typeface="Arial" charset="0"/>
-                      </a:endParaRPr>
-                    </a:p>
-                  </a:txBody>
-                  <a:tcPr marL="73152" marR="73152" marT="73152" marB="73152" anchor="ctr">
-                    <a:lnL w="12700" cap="flat" cmpd="sng" algn="ctr">
-                      <a:solidFill>
-                        <a:srgbClr val="D8E2DC"/>
-                      </a:solidFill>
-                      <a:prstDash val="solid"/>
-                      <a:round/>
-                      <a:headEnd type="none" w="med" len="med"/>
-                      <a:tailEnd type="none" w="med" len="med"/>
-                    </a:lnL>
-                    <a:lnR w="12700" cap="flat" cmpd="sng" algn="ctr">
-                      <a:solidFill>
-                        <a:srgbClr val="D8E2DC"/>
-                      </a:solidFill>
-                      <a:prstDash val="solid"/>
-                      <a:round/>
-                      <a:headEnd type="none" w="med" len="med"/>
-                      <a:tailEnd type="none" w="med" len="med"/>
-                    </a:lnR>
-                    <a:lnT w="12700" cap="flat" cmpd="sng" algn="ctr">
-                      <a:solidFill>
-                        <a:srgbClr val="D8E2DC"/>
-                      </a:solidFill>
-                      <a:prstDash val="solid"/>
-                      <a:round/>
-                      <a:headEnd type="none" w="med" len="med"/>
-                      <a:tailEnd type="none" w="med" len="med"/>
-                    </a:lnT>
-                    <a:lnB w="12700" cap="flat" cmpd="sng" algn="ctr">
-                      <a:solidFill>
-                        <a:srgbClr val="D8E2DC"/>
-                      </a:solidFill>
-                      <a:prstDash val="solid"/>
-                      <a:round/>
-                      <a:headEnd type="none" w="med" len="med"/>
-                      <a:tailEnd type="none" w="med" len="med"/>
-                    </a:lnB>
-                    <a:solidFill>
-                      <a:srgbClr val="FFFFFF"/>
-                    </a:solidFill>
-                  </a:tcPr>
-                </a:tc>
-              </a:tr>
-              <a:tr h="603504">
-                <a:tc>
-                  <a:txBody>
-                    <a:bodyPr/>
-                    <a:lstStyle/>
-                    <a:p>
-                      <a:pPr indent="0" marL="0">
-                        <a:buNone/>
-                      </a:pPr>
-                      <a:r>
-                        <a:rPr lang="en-US" sz="1400" dirty="0">
-                          <a:solidFill>
-                            <a:srgbClr val="1A2420"/>
-                          </a:solidFill>
-                          <a:latin typeface="Arial" pitchFamily="34" charset="0"/>
-                          <a:ea typeface="Arial" pitchFamily="34" charset="-122"/>
-                          <a:cs typeface="Arial" pitchFamily="34" charset="-120"/>
-                        </a:rPr>
-                        <a:t>Эксперимент</a:t>
-                      </a:r>
-                      <a:endParaRPr lang="en-US" sz="1400" dirty="0">
-                        <a:latin typeface="Arial" charset="0"/>
-                        <a:ea typeface="Arial" charset="0"/>
-                        <a:cs typeface="Arial" charset="0"/>
-                      </a:endParaRPr>
-                    </a:p>
-                  </a:txBody>
-                  <a:tcPr marL="73152" marR="73152" marT="73152" marB="73152" anchor="ctr">
-                    <a:lnL w="12700" cap="flat" cmpd="sng" algn="ctr">
-                      <a:solidFill>
-                        <a:srgbClr val="D8E2DC"/>
-                      </a:solidFill>
-                      <a:prstDash val="solid"/>
-                      <a:round/>
-                      <a:headEnd type="none" w="med" len="med"/>
-                      <a:tailEnd type="none" w="med" len="med"/>
-                    </a:lnL>
-                    <a:lnR w="12700" cap="flat" cmpd="sng" algn="ctr">
-                      <a:solidFill>
-                        <a:srgbClr val="D8E2DC"/>
-                      </a:solidFill>
-                      <a:prstDash val="solid"/>
-                      <a:round/>
-                      <a:headEnd type="none" w="med" len="med"/>
-                      <a:tailEnd type="none" w="med" len="med"/>
-                    </a:lnR>
-                    <a:lnT w="12700" cap="flat" cmpd="sng" algn="ctr">
-                      <a:solidFill>
-                        <a:srgbClr val="D8E2DC"/>
-                      </a:solidFill>
-                      <a:prstDash val="solid"/>
-                      <a:round/>
-                      <a:headEnd type="none" w="med" len="med"/>
-                      <a:tailEnd type="none" w="med" len="med"/>
-                    </a:lnT>
-                    <a:lnB w="12700" cap="flat" cmpd="sng" algn="ctr">
-                      <a:solidFill>
-                        <a:srgbClr val="D8E2DC"/>
-                      </a:solidFill>
-                      <a:prstDash val="solid"/>
-                      <a:round/>
-                      <a:headEnd type="none" w="med" len="med"/>
-                      <a:tailEnd type="none" w="med" len="med"/>
-                    </a:lnB>
-                    <a:solidFill>
-                      <a:srgbClr val="EDF4EF"/>
-                    </a:solidFill>
-                  </a:tcPr>
-                </a:tc>
-                <a:tc>
-                  <a:txBody>
-                    <a:bodyPr/>
-                    <a:lstStyle/>
-                    <a:p>
-                      <a:pPr indent="0" marL="0">
-                        <a:buNone/>
-                      </a:pPr>
-                      <a:r>
-                        <a:rPr lang="en-US" sz="1400" dirty="0">
-                          <a:solidFill>
-                            <a:srgbClr val="1A2420"/>
-                          </a:solidFill>
-                          <a:latin typeface="Arial" pitchFamily="34" charset="0"/>
-                          <a:ea typeface="Arial" pitchFamily="34" charset="-122"/>
-                          <a:cs typeface="Arial" pitchFamily="34" charset="-120"/>
-                        </a:rPr>
-                        <a:t>что изменит X?</a:t>
-                      </a:r>
-                      <a:endParaRPr lang="en-US" sz="1400" dirty="0">
-                        <a:latin typeface="Arial" charset="0"/>
-                        <a:ea typeface="Arial" charset="0"/>
-                        <a:cs typeface="Arial" charset="0"/>
-                      </a:endParaRPr>
-                    </a:p>
-                  </a:txBody>
-                  <a:tcPr marL="73152" marR="73152" marT="73152" marB="73152" anchor="ctr">
-                    <a:lnL w="12700" cap="flat" cmpd="sng" algn="ctr">
-                      <a:solidFill>
-                        <a:srgbClr val="D8E2DC"/>
-                      </a:solidFill>
-                      <a:prstDash val="solid"/>
-                      <a:round/>
-                      <a:headEnd type="none" w="med" len="med"/>
-                      <a:tailEnd type="none" w="med" len="med"/>
-                    </a:lnL>
-                    <a:lnR w="12700" cap="flat" cmpd="sng" algn="ctr">
-                      <a:solidFill>
-                        <a:srgbClr val="D8E2DC"/>
-                      </a:solidFill>
-                      <a:prstDash val="solid"/>
-                      <a:round/>
-                      <a:headEnd type="none" w="med" len="med"/>
-                      <a:tailEnd type="none" w="med" len="med"/>
-                    </a:lnR>
-                    <a:lnT w="12700" cap="flat" cmpd="sng" algn="ctr">
-                      <a:solidFill>
-                        <a:srgbClr val="D8E2DC"/>
-                      </a:solidFill>
-                      <a:prstDash val="solid"/>
-                      <a:round/>
-                      <a:headEnd type="none" w="med" len="med"/>
-                      <a:tailEnd type="none" w="med" len="med"/>
-                    </a:lnT>
-                    <a:lnB w="12700" cap="flat" cmpd="sng" algn="ctr">
-                      <a:solidFill>
-                        <a:srgbClr val="D8E2DC"/>
-                      </a:solidFill>
-                      <a:prstDash val="solid"/>
-                      <a:round/>
-                      <a:headEnd type="none" w="med" len="med"/>
-                      <a:tailEnd type="none" w="med" len="med"/>
-                    </a:lnB>
-                    <a:solidFill>
-                      <a:srgbClr val="EDF4EF"/>
-                    </a:solidFill>
-                  </a:tcPr>
-                </a:tc>
-                <a:tc>
-                  <a:txBody>
-                    <a:bodyPr/>
-                    <a:lstStyle/>
-                    <a:p>
-                      <a:pPr indent="0" marL="0">
-                        <a:buNone/>
-                      </a:pPr>
-                      <a:r>
-                        <a:rPr lang="en-US" sz="1400" dirty="0">
-                          <a:solidFill>
-                            <a:srgbClr val="1A2420"/>
-                          </a:solidFill>
-                          <a:latin typeface="Arial" pitchFamily="34" charset="0"/>
-                          <a:ea typeface="Arial" pitchFamily="34" charset="-122"/>
-                          <a:cs typeface="Arial" pitchFamily="34" charset="-120"/>
-                        </a:rPr>
-                        <a:t>вывод катить/не катить</a:t>
-                      </a:r>
-                      <a:endParaRPr lang="en-US" sz="1400" dirty="0">
-                        <a:latin typeface="Arial" charset="0"/>
-                        <a:ea typeface="Arial" charset="0"/>
-                        <a:cs typeface="Arial" charset="0"/>
-                      </a:endParaRPr>
-                    </a:p>
-                  </a:txBody>
-                  <a:tcPr marL="73152" marR="73152" marT="73152" marB="73152" anchor="ctr">
-                    <a:lnL w="12700" cap="flat" cmpd="sng" algn="ctr">
-                      <a:solidFill>
-                        <a:srgbClr val="D8E2DC"/>
-                      </a:solidFill>
-                      <a:prstDash val="solid"/>
-                      <a:round/>
-                      <a:headEnd type="none" w="med" len="med"/>
-                      <a:tailEnd type="none" w="med" len="med"/>
-                    </a:lnL>
-                    <a:lnR w="12700" cap="flat" cmpd="sng" algn="ctr">
-                      <a:solidFill>
-                        <a:srgbClr val="D8E2DC"/>
-                      </a:solidFill>
-                      <a:prstDash val="solid"/>
-                      <a:round/>
-                      <a:headEnd type="none" w="med" len="med"/>
-                      <a:tailEnd type="none" w="med" len="med"/>
-                    </a:lnR>
-                    <a:lnT w="12700" cap="flat" cmpd="sng" algn="ctr">
-                      <a:solidFill>
-                        <a:srgbClr val="D8E2DC"/>
-                      </a:solidFill>
-                      <a:prstDash val="solid"/>
-                      <a:round/>
-                      <a:headEnd type="none" w="med" len="med"/>
-                      <a:tailEnd type="none" w="med" len="med"/>
-                    </a:lnT>
-                    <a:lnB w="12700" cap="flat" cmpd="sng" algn="ctr">
-                      <a:solidFill>
-                        <a:srgbClr val="D8E2DC"/>
-                      </a:solidFill>
-                      <a:prstDash val="solid"/>
-                      <a:round/>
-                      <a:headEnd type="none" w="med" len="med"/>
-                      <a:tailEnd type="none" w="med" len="med"/>
-                    </a:lnB>
-                    <a:solidFill>
-                      <a:srgbClr val="EDF4EF"/>
-                    </a:solidFill>
-                  </a:tcPr>
-                </a:tc>
-                <a:tc>
-                  <a:txBody>
-                    <a:bodyPr/>
-                    <a:lstStyle/>
-                    <a:p>
-                      <a:pPr indent="0" marL="0">
-                        <a:buNone/>
-                      </a:pPr>
-                      <a:r>
-                        <a:rPr lang="en-US" sz="1400" dirty="0">
-                          <a:solidFill>
-                            <a:srgbClr val="1A2420"/>
-                          </a:solidFill>
-                          <a:latin typeface="Arial" pitchFamily="34" charset="0"/>
-                          <a:ea typeface="Arial" pitchFamily="34" charset="-122"/>
-                          <a:cs typeface="Arial" pitchFamily="34" charset="-120"/>
-                        </a:rPr>
-                        <a:t>оценивать по прокси</a:t>
-                      </a:r>
-                      <a:endParaRPr lang="en-US" sz="1400" dirty="0">
-                        <a:latin typeface="Arial" charset="0"/>
-                        <a:ea typeface="Arial" charset="0"/>
-                        <a:cs typeface="Arial" charset="0"/>
-                      </a:endParaRPr>
-                    </a:p>
-                  </a:txBody>
-                  <a:tcPr marL="73152" marR="73152" marT="73152" marB="73152" anchor="ctr">
-                    <a:lnL w="12700" cap="flat" cmpd="sng" algn="ctr">
-                      <a:solidFill>
-                        <a:srgbClr val="D8E2DC"/>
-                      </a:solidFill>
-                      <a:prstDash val="solid"/>
-                      <a:round/>
-                      <a:headEnd type="none" w="med" len="med"/>
-                      <a:tailEnd type="none" w="med" len="med"/>
-                    </a:lnL>
-                    <a:lnR w="12700" cap="flat" cmpd="sng" algn="ctr">
-                      <a:solidFill>
-                        <a:srgbClr val="D8E2DC"/>
-                      </a:solidFill>
-                      <a:prstDash val="solid"/>
-                      <a:round/>
-                      <a:headEnd type="none" w="med" len="med"/>
-                      <a:tailEnd type="none" w="med" len="med"/>
-                    </a:lnR>
-                    <a:lnT w="12700" cap="flat" cmpd="sng" algn="ctr">
-                      <a:solidFill>
-                        <a:srgbClr val="D8E2DC"/>
-                      </a:solidFill>
-                      <a:prstDash val="solid"/>
-                      <a:round/>
-                      <a:headEnd type="none" w="med" len="med"/>
-                      <a:tailEnd type="none" w="med" len="med"/>
-                    </a:lnT>
-                    <a:lnB w="12700" cap="flat" cmpd="sng" algn="ctr">
-                      <a:solidFill>
-                        <a:srgbClr val="D8E2DC"/>
-                      </a:solidFill>
-                      <a:prstDash val="solid"/>
-                      <a:round/>
-                      <a:headEnd type="none" w="med" len="med"/>
-                      <a:tailEnd type="none" w="med" len="med"/>
-                    </a:lnB>
-                    <a:solidFill>
-                      <a:srgbClr val="EDF4EF"/>
-                    </a:solidFill>
-                  </a:tcPr>
-                </a:tc>
-              </a:tr>
-              <a:tr h="603504">
-                <a:tc>
-                  <a:txBody>
-                    <a:bodyPr/>
-                    <a:lstStyle/>
-                    <a:p>
-                      <a:pPr indent="0" marL="0">
-                        <a:buNone/>
-                      </a:pPr>
-                      <a:r>
-                        <a:rPr lang="en-US" sz="1400" dirty="0">
-                          <a:solidFill>
-                            <a:srgbClr val="1A2420"/>
-                          </a:solidFill>
-                          <a:latin typeface="Arial" pitchFamily="34" charset="0"/>
-                          <a:ea typeface="Arial" pitchFamily="34" charset="-122"/>
-                          <a:cs typeface="Arial" pitchFamily="34" charset="-120"/>
-                        </a:rPr>
-                        <a:t>Аналитический проект</a:t>
-                      </a:r>
-                      <a:endParaRPr lang="en-US" sz="1400" dirty="0">
-                        <a:latin typeface="Arial" charset="0"/>
-                        <a:ea typeface="Arial" charset="0"/>
-                        <a:cs typeface="Arial" charset="0"/>
-                      </a:endParaRPr>
-                    </a:p>
-                  </a:txBody>
-                  <a:tcPr marL="73152" marR="73152" marT="73152" marB="73152" anchor="ctr">
-                    <a:lnL w="12700" cap="flat" cmpd="sng" algn="ctr">
-                      <a:solidFill>
-                        <a:srgbClr val="D8E2DC"/>
-                      </a:solidFill>
-                      <a:prstDash val="solid"/>
-                      <a:round/>
-                      <a:headEnd type="none" w="med" len="med"/>
-                      <a:tailEnd type="none" w="med" len="med"/>
-                    </a:lnL>
-                    <a:lnR w="12700" cap="flat" cmpd="sng" algn="ctr">
-                      <a:solidFill>
-                        <a:srgbClr val="D8E2DC"/>
-                      </a:solidFill>
-                      <a:prstDash val="solid"/>
-                      <a:round/>
-                      <a:headEnd type="none" w="med" len="med"/>
-                      <a:tailEnd type="none" w="med" len="med"/>
-                    </a:lnR>
-                    <a:lnT w="12700" cap="flat" cmpd="sng" algn="ctr">
-                      <a:solidFill>
-                        <a:srgbClr val="D8E2DC"/>
-                      </a:solidFill>
-                      <a:prstDash val="solid"/>
-                      <a:round/>
-                      <a:headEnd type="none" w="med" len="med"/>
-                      <a:tailEnd type="none" w="med" len="med"/>
-                    </a:lnT>
-                    <a:lnB w="12700" cap="flat" cmpd="sng" algn="ctr">
-                      <a:solidFill>
-                        <a:srgbClr val="D8E2DC"/>
-                      </a:solidFill>
-                      <a:prstDash val="solid"/>
-                      <a:round/>
-                      <a:headEnd type="none" w="med" len="med"/>
-                      <a:tailEnd type="none" w="med" len="med"/>
-                    </a:lnB>
-                    <a:solidFill>
-                      <a:srgbClr val="FFFFFF"/>
-                    </a:solidFill>
-                  </a:tcPr>
-                </a:tc>
-                <a:tc>
-                  <a:txBody>
-                    <a:bodyPr/>
-                    <a:lstStyle/>
-                    <a:p>
-                      <a:pPr indent="0" marL="0">
-                        <a:buNone/>
-                      </a:pPr>
-                      <a:r>
-                        <a:rPr lang="en-US" sz="1400" dirty="0">
-                          <a:solidFill>
-                            <a:srgbClr val="1A2420"/>
-                          </a:solidFill>
-                          <a:latin typeface="Arial" pitchFamily="34" charset="0"/>
-                          <a:ea typeface="Arial" pitchFamily="34" charset="-122"/>
-                          <a:cs typeface="Arial" pitchFamily="34" charset="-120"/>
-                        </a:rPr>
-                        <a:t>что делать?</a:t>
-                      </a:r>
-                      <a:endParaRPr lang="en-US" sz="1400" dirty="0">
-                        <a:latin typeface="Arial" charset="0"/>
-                        <a:ea typeface="Arial" charset="0"/>
-                        <a:cs typeface="Arial" charset="0"/>
-                      </a:endParaRPr>
-                    </a:p>
-                  </a:txBody>
-                  <a:tcPr marL="73152" marR="73152" marT="73152" marB="73152" anchor="ctr">
-                    <a:lnL w="12700" cap="flat" cmpd="sng" algn="ctr">
-                      <a:solidFill>
-                        <a:srgbClr val="D8E2DC"/>
-                      </a:solidFill>
-                      <a:prstDash val="solid"/>
-                      <a:round/>
-                      <a:headEnd type="none" w="med" len="med"/>
-                      <a:tailEnd type="none" w="med" len="med"/>
-                    </a:lnL>
-                    <a:lnR w="12700" cap="flat" cmpd="sng" algn="ctr">
-                      <a:solidFill>
-                        <a:srgbClr val="D8E2DC"/>
-                      </a:solidFill>
-                      <a:prstDash val="solid"/>
-                      <a:round/>
-                      <a:headEnd type="none" w="med" len="med"/>
-                      <a:tailEnd type="none" w="med" len="med"/>
-                    </a:lnR>
-                    <a:lnT w="12700" cap="flat" cmpd="sng" algn="ctr">
-                      <a:solidFill>
-                        <a:srgbClr val="D8E2DC"/>
-                      </a:solidFill>
-                      <a:prstDash val="solid"/>
-                      <a:round/>
-                      <a:headEnd type="none" w="med" len="med"/>
-                      <a:tailEnd type="none" w="med" len="med"/>
-                    </a:lnT>
-                    <a:lnB w="12700" cap="flat" cmpd="sng" algn="ctr">
-                      <a:solidFill>
-                        <a:srgbClr val="D8E2DC"/>
-                      </a:solidFill>
-                      <a:prstDash val="solid"/>
-                      <a:round/>
-                      <a:headEnd type="none" w="med" len="med"/>
-                      <a:tailEnd type="none" w="med" len="med"/>
-                    </a:lnB>
-                    <a:solidFill>
-                      <a:srgbClr val="FFFFFF"/>
-                    </a:solidFill>
-                  </a:tcPr>
-                </a:tc>
-                <a:tc>
-                  <a:txBody>
-                    <a:bodyPr/>
-                    <a:lstStyle/>
-                    <a:p>
-                      <a:pPr indent="0" marL="0">
-                        <a:buNone/>
-                      </a:pPr>
-                      <a:r>
-                        <a:rPr lang="en-US" sz="1400" dirty="0">
-                          <a:solidFill>
-                            <a:srgbClr val="1A2420"/>
-                          </a:solidFill>
-                          <a:latin typeface="Arial" pitchFamily="34" charset="0"/>
-                          <a:ea typeface="Arial" pitchFamily="34" charset="-122"/>
-                          <a:cs typeface="Arial" pitchFamily="34" charset="-120"/>
-                        </a:rPr>
-                        <a:t>модель + план + эффект</a:t>
-                      </a:r>
-                      <a:endParaRPr lang="en-US" sz="1400" dirty="0">
-                        <a:latin typeface="Arial" charset="0"/>
-                        <a:ea typeface="Arial" charset="0"/>
-                        <a:cs typeface="Arial" charset="0"/>
-                      </a:endParaRPr>
-                    </a:p>
-                  </a:txBody>
-                  <a:tcPr marL="73152" marR="73152" marT="73152" marB="73152" anchor="ctr">
-                    <a:lnL w="12700" cap="flat" cmpd="sng" algn="ctr">
-                      <a:solidFill>
-                        <a:srgbClr val="D8E2DC"/>
-                      </a:solidFill>
-                      <a:prstDash val="solid"/>
-                      <a:round/>
-                      <a:headEnd type="none" w="med" len="med"/>
-                      <a:tailEnd type="none" w="med" len="med"/>
-                    </a:lnL>
-                    <a:lnR w="12700" cap="flat" cmpd="sng" algn="ctr">
-                      <a:solidFill>
-                        <a:srgbClr val="D8E2DC"/>
-                      </a:solidFill>
-                      <a:prstDash val="solid"/>
-                      <a:round/>
-                      <a:headEnd type="none" w="med" len="med"/>
-                      <a:tailEnd type="none" w="med" len="med"/>
-                    </a:lnR>
-                    <a:lnT w="12700" cap="flat" cmpd="sng" algn="ctr">
-                      <a:solidFill>
-                        <a:srgbClr val="D8E2DC"/>
-                      </a:solidFill>
-                      <a:prstDash val="solid"/>
-                      <a:round/>
-                      <a:headEnd type="none" w="med" len="med"/>
-                      <a:tailEnd type="none" w="med" len="med"/>
-                    </a:lnT>
-                    <a:lnB w="12700" cap="flat" cmpd="sng" algn="ctr">
-                      <a:solidFill>
-                        <a:srgbClr val="D8E2DC"/>
-                      </a:solidFill>
-                      <a:prstDash val="solid"/>
-                      <a:round/>
-                      <a:headEnd type="none" w="med" len="med"/>
-                      <a:tailEnd type="none" w="med" len="med"/>
-                    </a:lnB>
-                    <a:solidFill>
-                      <a:srgbClr val="FFFFFF"/>
-                    </a:solidFill>
-                  </a:tcPr>
-                </a:tc>
-                <a:tc>
-                  <a:txBody>
-                    <a:bodyPr/>
-                    <a:lstStyle/>
-                    <a:p>
-                      <a:pPr indent="0" marL="0">
-                        <a:buNone/>
-                      </a:pPr>
-                      <a:r>
-                        <a:rPr lang="en-US" sz="1400" dirty="0">
-                          <a:solidFill>
-                            <a:srgbClr val="1A2420"/>
-                          </a:solidFill>
-                          <a:latin typeface="Arial" pitchFamily="34" charset="0"/>
-                          <a:ea typeface="Arial" pitchFamily="34" charset="-122"/>
-                          <a:cs typeface="Arial" pitchFamily="34" charset="-120"/>
-                        </a:rPr>
-                        <a:t>сделать модель вместо ответа</a:t>
-                      </a:r>
-                      <a:endParaRPr lang="en-US" sz="1400" dirty="0">
-                        <a:latin typeface="Arial" charset="0"/>
-                        <a:ea typeface="Arial" charset="0"/>
-                        <a:cs typeface="Arial" charset="0"/>
-                      </a:endParaRPr>
-                    </a:p>
-                  </a:txBody>
-                  <a:tcPr marL="73152" marR="73152" marT="73152" marB="73152" anchor="ctr">
-                    <a:lnL w="12700" cap="flat" cmpd="sng" algn="ctr">
-                      <a:solidFill>
-                        <a:srgbClr val="D8E2DC"/>
-                      </a:solidFill>
-                      <a:prstDash val="solid"/>
-                      <a:round/>
-                      <a:headEnd type="none" w="med" len="med"/>
-                      <a:tailEnd type="none" w="med" len="med"/>
-                    </a:lnL>
-                    <a:lnR w="12700" cap="flat" cmpd="sng" algn="ctr">
-                      <a:solidFill>
-                        <a:srgbClr val="D8E2DC"/>
-                      </a:solidFill>
-                      <a:prstDash val="solid"/>
-                      <a:round/>
-                      <a:headEnd type="none" w="med" len="med"/>
-                      <a:tailEnd type="none" w="med" len="med"/>
-                    </a:lnR>
-                    <a:lnT w="12700" cap="flat" cmpd="sng" algn="ctr">
-                      <a:solidFill>
-                        <a:srgbClr val="D8E2DC"/>
-                      </a:solidFill>
-                      <a:prstDash val="solid"/>
-                      <a:round/>
-                      <a:headEnd type="none" w="med" len="med"/>
-                      <a:tailEnd type="none" w="med" len="med"/>
-                    </a:lnT>
-                    <a:lnB w="12700" cap="flat" cmpd="sng" algn="ctr">
-                      <a:solidFill>
-                        <a:srgbClr val="D8E2DC"/>
-                      </a:solidFill>
-                      <a:prstDash val="solid"/>
-                      <a:round/>
-                      <a:headEnd type="none" w="med" len="med"/>
-                      <a:tailEnd type="none" w="med" len="med"/>
-                    </a:lnB>
-                    <a:solidFill>
-                      <a:srgbClr val="FFFFFF"/>
-                    </a:solidFill>
-                  </a:tcPr>
-                </a:tc>
-              </a:tr>
-            </a:tbl>
-          </a:graphicData>
-        </a:graphic>
-      </p:graphicFrame>
-      <p:sp>
-        <p:nvSpPr>
-          <p:cNvPr id="6" name="Text 3"/>
-          <p:cNvSpPr/>
-          <p:nvPr/>
-        </p:nvSpPr>
-        <p:spPr>
-          <a:xfrm>
-            <a:off x="548640" y="5943600"/>
+      <p:sp>
+        <p:nvSpPr>
+          <p:cNvPr id="5" name="Shape 3"/>
+          <p:cNvSpPr/>
+          <p:nvPr/>
+        </p:nvSpPr>
+        <p:spPr>
+          <a:xfrm>
+            <a:off x="548640" y="2103120"/>
+            <a:ext cx="2331720" cy="1691640"/>
+          </a:xfrm>
+          <a:prstGeom prst="roundRect">
+            <a:avLst>
+              <a:gd name="adj" fmla="val 4324"/>
+            </a:avLst>
+          </a:prstGeom>
+          <a:solidFill>
+            <a:srgbClr val="EDF4EF"/>
+          </a:solidFill>
+          <a:ln/>
+        </p:spPr>
+      </p:sp>
+      <p:sp>
+        <p:nvSpPr>
+          <p:cNvPr id="6" name="Text 4"/>
+          <p:cNvSpPr/>
+          <p:nvPr/>
+        </p:nvSpPr>
+        <p:spPr>
+          <a:xfrm>
+            <a:off x="749808" y="2286000"/>
+            <a:ext cx="1920240" cy="365760"/>
+          </a:xfrm>
+          <a:prstGeom prst="rect">
+            <a:avLst/>
+          </a:prstGeom>
+          <a:noFill/>
+          <a:ln/>
+        </p:spPr>
+        <p:txBody>
+          <a:bodyPr wrap="square" lIns="0" tIns="0" rIns="0" bIns="0" rtlCol="0" anchor="ctr"/>
+          <a:lstStyle/>
+          <a:p>
+            <a:pPr indent="0" marL="0">
+              <a:buNone/>
+            </a:pPr>
+            <a:r>
+              <a:rPr lang="en-US" sz="1400" b="1" spc="100" kern="0" dirty="0">
+                <a:solidFill>
+                  <a:srgbClr val="5C6B63"/>
+                </a:solidFill>
+                <a:latin typeface="Arial" pitchFamily="34" charset="0"/>
+                <a:ea typeface="Arial" pitchFamily="34" charset="-122"/>
+                <a:cs typeface="Arial" pitchFamily="34" charset="-120"/>
+              </a:rPr>
+              <a:t>Бизнес</a:t>
+            </a:r>
+            <a:endParaRPr lang="en-US" sz="1400" dirty="0"/>
+          </a:p>
+        </p:txBody>
+      </p:sp>
+      <p:sp>
+        <p:nvSpPr>
+          <p:cNvPr id="7" name="Text 5"/>
+          <p:cNvSpPr/>
+          <p:nvPr/>
+        </p:nvSpPr>
+        <p:spPr>
+          <a:xfrm>
+            <a:off x="749808" y="2697480"/>
+            <a:ext cx="1965960" cy="960120"/>
+          </a:xfrm>
+          <a:prstGeom prst="rect">
+            <a:avLst/>
+          </a:prstGeom>
+          <a:noFill/>
+          <a:ln/>
+        </p:spPr>
+        <p:txBody>
+          <a:bodyPr wrap="square" lIns="0" tIns="0" rIns="0" bIns="0" rtlCol="0" anchor="ctr"/>
+          <a:lstStyle/>
+          <a:p>
+            <a:pPr indent="0" marL="0">
+              <a:buNone/>
+            </a:pPr>
+            <a:r>
+              <a:rPr lang="en-US" sz="1600" dirty="0">
+                <a:solidFill>
+                  <a:srgbClr val="1A2420"/>
+                </a:solidFill>
+                <a:latin typeface="Arial" pitchFamily="34" charset="0"/>
+                <a:ea typeface="Arial" pitchFamily="34" charset="-122"/>
+                <a:cs typeface="Arial" pitchFamily="34" charset="-120"/>
+              </a:rPr>
+              <a:t>«Что-то отток растёт»</a:t>
+            </a:r>
+            <a:endParaRPr lang="en-US" sz="1600" dirty="0"/>
+          </a:p>
+        </p:txBody>
+      </p:sp>
+      <p:sp>
+        <p:nvSpPr>
+          <p:cNvPr id="8" name="Text 6"/>
+          <p:cNvSpPr/>
+          <p:nvPr/>
+        </p:nvSpPr>
+        <p:spPr>
+          <a:xfrm>
+            <a:off x="2889504" y="2697480"/>
+            <a:ext cx="411480" cy="548640"/>
+          </a:xfrm>
+          <a:prstGeom prst="rect">
+            <a:avLst/>
+          </a:prstGeom>
+          <a:noFill/>
+          <a:ln/>
+        </p:spPr>
+        <p:txBody>
+          <a:bodyPr wrap="square" lIns="0" tIns="0" rIns="0" bIns="0" rtlCol="0" anchor="ctr"/>
+          <a:lstStyle/>
+          <a:p>
+            <a:pPr indent="0" marL="0">
+              <a:buNone/>
+            </a:pPr>
+            <a:r>
+              <a:rPr lang="en-US" sz="2400" b="1" dirty="0">
+                <a:solidFill>
+                  <a:srgbClr val="5C6B63"/>
+                </a:solidFill>
+                <a:latin typeface="Arial" pitchFamily="34" charset="0"/>
+                <a:ea typeface="Arial" pitchFamily="34" charset="-122"/>
+                <a:cs typeface="Arial" pitchFamily="34" charset="-120"/>
+              </a:rPr>
+              <a:t>→</a:t>
+            </a:r>
+            <a:endParaRPr lang="en-US" sz="2400" dirty="0"/>
+          </a:p>
+        </p:txBody>
+      </p:sp>
+      <p:sp>
+        <p:nvSpPr>
+          <p:cNvPr id="9" name="Shape 7"/>
+          <p:cNvSpPr/>
+          <p:nvPr/>
+        </p:nvSpPr>
+        <p:spPr>
+          <a:xfrm>
+            <a:off x="3291840" y="2103120"/>
+            <a:ext cx="2331720" cy="1691640"/>
+          </a:xfrm>
+          <a:prstGeom prst="roundRect">
+            <a:avLst>
+              <a:gd name="adj" fmla="val 4324"/>
+            </a:avLst>
+          </a:prstGeom>
+          <a:solidFill>
+            <a:srgbClr val="EDF4EF"/>
+          </a:solidFill>
+          <a:ln/>
+        </p:spPr>
+      </p:sp>
+      <p:sp>
+        <p:nvSpPr>
+          <p:cNvPr id="10" name="Text 8"/>
+          <p:cNvSpPr/>
+          <p:nvPr/>
+        </p:nvSpPr>
+        <p:spPr>
+          <a:xfrm>
+            <a:off x="3493008" y="2286000"/>
+            <a:ext cx="1920240" cy="365760"/>
+          </a:xfrm>
+          <a:prstGeom prst="rect">
+            <a:avLst/>
+          </a:prstGeom>
+          <a:noFill/>
+          <a:ln/>
+        </p:spPr>
+        <p:txBody>
+          <a:bodyPr wrap="square" lIns="0" tIns="0" rIns="0" bIns="0" rtlCol="0" anchor="ctr"/>
+          <a:lstStyle/>
+          <a:p>
+            <a:pPr indent="0" marL="0">
+              <a:buNone/>
+            </a:pPr>
+            <a:r>
+              <a:rPr lang="en-US" sz="1400" b="1" spc="100" kern="0" dirty="0">
+                <a:solidFill>
+                  <a:srgbClr val="5C6B63"/>
+                </a:solidFill>
+                <a:latin typeface="Arial" pitchFamily="34" charset="0"/>
+                <a:ea typeface="Arial" pitchFamily="34" charset="-122"/>
+                <a:cs typeface="Arial" pitchFamily="34" charset="-120"/>
+              </a:rPr>
+              <a:t>Продакт</a:t>
+            </a:r>
+            <a:endParaRPr lang="en-US" sz="1400" dirty="0"/>
+          </a:p>
+        </p:txBody>
+      </p:sp>
+      <p:sp>
+        <p:nvSpPr>
+          <p:cNvPr id="11" name="Text 9"/>
+          <p:cNvSpPr/>
+          <p:nvPr/>
+        </p:nvSpPr>
+        <p:spPr>
+          <a:xfrm>
+            <a:off x="3493008" y="2697480"/>
+            <a:ext cx="1965960" cy="960120"/>
+          </a:xfrm>
+          <a:prstGeom prst="rect">
+            <a:avLst/>
+          </a:prstGeom>
+          <a:noFill/>
+          <a:ln/>
+        </p:spPr>
+        <p:txBody>
+          <a:bodyPr wrap="square" lIns="0" tIns="0" rIns="0" bIns="0" rtlCol="0" anchor="ctr"/>
+          <a:lstStyle/>
+          <a:p>
+            <a:pPr indent="0" marL="0">
+              <a:buNone/>
+            </a:pPr>
+            <a:r>
+              <a:rPr lang="en-US" sz="1600" dirty="0">
+                <a:solidFill>
+                  <a:srgbClr val="1A2420"/>
+                </a:solidFill>
+                <a:latin typeface="Arial" pitchFamily="34" charset="0"/>
+                <a:ea typeface="Arial" pitchFamily="34" charset="-122"/>
+                <a:cs typeface="Arial" pitchFamily="34" charset="-120"/>
+              </a:rPr>
+              <a:t>«Нужна churn-модель»</a:t>
+            </a:r>
+            <a:endParaRPr lang="en-US" sz="1600" dirty="0"/>
+          </a:p>
+        </p:txBody>
+      </p:sp>
+      <p:sp>
+        <p:nvSpPr>
+          <p:cNvPr id="12" name="Text 10"/>
+          <p:cNvSpPr/>
+          <p:nvPr/>
+        </p:nvSpPr>
+        <p:spPr>
+          <a:xfrm>
+            <a:off x="5632704" y="2697480"/>
+            <a:ext cx="411480" cy="548640"/>
+          </a:xfrm>
+          <a:prstGeom prst="rect">
+            <a:avLst/>
+          </a:prstGeom>
+          <a:noFill/>
+          <a:ln/>
+        </p:spPr>
+        <p:txBody>
+          <a:bodyPr wrap="square" lIns="0" tIns="0" rIns="0" bIns="0" rtlCol="0" anchor="ctr"/>
+          <a:lstStyle/>
+          <a:p>
+            <a:pPr indent="0" marL="0">
+              <a:buNone/>
+            </a:pPr>
+            <a:r>
+              <a:rPr lang="en-US" sz="2400" b="1" dirty="0">
+                <a:solidFill>
+                  <a:srgbClr val="5C6B63"/>
+                </a:solidFill>
+                <a:latin typeface="Arial" pitchFamily="34" charset="0"/>
+                <a:ea typeface="Arial" pitchFamily="34" charset="-122"/>
+                <a:cs typeface="Arial" pitchFamily="34" charset="-120"/>
+              </a:rPr>
+              <a:t>→</a:t>
+            </a:r>
+            <a:endParaRPr lang="en-US" sz="2400" dirty="0"/>
+          </a:p>
+        </p:txBody>
+      </p:sp>
+      <p:sp>
+        <p:nvSpPr>
+          <p:cNvPr id="13" name="Shape 11"/>
+          <p:cNvSpPr/>
+          <p:nvPr/>
+        </p:nvSpPr>
+        <p:spPr>
+          <a:xfrm>
+            <a:off x="6035040" y="2103120"/>
+            <a:ext cx="2331720" cy="1691640"/>
+          </a:xfrm>
+          <a:prstGeom prst="roundRect">
+            <a:avLst>
+              <a:gd name="adj" fmla="val 4324"/>
+            </a:avLst>
+          </a:prstGeom>
+          <a:solidFill>
+            <a:srgbClr val="EDF4EF"/>
+          </a:solidFill>
+          <a:ln/>
+        </p:spPr>
+      </p:sp>
+      <p:sp>
+        <p:nvSpPr>
+          <p:cNvPr id="14" name="Text 12"/>
+          <p:cNvSpPr/>
+          <p:nvPr/>
+        </p:nvSpPr>
+        <p:spPr>
+          <a:xfrm>
+            <a:off x="6236208" y="2286000"/>
+            <a:ext cx="1920240" cy="365760"/>
+          </a:xfrm>
+          <a:prstGeom prst="rect">
+            <a:avLst/>
+          </a:prstGeom>
+          <a:noFill/>
+          <a:ln/>
+        </p:spPr>
+        <p:txBody>
+          <a:bodyPr wrap="square" lIns="0" tIns="0" rIns="0" bIns="0" rtlCol="0" anchor="ctr"/>
+          <a:lstStyle/>
+          <a:p>
+            <a:pPr indent="0" marL="0">
+              <a:buNone/>
+            </a:pPr>
+            <a:r>
+              <a:rPr lang="en-US" sz="1400" b="1" spc="100" kern="0" dirty="0">
+                <a:solidFill>
+                  <a:srgbClr val="5C6B63"/>
+                </a:solidFill>
+                <a:latin typeface="Arial" pitchFamily="34" charset="0"/>
+                <a:ea typeface="Arial" pitchFamily="34" charset="-122"/>
+                <a:cs typeface="Arial" pitchFamily="34" charset="-120"/>
+              </a:rPr>
+              <a:t>DS</a:t>
+            </a:r>
+            <a:endParaRPr lang="en-US" sz="1400" dirty="0"/>
+          </a:p>
+        </p:txBody>
+      </p:sp>
+      <p:sp>
+        <p:nvSpPr>
+          <p:cNvPr id="15" name="Text 13"/>
+          <p:cNvSpPr/>
+          <p:nvPr/>
+        </p:nvSpPr>
+        <p:spPr>
+          <a:xfrm>
+            <a:off x="6236208" y="2697480"/>
+            <a:ext cx="1965960" cy="960120"/>
+          </a:xfrm>
+          <a:prstGeom prst="rect">
+            <a:avLst/>
+          </a:prstGeom>
+          <a:noFill/>
+          <a:ln/>
+        </p:spPr>
+        <p:txBody>
+          <a:bodyPr wrap="square" lIns="0" tIns="0" rIns="0" bIns="0" rtlCol="0" anchor="ctr"/>
+          <a:lstStyle/>
+          <a:p>
+            <a:pPr indent="0" marL="0">
+              <a:buNone/>
+            </a:pPr>
+            <a:r>
+              <a:rPr lang="en-US" sz="1600" dirty="0">
+                <a:solidFill>
+                  <a:srgbClr val="1A2420"/>
+                </a:solidFill>
+                <a:latin typeface="Arial" pitchFamily="34" charset="0"/>
+                <a:ea typeface="Arial" pitchFamily="34" charset="-122"/>
+                <a:cs typeface="Arial" pitchFamily="34" charset="-120"/>
+              </a:rPr>
+              <a:t>«Обучите классификатор оттока»</a:t>
+            </a:r>
+            <a:endParaRPr lang="en-US" sz="1600" dirty="0"/>
+          </a:p>
+        </p:txBody>
+      </p:sp>
+      <p:sp>
+        <p:nvSpPr>
+          <p:cNvPr id="16" name="Text 14"/>
+          <p:cNvSpPr/>
+          <p:nvPr/>
+        </p:nvSpPr>
+        <p:spPr>
+          <a:xfrm>
+            <a:off x="8375904" y="2697480"/>
+            <a:ext cx="411480" cy="548640"/>
+          </a:xfrm>
+          <a:prstGeom prst="rect">
+            <a:avLst/>
+          </a:prstGeom>
+          <a:noFill/>
+          <a:ln/>
+        </p:spPr>
+        <p:txBody>
+          <a:bodyPr wrap="square" lIns="0" tIns="0" rIns="0" bIns="0" rtlCol="0" anchor="ctr"/>
+          <a:lstStyle/>
+          <a:p>
+            <a:pPr indent="0" marL="0">
+              <a:buNone/>
+            </a:pPr>
+            <a:r>
+              <a:rPr lang="en-US" sz="2400" b="1" dirty="0">
+                <a:solidFill>
+                  <a:srgbClr val="5C6B63"/>
+                </a:solidFill>
+                <a:latin typeface="Arial" pitchFamily="34" charset="0"/>
+                <a:ea typeface="Arial" pitchFamily="34" charset="-122"/>
+                <a:cs typeface="Arial" pitchFamily="34" charset="-120"/>
+              </a:rPr>
+              <a:t>→</a:t>
+            </a:r>
+            <a:endParaRPr lang="en-US" sz="2400" dirty="0"/>
+          </a:p>
+        </p:txBody>
+      </p:sp>
+      <p:sp>
+        <p:nvSpPr>
+          <p:cNvPr id="17" name="Shape 15"/>
+          <p:cNvSpPr/>
+          <p:nvPr/>
+        </p:nvSpPr>
+        <p:spPr>
+          <a:xfrm>
+            <a:off x="8778240" y="2103120"/>
+            <a:ext cx="2331720" cy="1691640"/>
+          </a:xfrm>
+          <a:prstGeom prst="roundRect">
+            <a:avLst>
+              <a:gd name="adj" fmla="val 4324"/>
+            </a:avLst>
+          </a:prstGeom>
+          <a:solidFill>
+            <a:srgbClr val="E8590C"/>
+          </a:solidFill>
+          <a:ln/>
+        </p:spPr>
+      </p:sp>
+      <p:sp>
+        <p:nvSpPr>
+          <p:cNvPr id="18" name="Text 16"/>
+          <p:cNvSpPr/>
+          <p:nvPr/>
+        </p:nvSpPr>
+        <p:spPr>
+          <a:xfrm>
+            <a:off x="8979408" y="2286000"/>
+            <a:ext cx="1920240" cy="365760"/>
+          </a:xfrm>
+          <a:prstGeom prst="rect">
+            <a:avLst/>
+          </a:prstGeom>
+          <a:noFill/>
+          <a:ln/>
+        </p:spPr>
+        <p:txBody>
+          <a:bodyPr wrap="square" lIns="0" tIns="0" rIns="0" bIns="0" rtlCol="0" anchor="ctr"/>
+          <a:lstStyle/>
+          <a:p>
+            <a:pPr indent="0" marL="0">
+              <a:buNone/>
+            </a:pPr>
+            <a:r>
+              <a:rPr lang="en-US" sz="1400" b="1" spc="100" kern="0" dirty="0">
+                <a:solidFill>
+                  <a:srgbClr val="FFE3D1"/>
+                </a:solidFill>
+                <a:latin typeface="Arial" pitchFamily="34" charset="0"/>
+                <a:ea typeface="Arial" pitchFamily="34" charset="-122"/>
+                <a:cs typeface="Arial" pitchFamily="34" charset="-120"/>
+              </a:rPr>
+              <a:t>Через месяц</a:t>
+            </a:r>
+            <a:endParaRPr lang="en-US" sz="1400" dirty="0"/>
+          </a:p>
+        </p:txBody>
+      </p:sp>
+      <p:sp>
+        <p:nvSpPr>
+          <p:cNvPr id="19" name="Text 17"/>
+          <p:cNvSpPr/>
+          <p:nvPr/>
+        </p:nvSpPr>
+        <p:spPr>
+          <a:xfrm>
+            <a:off x="8979408" y="2697480"/>
+            <a:ext cx="1965960" cy="960120"/>
+          </a:xfrm>
+          <a:prstGeom prst="rect">
+            <a:avLst/>
+          </a:prstGeom>
+          <a:noFill/>
+          <a:ln/>
+        </p:spPr>
+        <p:txBody>
+          <a:bodyPr wrap="square" lIns="0" tIns="0" rIns="0" bIns="0" rtlCol="0" anchor="ctr"/>
+          <a:lstStyle/>
+          <a:p>
+            <a:pPr indent="0" marL="0">
+              <a:buNone/>
+            </a:pPr>
+            <a:r>
+              <a:rPr lang="en-US" sz="1600" b="1" dirty="0">
+                <a:solidFill>
+                  <a:srgbClr val="FFFFFF"/>
+                </a:solidFill>
+                <a:latin typeface="Arial" pitchFamily="34" charset="0"/>
+                <a:ea typeface="Arial" pitchFamily="34" charset="-122"/>
+                <a:cs typeface="Arial" pitchFamily="34" charset="-120"/>
+              </a:rPr>
+              <a:t>AUC 0.87 · отток не сдвинулся</a:t>
+            </a:r>
+            <a:endParaRPr lang="en-US" sz="1600" dirty="0"/>
+          </a:p>
+        </p:txBody>
+      </p:sp>
+      <p:sp>
+        <p:nvSpPr>
+          <p:cNvPr id="20" name="Text 18"/>
+          <p:cNvSpPr/>
+          <p:nvPr/>
+        </p:nvSpPr>
+        <p:spPr>
+          <a:xfrm>
+            <a:off x="548640" y="4251960"/>
             <a:ext cx="10424160" cy="548640"/>
           </a:xfrm>
           <a:prstGeom prst="rect">
@@ -17049,23 +18703,62 @@
               <a:buNone/>
             </a:pPr>
             <a:r>
-              <a:rPr lang="en-US" sz="1400" dirty="0">
-                <a:solidFill>
-                  <a:srgbClr val="5C6B63"/>
-                </a:solidFill>
-                <a:latin typeface="Arial" pitchFamily="34" charset="0"/>
-                <a:ea typeface="Arial" pitchFamily="34" charset="-122"/>
-                <a:cs typeface="Arial" pitchFamily="34" charset="-120"/>
-              </a:rPr>
-              <a:t>Аналитика — это спектр, а не «дашборды» и не «ML». Спор о жанре — частая причина конфликтов: ad-hoc ждут за час, проект — за месяц.</a:t>
-            </a:r>
-            <a:endParaRPr lang="en-US" sz="1400" dirty="0"/>
-          </a:p>
-        </p:txBody>
-      </p:sp>
-      <p:sp>
-        <p:nvSpPr>
-          <p:cNvPr id="7" name="Text 4"/>
+              <a:rPr lang="en-US" sz="2100" b="1" dirty="0">
+                <a:solidFill>
+                  <a:srgbClr val="1E6B47"/>
+                </a:solidFill>
+                <a:latin typeface="Arial" pitchFamily="34" charset="0"/>
+                <a:ea typeface="Arial" pitchFamily="34" charset="-122"/>
+                <a:cs typeface="Arial" pitchFamily="34" charset="-120"/>
+              </a:rPr>
+              <a:t>Кто-то должен был спросить: что мы будем делать с предсказанием — и как оно вернёт деньги?</a:t>
+            </a:r>
+            <a:endParaRPr lang="en-US" sz="2100" dirty="0"/>
+          </a:p>
+        </p:txBody>
+      </p:sp>
+      <p:sp>
+        <p:nvSpPr>
+          <p:cNvPr id="21" name="Text 19"/>
+          <p:cNvSpPr/>
+          <p:nvPr/>
+        </p:nvSpPr>
+        <p:spPr>
+          <a:xfrm>
+            <a:off x="548640" y="5029200"/>
+            <a:ext cx="10424160" cy="822960"/>
+          </a:xfrm>
+          <a:prstGeom prst="rect">
+            <a:avLst/>
+          </a:prstGeom>
+          <a:noFill/>
+          <a:ln/>
+        </p:spPr>
+        <p:txBody>
+          <a:bodyPr wrap="square" lIns="0" tIns="0" rIns="0" bIns="0" rtlCol="0" anchor="ctr"/>
+          <a:lstStyle/>
+          <a:p>
+            <a:pPr indent="0" marL="0">
+              <a:buNone/>
+            </a:pPr>
+            <a:r>
+              <a:rPr lang="en-US" sz="1700" dirty="0">
+                <a:solidFill>
+                  <a:srgbClr val="1A2420"/>
+                </a:solidFill>
+                <a:latin typeface="Arial" pitchFamily="34" charset="0"/>
+                <a:ea typeface="Arial" pitchFamily="34" charset="-122"/>
+                <a:cs typeface="Arial" pitchFamily="34" charset="-120"/>
+              </a:rPr>
+              <a:t>Эта роль — аналитик в широком смысле. Не «человек-функция качества модели»: сформулировал задачу, построил, измерил эффект, ответил бизнесу.</a:t>
+            </a:r>
+            <a:endParaRPr lang="en-US" sz="1700" dirty="0"/>
+          </a:p>
+        </p:txBody>
+      </p:sp>
+      <p:sp>
+        <p:nvSpPr>
+          <p:cNvPr id="22" name="Text 20"/>
           <p:cNvSpPr/>
           <p:nvPr/>
         </p:nvSpPr>
